--- a/Legal_AI_Academic_Presentation.pptx
+++ b/Legal_AI_Academic_Presentation.pptx
@@ -26,6 +26,11 @@
     <p:sldId id="274" r:id="rId25"/>
     <p:sldId id="275" r:id="rId26"/>
     <p:sldId id="276" r:id="rId27"/>
+    <p:sldId id="277" r:id="rId28"/>
+    <p:sldId id="278" r:id="rId29"/>
+    <p:sldId id="279" r:id="rId30"/>
+    <p:sldId id="280" r:id="rId31"/>
+    <p:sldId id="281" r:id="rId32"/>
   </p:sldIdLst>
   <p:sldSz cx="12191695" cy="6858000" type="screen4x3"/>
   <p:notesSz cx="6858000" cy="9144000"/>
@@ -3204,8 +3209,8 @@
         </p:nvSpPr>
         <p:spPr>
           <a:xfrm>
-            <a:off x="914400" y="2011680"/>
-            <a:ext cx="10362895" cy="2377440"/>
+            <a:off x="914400" y="1920240"/>
+            <a:ext cx="10362895" cy="2468880"/>
           </a:xfrm>
           <a:prstGeom prst="rect">
             <a:avLst/>
@@ -3249,7 +3254,7 @@
                   <a:srgbClr val="BFD3E6"/>
                 </a:solidFill>
               </a:rPr>
-              <a:t>Trilingual (Arabic · English · French) · Grounded · Benchmarked</a:t>
+              <a:t>Trilingual (Arabic · English · French) · Grounded · Rigorously Benchmarked</a:t>
             </a:r>
           </a:p>
           <a:p>
@@ -3291,7 +3296,7 @@
         <p:spPr>
           <a:xfrm>
             <a:off x="0" y="0"/>
-            <a:ext cx="12191695" cy="1005840"/>
+            <a:ext cx="12191695" cy="960120"/>
           </a:xfrm>
           <a:prstGeom prst="rect">
             <a:avLst/>
@@ -3334,8 +3339,8 @@
         </p:nvSpPr>
         <p:spPr>
           <a:xfrm>
-            <a:off x="457200" y="91440"/>
-            <a:ext cx="11277295" cy="868680"/>
+            <a:off x="457200" y="73152"/>
+            <a:ext cx="11277295" cy="822960"/>
           </a:xfrm>
           <a:prstGeom prst="rect">
             <a:avLst/>
@@ -3349,22 +3354,12 @@
           <a:lstStyle/>
           <a:p>
             <a:r>
-              <a:rPr sz="2800" b="1" i="0">
+              <a:rPr sz="2700" b="1" i="0">
                 <a:solidFill>
                   <a:srgbClr val="FFFFFF"/>
                 </a:solidFill>
               </a:rPr>
-              <a:t>9. The Web Application (UI)</a:t>
-            </a:r>
-          </a:p>
-          <a:p>
-            <a:r>
-              <a:rPr sz="1300" b="0" i="0">
-                <a:solidFill>
-                  <a:srgbClr val="BFD3E6"/>
-                </a:solidFill>
-              </a:rPr>
-              <a:t>Built with Streamlit — three working areas</a:t>
+              <a:t>9. Retrieval (RAG)</a:t>
             </a:r>
           </a:p>
         </p:txBody>
@@ -3377,8 +3372,8 @@
         </p:nvSpPr>
         <p:spPr>
           <a:xfrm>
-            <a:off x="640080" y="1371600"/>
-            <a:ext cx="10911535" cy="5120640"/>
+            <a:off x="640080" y="1188720"/>
+            <a:ext cx="10911535" cy="5349240"/>
           </a:xfrm>
           <a:prstGeom prst="rect">
             <a:avLst/>
@@ -3393,7 +3388,7 @@
           <a:p>
             <a:pPr>
               <a:spcAft>
-                <a:spcPts val="1200"/>
+                <a:spcPts val="800"/>
               </a:spcAft>
             </a:pPr>
             <a:r>
@@ -3402,7 +3397,7 @@
                   <a:srgbClr val="1E3A5F"/>
                 </a:solidFill>
               </a:rPr>
-              <a:t>• 🔗 End-to-End Pipeline: </a:t>
+              <a:t>• Method: </a:t>
             </a:r>
             <a:r>
               <a:rPr sz="1700" b="0" i="0">
@@ -3410,13 +3405,13 @@
                   <a:srgbClr val="444444"/>
                 </a:solidFill>
               </a:rPr>
-              <a:t>ask a question, pick your role, run all 7 agents; see the memo, sources, trust indicators, tokens/cost.</a:t>
-            </a:r>
-          </a:p>
-          <a:p>
-            <a:pPr>
-              <a:spcAft>
-                <a:spcPts val="1200"/>
+              <a:t>Hybrid search = keyword (BM25) + meaning (dense embeddings) — chosen by benchmark evidence.</a:t>
+            </a:r>
+          </a:p>
+          <a:p>
+            <a:pPr>
+              <a:spcAft>
+                <a:spcPts val="800"/>
               </a:spcAft>
             </a:pPr>
             <a:r>
@@ -3425,7 +3420,7 @@
                   <a:srgbClr val="1E3A5F"/>
                 </a:solidFill>
               </a:rPr>
-              <a:t>• 🔬 Individual Agents: </a:t>
+              <a:t>• Embeddings: </a:t>
             </a:r>
             <a:r>
               <a:rPr sz="1700" b="0" i="0">
@@ -3433,13 +3428,13 @@
                   <a:srgbClr val="444444"/>
                 </a:solidFill>
               </a:rPr>
-              <a:t>run and inspect each agent in isolation (inputs, outputs, retrieved chunks) for debugging.</a:t>
-            </a:r>
-          </a:p>
-          <a:p>
-            <a:pPr>
-              <a:spcAft>
-                <a:spcPts val="1200"/>
+              <a:t>multilingual sentence-transformer (mpnet), running locally and free.</a:t>
+            </a:r>
+          </a:p>
+          <a:p>
+            <a:pPr>
+              <a:spcAft>
+                <a:spcPts val="800"/>
               </a:spcAft>
             </a:pPr>
             <a:r>
@@ -3448,7 +3443,7 @@
                   <a:srgbClr val="1E3A5F"/>
                 </a:solidFill>
               </a:rPr>
-              <a:t>• 📊 Benchmarking: </a:t>
+              <a:t>• Cross-lingual: </a:t>
             </a:r>
             <a:r>
               <a:rPr sz="1700" b="0" i="0">
@@ -3456,7 +3451,7 @@
                   <a:srgbClr val="444444"/>
                 </a:solidFill>
               </a:rPr>
-              <a:t>generate test questions, add reference answers, and score the system (details next).</a:t>
+              <a:t>articles and rulings are searched in separate pools; the article number makes matches language-agnostic.</a:t>
             </a:r>
           </a:p>
           <a:p>
@@ -3466,20 +3461,20 @@
               </a:spcAft>
             </a:pPr>
             <a:r>
-              <a:rPr sz="1600" b="1" i="0">
+              <a:rPr sz="1700" b="1" i="0">
                 <a:solidFill>
                   <a:srgbClr val="1E3A5F"/>
                 </a:solidFill>
               </a:rPr>
-              <a:t>• Design principle: </a:t>
-            </a:r>
-            <a:r>
-              <a:rPr sz="1600" b="0" i="0">
+              <a:t>• Evidence over intuition: </a:t>
+            </a:r>
+            <a:r>
+              <a:rPr sz="1700" b="0" i="0">
                 <a:solidFill>
                   <a:srgbClr val="444444"/>
                 </a:solidFill>
               </a:rPr>
-              <a:t>step-by-step transparency: every agent's output, timing, and cost are shown live.</a:t>
+              <a:t>a popular English re-ranker was TESTED and REJECTED — it hurt this Arabic/legal corpus.</a:t>
             </a:r>
           </a:p>
         </p:txBody>
@@ -3511,7 +3506,7 @@
         <p:spPr>
           <a:xfrm>
             <a:off x="0" y="0"/>
-            <a:ext cx="12191695" cy="1005840"/>
+            <a:ext cx="12191695" cy="960120"/>
           </a:xfrm>
           <a:prstGeom prst="rect">
             <a:avLst/>
@@ -3554,8 +3549,8 @@
         </p:nvSpPr>
         <p:spPr>
           <a:xfrm>
-            <a:off x="457200" y="91440"/>
-            <a:ext cx="11277295" cy="868680"/>
+            <a:off x="457200" y="73152"/>
+            <a:ext cx="11277295" cy="822960"/>
           </a:xfrm>
           <a:prstGeom prst="rect">
             <a:avLst/>
@@ -3569,12 +3564,12 @@
           <a:lstStyle/>
           <a:p>
             <a:r>
-              <a:rPr sz="2800" b="1" i="0">
+              <a:rPr sz="2700" b="1" i="0">
                 <a:solidFill>
                   <a:srgbClr val="FFFFFF"/>
                 </a:solidFill>
               </a:rPr>
-              <a:t>9. UI — Pipeline View in Detail</a:t>
+              <a:t>10. Trust &amp; Anti-Hallucination</a:t>
             </a:r>
           </a:p>
         </p:txBody>
@@ -3587,8 +3582,8 @@
         </p:nvSpPr>
         <p:spPr>
           <a:xfrm>
-            <a:off x="640080" y="1234440"/>
-            <a:ext cx="10911535" cy="5257800"/>
+            <a:off x="640080" y="1188720"/>
+            <a:ext cx="10911535" cy="5349240"/>
           </a:xfrm>
           <a:prstGeom prst="rect">
             <a:avLst/>
@@ -3603,139 +3598,93 @@
           <a:p>
             <a:pPr>
               <a:spcAft>
-                <a:spcPts val="900"/>
-              </a:spcAft>
-            </a:pPr>
-            <a:r>
-              <a:rPr sz="1650" b="1" i="0">
+                <a:spcPts val="800"/>
+              </a:spcAft>
+            </a:pPr>
+            <a:r>
+              <a:rPr sz="1700" b="1" i="0">
                 <a:solidFill>
                   <a:srgbClr val="1E3A5F"/>
                 </a:solidFill>
               </a:rPr>
-              <a:t>• Role selector: </a:t>
-            </a:r>
-            <a:r>
-              <a:rPr sz="1650" b="0" i="0">
+              <a:t>• Grounding: </a:t>
+            </a:r>
+            <a:r>
+              <a:rPr sz="1700" b="0" i="0">
                 <a:solidFill>
                   <a:srgbClr val="444444"/>
                 </a:solidFill>
               </a:rPr>
-              <a:t>Citizen / Lawyer / Judge / Auto-detect — changes the output shape.</a:t>
-            </a:r>
-          </a:p>
-          <a:p>
-            <a:pPr>
-              <a:spcAft>
-                <a:spcPts val="900"/>
-              </a:spcAft>
-            </a:pPr>
-            <a:r>
-              <a:rPr sz="1650" b="1" i="0">
+              <a:t>each provision is checked against the retrieved text; ungrounded ones are flagged.</a:t>
+            </a:r>
+          </a:p>
+          <a:p>
+            <a:pPr>
+              <a:spcAft>
+                <a:spcPts val="800"/>
+              </a:spcAft>
+            </a:pPr>
+            <a:r>
+              <a:rPr sz="1700" b="1" i="0">
                 <a:solidFill>
                   <a:srgbClr val="1E3A5F"/>
                 </a:solidFill>
               </a:rPr>
-              <a:t>• Per-agent panels: </a:t>
-            </a:r>
-            <a:r>
-              <a:rPr sz="1650" b="0" i="0">
+              <a:t>• Citation verification: </a:t>
+            </a:r>
+            <a:r>
+              <a:rPr sz="1700" b="0" i="0">
                 <a:solidFill>
                   <a:srgbClr val="444444"/>
                 </a:solidFill>
               </a:rPr>
-              <a:t>each of the 7 steps shows a ✅, its time, and its output (expandable).</a:t>
-            </a:r>
-          </a:p>
-          <a:p>
-            <a:pPr>
-              <a:spcAft>
-                <a:spcPts val="900"/>
-              </a:spcAft>
-            </a:pPr>
-            <a:r>
-              <a:rPr sz="1650" b="1" i="0">
+              <a:t>every cited article number is verified against the corpus index (no invented citations).</a:t>
+            </a:r>
+          </a:p>
+          <a:p>
+            <a:pPr>
+              <a:spcAft>
+                <a:spcPts val="800"/>
+              </a:spcAft>
+            </a:pPr>
+            <a:r>
+              <a:rPr sz="1700" b="1" i="0">
                 <a:solidFill>
                   <a:srgbClr val="1E3A5F"/>
                 </a:solidFill>
               </a:rPr>
-              <a:t>• Grounding &amp; citations: </a:t>
-            </a:r>
-            <a:r>
-              <a:rPr sz="1650" b="0" i="0">
+              <a:t>• Closed citation set: </a:t>
+            </a:r>
+            <a:r>
+              <a:rPr sz="1700" b="0" i="0">
                 <a:solidFill>
                   <a:srgbClr val="444444"/>
                 </a:solidFill>
               </a:rPr>
-              <a:t>provisions marked grounded/ungrounded; citations shown ✓ verified / ⚠ unverified.</a:t>
-            </a:r>
-          </a:p>
-          <a:p>
-            <a:pPr>
-              <a:spcAft>
-                <a:spcPts val="900"/>
-              </a:spcAft>
-            </a:pPr>
-            <a:r>
-              <a:rPr sz="1650" b="1" i="0">
+              <a:t>the memo may cite ONLY verified articles it was given (precision-first).</a:t>
+            </a:r>
+          </a:p>
+          <a:p>
+            <a:pPr>
+              <a:spcAft>
+                <a:spcPts val="800"/>
+              </a:spcAft>
+            </a:pPr>
+            <a:r>
+              <a:rPr sz="1700" b="1" i="0">
                 <a:solidFill>
                   <a:srgbClr val="1E3A5F"/>
                 </a:solidFill>
               </a:rPr>
-              <a:t>• Memorandum: </a:t>
-            </a:r>
-            <a:r>
-              <a:rPr sz="1650" b="0" i="0">
+              <a:t>• Trust metric: </a:t>
+            </a:r>
+            <a:r>
+              <a:rPr sz="1700" b="0" i="0">
                 <a:solidFill>
                   <a:srgbClr val="444444"/>
                 </a:solidFill>
               </a:rPr>
-              <a:t>rendered as a clean document — right-to-left for Arabic, in the query's language.</a:t>
-            </a:r>
-          </a:p>
-          <a:p>
-            <a:pPr>
-              <a:spcAft>
-                <a:spcPts val="900"/>
-              </a:spcAft>
-            </a:pPr>
-            <a:r>
-              <a:rPr sz="1650" b="1" i="0">
-                <a:solidFill>
-                  <a:srgbClr val="1E3A5F"/>
-                </a:solidFill>
-              </a:rPr>
-              <a:t>• Cost &amp; trust summary: </a:t>
-            </a:r>
-            <a:r>
-              <a:rPr sz="1650" b="0" i="0">
-                <a:solidFill>
-                  <a:srgbClr val="444444"/>
-                </a:solidFill>
-              </a:rPr>
-              <a:t>tokens, USD cost, latency, grounding rate, and hallucination rate per run.</a:t>
-            </a:r>
-          </a:p>
-          <a:p>
-            <a:pPr>
-              <a:spcAft>
-                <a:spcPts val="900"/>
-              </a:spcAft>
-            </a:pPr>
-            <a:r>
-              <a:rPr sz="1650" b="1" i="0">
-                <a:solidFill>
-                  <a:srgbClr val="1E3A5F"/>
-                </a:solidFill>
-              </a:rPr>
-              <a:t>• Download: </a:t>
-            </a:r>
-            <a:r>
-              <a:rPr sz="1650" b="0" i="0">
-                <a:solidFill>
-                  <a:srgbClr val="444444"/>
-                </a:solidFill>
-              </a:rPr>
-              <a:t>full results (JSON) and the memorandum are downloadable.</a:t>
+              <a:t>each answer reports a hallucination rate and a grounding rate.</a:t>
             </a:r>
           </a:p>
         </p:txBody>
@@ -3767,7 +3716,7 @@
         <p:spPr>
           <a:xfrm>
             <a:off x="0" y="0"/>
-            <a:ext cx="12191695" cy="6858000"/>
+            <a:ext cx="12191695" cy="960120"/>
           </a:xfrm>
           <a:prstGeom prst="rect">
             <a:avLst/>
@@ -3804,58 +3753,14 @@
       </p:sp>
       <p:sp>
         <p:nvSpPr>
-          <p:cNvPr id="3" name="Rectangle 2"/>
-          <p:cNvSpPr/>
-          <p:nvPr/>
-        </p:nvSpPr>
-        <p:spPr>
-          <a:xfrm>
-            <a:off x="822960" y="2743200"/>
-            <a:ext cx="137160" cy="1280160"/>
-          </a:xfrm>
-          <a:prstGeom prst="rect">
-            <a:avLst/>
-          </a:prstGeom>
-          <a:solidFill>
-            <a:srgbClr val="0F9D58"/>
-          </a:solidFill>
-          <a:ln>
-            <a:noFill/>
-          </a:ln>
-          <a:effectLst/>
-        </p:spPr>
-        <p:style>
-          <a:lnRef idx="1">
-            <a:schemeClr val="accent1"/>
-          </a:lnRef>
-          <a:fillRef idx="3">
-            <a:schemeClr val="accent1"/>
-          </a:fillRef>
-          <a:effectRef idx="2">
-            <a:schemeClr val="accent1"/>
-          </a:effectRef>
-          <a:fontRef idx="minor">
-            <a:schemeClr val="lt1"/>
-          </a:fontRef>
-        </p:style>
-        <p:txBody>
-          <a:bodyPr rtlCol="0" anchor="ctr"/>
-          <a:lstStyle/>
-          <a:p>
-            <a:pPr algn="ctr"/>
-          </a:p>
-        </p:txBody>
-      </p:sp>
-      <p:sp>
-        <p:nvSpPr>
-          <p:cNvPr id="4" name="TextBox 3"/>
+          <p:cNvPr id="3" name="TextBox 2"/>
           <p:cNvSpPr txBox="1"/>
           <p:nvPr/>
         </p:nvSpPr>
         <p:spPr>
           <a:xfrm>
-            <a:off x="1188720" y="2651760"/>
-            <a:ext cx="10362895" cy="1645920"/>
+            <a:off x="457200" y="73152"/>
+            <a:ext cx="11277295" cy="822960"/>
           </a:xfrm>
           <a:prstGeom prst="rect">
             <a:avLst/>
@@ -3869,22 +3774,137 @@
           <a:lstStyle/>
           <a:p>
             <a:r>
-              <a:rPr sz="1800" b="1" i="0">
+              <a:rPr sz="2700" b="1" i="0">
+                <a:solidFill>
+                  <a:srgbClr val="FFFFFF"/>
+                </a:solidFill>
+              </a:rPr>
+              <a:t>11. The Web Application (UI)</a:t>
+            </a:r>
+          </a:p>
+          <a:p>
+            <a:r>
+              <a:rPr sz="1300" b="0" i="0">
                 <a:solidFill>
                   <a:srgbClr val="BFD3E6"/>
                 </a:solidFill>
               </a:rPr>
-              <a:t>Part II</a:t>
-            </a:r>
-          </a:p>
-          <a:p>
-            <a:r>
-              <a:rPr sz="3400" b="1" i="0">
-                <a:solidFill>
-                  <a:srgbClr val="FFFFFF"/>
-                </a:solidFill>
-              </a:rPr>
-              <a:t>Benchmarking — The Core Contribution</a:t>
+              <a:t>Built with Streamlit — three working areas</a:t>
+            </a:r>
+          </a:p>
+        </p:txBody>
+      </p:sp>
+      <p:sp>
+        <p:nvSpPr>
+          <p:cNvPr id="4" name="TextBox 3"/>
+          <p:cNvSpPr txBox="1"/>
+          <p:nvPr/>
+        </p:nvSpPr>
+        <p:spPr>
+          <a:xfrm>
+            <a:off x="640080" y="1371600"/>
+            <a:ext cx="10911535" cy="5166360"/>
+          </a:xfrm>
+          <a:prstGeom prst="rect">
+            <a:avLst/>
+          </a:prstGeom>
+          <a:noFill/>
+        </p:spPr>
+        <p:txBody>
+          <a:bodyPr wrap="square">
+            <a:spAutoFit/>
+          </a:bodyPr>
+          <a:lstStyle/>
+          <a:p>
+            <a:pPr>
+              <a:spcAft>
+                <a:spcPts val="1200"/>
+              </a:spcAft>
+            </a:pPr>
+            <a:r>
+              <a:rPr sz="1700" b="1" i="0">
+                <a:solidFill>
+                  <a:srgbClr val="1E3A5F"/>
+                </a:solidFill>
+              </a:rPr>
+              <a:t>• 🔗 End-to-End Pipeline: </a:t>
+            </a:r>
+            <a:r>
+              <a:rPr sz="1700" b="0" i="0">
+                <a:solidFill>
+                  <a:srgbClr val="444444"/>
+                </a:solidFill>
+              </a:rPr>
+              <a:t>ask a question, pick your role, run all 7 agents; see the memo, sources, trust indicators, tokens/cost.</a:t>
+            </a:r>
+          </a:p>
+          <a:p>
+            <a:pPr>
+              <a:spcAft>
+                <a:spcPts val="1200"/>
+              </a:spcAft>
+            </a:pPr>
+            <a:r>
+              <a:rPr sz="1700" b="1" i="0">
+                <a:solidFill>
+                  <a:srgbClr val="1E3A5F"/>
+                </a:solidFill>
+              </a:rPr>
+              <a:t>• 🔬 Individual Agents: </a:t>
+            </a:r>
+            <a:r>
+              <a:rPr sz="1700" b="0" i="0">
+                <a:solidFill>
+                  <a:srgbClr val="444444"/>
+                </a:solidFill>
+              </a:rPr>
+              <a:t>run and inspect each agent in isolation (inputs, outputs, retrieved chunks) for debugging.</a:t>
+            </a:r>
+          </a:p>
+          <a:p>
+            <a:pPr>
+              <a:spcAft>
+                <a:spcPts val="1200"/>
+              </a:spcAft>
+            </a:pPr>
+            <a:r>
+              <a:rPr sz="1700" b="1" i="0">
+                <a:solidFill>
+                  <a:srgbClr val="1E3A5F"/>
+                </a:solidFill>
+              </a:rPr>
+              <a:t>• 📊 Benchmarking: </a:t>
+            </a:r>
+            <a:r>
+              <a:rPr sz="1700" b="0" i="0">
+                <a:solidFill>
+                  <a:srgbClr val="444444"/>
+                </a:solidFill>
+              </a:rPr>
+              <a:t>generate test questions, enter reference answers, and score the system against a source of truth.</a:t>
+            </a:r>
+          </a:p>
+          <a:p>
+            <a:pPr>
+              <a:spcAft>
+                <a:spcPts val="800"/>
+              </a:spcAft>
+            </a:pPr>
+            <a:r>
+              <a:rPr sz="1600" b="1" i="0">
+                <a:solidFill>
+                  <a:srgbClr val="1E3A5F"/>
+                </a:solidFill>
+              </a:rPr>
+              <a:t>• Design principle: </a:t>
+            </a:r>
+            <a:r>
+              <a:rPr sz="1600" b="0" i="0">
+                <a:solidFill>
+                  <a:srgbClr val="444444"/>
+                </a:solidFill>
+              </a:rPr>
+              <a:t>step-by-step transparency — every agent's output, timing, and cost are shown live.</a:t>
             </a:r>
           </a:p>
         </p:txBody>
@@ -3916,7 +3936,7 @@
         <p:spPr>
           <a:xfrm>
             <a:off x="0" y="0"/>
-            <a:ext cx="12191695" cy="1005840"/>
+            <a:ext cx="12191695" cy="960120"/>
           </a:xfrm>
           <a:prstGeom prst="rect">
             <a:avLst/>
@@ -3959,8 +3979,8 @@
         </p:nvSpPr>
         <p:spPr>
           <a:xfrm>
-            <a:off x="457200" y="91440"/>
-            <a:ext cx="11277295" cy="868680"/>
+            <a:off x="457200" y="73152"/>
+            <a:ext cx="11277295" cy="822960"/>
           </a:xfrm>
           <a:prstGeom prst="rect">
             <a:avLst/>
@@ -3974,12 +3994,12 @@
           <a:lstStyle/>
           <a:p>
             <a:r>
-              <a:rPr sz="2800" b="1" i="0">
+              <a:rPr sz="2700" b="1" i="0">
                 <a:solidFill>
                   <a:srgbClr val="FFFFFF"/>
                 </a:solidFill>
               </a:rPr>
-              <a:t>10. Benchmark — Why &amp; How the Dataset Is Built</a:t>
+              <a:t>11. UI — Pipeline View in Detail</a:t>
             </a:r>
           </a:p>
         </p:txBody>
@@ -3992,8 +4012,8 @@
         </p:nvSpPr>
         <p:spPr>
           <a:xfrm>
-            <a:off x="640080" y="1234440"/>
-            <a:ext cx="10911535" cy="5257800"/>
+            <a:off x="640080" y="1188720"/>
+            <a:ext cx="10911535" cy="5349240"/>
           </a:xfrm>
           <a:prstGeom prst="rect">
             <a:avLst/>
@@ -4008,116 +4028,139 @@
           <a:p>
             <a:pPr>
               <a:spcAft>
-                <a:spcPts val="800"/>
-              </a:spcAft>
-            </a:pPr>
-            <a:r>
-              <a:rPr sz="1700" b="1" i="0">
+                <a:spcPts val="900"/>
+              </a:spcAft>
+            </a:pPr>
+            <a:r>
+              <a:rPr sz="1650" b="1" i="0">
                 <a:solidFill>
                   <a:srgbClr val="1E3A5F"/>
                 </a:solidFill>
               </a:rPr>
-              <a:t>• Why: </a:t>
-            </a:r>
-            <a:r>
-              <a:rPr sz="1700" b="0" i="0">
+              <a:t>• Role selector: </a:t>
+            </a:r>
+            <a:r>
+              <a:rPr sz="1650" b="0" i="0">
                 <a:solidFill>
                   <a:srgbClr val="444444"/>
                 </a:solidFill>
               </a:rPr>
-              <a:t>to turn 'the answers look good' into OBJECTIVE, repeatable, defensible numbers.</a:t>
-            </a:r>
-          </a:p>
-          <a:p>
-            <a:pPr>
-              <a:spcAft>
-                <a:spcPts val="800"/>
-              </a:spcAft>
-            </a:pPr>
-            <a:r>
-              <a:rPr sz="1700" b="1" i="0">
+              <a:t>Citizen / Lawyer / Judge / Auto-detect — changes the output shape.</a:t>
+            </a:r>
+          </a:p>
+          <a:p>
+            <a:pPr>
+              <a:spcAft>
+                <a:spcPts val="900"/>
+              </a:spcAft>
+            </a:pPr>
+            <a:r>
+              <a:rPr sz="1650" b="1" i="0">
                 <a:solidFill>
                   <a:srgbClr val="1E3A5F"/>
                 </a:solidFill>
               </a:rPr>
-              <a:t>• Grounded generation: </a:t>
-            </a:r>
-            <a:r>
-              <a:rPr sz="1700" b="0" i="0">
+              <a:t>• Per-agent panels: </a:t>
+            </a:r>
+            <a:r>
+              <a:rPr sz="1650" b="0" i="0">
                 <a:solidFill>
                   <a:srgbClr val="444444"/>
                 </a:solidFill>
               </a:rPr>
-              <a:t>196 questions generated directly from the REAL corpus (articles + rulings) — never invented.</a:t>
-            </a:r>
-          </a:p>
-          <a:p>
-            <a:pPr>
-              <a:spcAft>
-                <a:spcPts val="800"/>
-              </a:spcAft>
-            </a:pPr>
-            <a:r>
-              <a:rPr sz="1700" b="1" i="0">
+              <a:t>each of the 7 steps shows a ✅, its time, and its output (expandable).</a:t>
+            </a:r>
+          </a:p>
+          <a:p>
+            <a:pPr>
+              <a:spcAft>
+                <a:spcPts val="900"/>
+              </a:spcAft>
+            </a:pPr>
+            <a:r>
+              <a:rPr sz="1650" b="1" i="0">
                 <a:solidFill>
                   <a:srgbClr val="1E3A5F"/>
                 </a:solidFill>
               </a:rPr>
-              <a:t>• Verified gold: </a:t>
-            </a:r>
-            <a:r>
-              <a:rPr sz="1700" b="0" i="0">
+              <a:t>• Grounding &amp; citations: </a:t>
+            </a:r>
+            <a:r>
+              <a:rPr sz="1650" b="0" i="0">
                 <a:solidFill>
                   <a:srgbClr val="444444"/>
                 </a:solidFill>
               </a:rPr>
-              <a:t>each question is stored with its correct article number(s) — the 'gold answer' — validated automatically.</a:t>
-            </a:r>
-          </a:p>
-          <a:p>
-            <a:pPr>
-              <a:spcAft>
-                <a:spcPts val="800"/>
-              </a:spcAft>
-            </a:pPr>
-            <a:r>
-              <a:rPr sz="1700" b="1" i="0">
+              <a:t>provisions marked grounded/ungrounded; citations shown ✓ verified / ⚠ unverified.</a:t>
+            </a:r>
+          </a:p>
+          <a:p>
+            <a:pPr>
+              <a:spcAft>
+                <a:spcPts val="900"/>
+              </a:spcAft>
+            </a:pPr>
+            <a:r>
+              <a:rPr sz="1650" b="1" i="0">
                 <a:solidFill>
                   <a:srgbClr val="1E3A5F"/>
                 </a:solidFill>
               </a:rPr>
-              <a:t>• Coverage: </a:t>
-            </a:r>
-            <a:r>
-              <a:rPr sz="1700" b="0" i="0">
+              <a:t>• Memorandum: </a:t>
+            </a:r>
+            <a:r>
+              <a:rPr sz="1650" b="0" i="0">
                 <a:solidFill>
                   <a:srgbClr val="444444"/>
                 </a:solidFill>
               </a:rPr>
-              <a:t>trilingual (~69 AR / 65 EN / 62 FR); covers 204 distinct articles; general questions + case scenarios.</a:t>
-            </a:r>
-          </a:p>
-          <a:p>
-            <a:pPr>
-              <a:spcAft>
-                <a:spcPts val="800"/>
-              </a:spcAft>
-            </a:pPr>
-            <a:r>
-              <a:rPr sz="1700" b="1" i="0">
+              <a:t>rendered as a clean document — right-to-left for Arabic, in the query's language.</a:t>
+            </a:r>
+          </a:p>
+          <a:p>
+            <a:pPr>
+              <a:spcAft>
+                <a:spcPts val="900"/>
+              </a:spcAft>
+            </a:pPr>
+            <a:r>
+              <a:rPr sz="1650" b="1" i="0">
                 <a:solidFill>
                   <a:srgbClr val="1E3A5F"/>
                 </a:solidFill>
               </a:rPr>
-              <a:t>• Reproducible: </a:t>
-            </a:r>
-            <a:r>
-              <a:rPr sz="1700" b="0" i="0">
+              <a:t>• Cost &amp; trust summary: </a:t>
+            </a:r>
+            <a:r>
+              <a:rPr sz="1650" b="0" i="0">
                 <a:solidFill>
                   <a:srgbClr val="444444"/>
                 </a:solidFill>
               </a:rPr>
-              <a:t>batched LLM generation (~10 questions per call) for efficiency; can be re-generated on demand.</a:t>
+              <a:t>tokens, USD cost, latency, grounding rate, and hallucination rate per run.</a:t>
+            </a:r>
+          </a:p>
+          <a:p>
+            <a:pPr>
+              <a:spcAft>
+                <a:spcPts val="900"/>
+              </a:spcAft>
+            </a:pPr>
+            <a:r>
+              <a:rPr sz="1650" b="1" i="0">
+                <a:solidFill>
+                  <a:srgbClr val="1E3A5F"/>
+                </a:solidFill>
+              </a:rPr>
+              <a:t>• Download: </a:t>
+            </a:r>
+            <a:r>
+              <a:rPr sz="1650" b="0" i="0">
+                <a:solidFill>
+                  <a:srgbClr val="444444"/>
+                </a:solidFill>
+              </a:rPr>
+              <a:t>full results (JSON) and the memorandum are downloadable.</a:t>
             </a:r>
           </a:p>
         </p:txBody>
@@ -4149,7 +4192,7 @@
         <p:spPr>
           <a:xfrm>
             <a:off x="0" y="0"/>
-            <a:ext cx="12191695" cy="1005840"/>
+            <a:ext cx="12191695" cy="6858000"/>
           </a:xfrm>
           <a:prstGeom prst="rect">
             <a:avLst/>
@@ -4186,14 +4229,58 @@
       </p:sp>
       <p:sp>
         <p:nvSpPr>
-          <p:cNvPr id="3" name="TextBox 2"/>
+          <p:cNvPr id="3" name="Rectangle 2"/>
+          <p:cNvSpPr/>
+          <p:nvPr/>
+        </p:nvSpPr>
+        <p:spPr>
+          <a:xfrm>
+            <a:off x="822960" y="2651760"/>
+            <a:ext cx="146304" cy="1371600"/>
+          </a:xfrm>
+          <a:prstGeom prst="rect">
+            <a:avLst/>
+          </a:prstGeom>
+          <a:solidFill>
+            <a:srgbClr val="0F9D58"/>
+          </a:solidFill>
+          <a:ln>
+            <a:noFill/>
+          </a:ln>
+          <a:effectLst/>
+        </p:spPr>
+        <p:style>
+          <a:lnRef idx="1">
+            <a:schemeClr val="accent1"/>
+          </a:lnRef>
+          <a:fillRef idx="3">
+            <a:schemeClr val="accent1"/>
+          </a:fillRef>
+          <a:effectRef idx="2">
+            <a:schemeClr val="accent1"/>
+          </a:effectRef>
+          <a:fontRef idx="minor">
+            <a:schemeClr val="lt1"/>
+          </a:fontRef>
+        </p:style>
+        <p:txBody>
+          <a:bodyPr rtlCol="0" anchor="ctr"/>
+          <a:lstStyle/>
+          <a:p>
+            <a:pPr algn="ctr"/>
+          </a:p>
+        </p:txBody>
+      </p:sp>
+      <p:sp>
+        <p:nvSpPr>
+          <p:cNvPr id="4" name="TextBox 3"/>
           <p:cNvSpPr txBox="1"/>
           <p:nvPr/>
         </p:nvSpPr>
         <p:spPr>
           <a:xfrm>
-            <a:off x="457200" y="91440"/>
-            <a:ext cx="11277295" cy="868680"/>
+            <a:off x="1188720" y="2514600"/>
+            <a:ext cx="10362895" cy="1828800"/>
           </a:xfrm>
           <a:prstGeom prst="rect">
             <a:avLst/>
@@ -4207,12 +4294,807 @@
           <a:lstStyle/>
           <a:p>
             <a:r>
-              <a:rPr sz="2800" b="1" i="0">
+              <a:rPr sz="1800" b="1" i="0">
+                <a:solidFill>
+                  <a:srgbClr val="BFD3E6"/>
+                </a:solidFill>
+              </a:rPr>
+              <a:t>Part II</a:t>
+            </a:r>
+          </a:p>
+          <a:p>
+            <a:r>
+              <a:rPr sz="3400" b="1" i="0">
                 <a:solidFill>
                   <a:srgbClr val="FFFFFF"/>
                 </a:solidFill>
               </a:rPr>
-              <a:t>11. Benchmark — What Is Measured</a:t>
+              <a:t>Benchmarking</a:t>
+            </a:r>
+          </a:p>
+          <a:p>
+            <a:r>
+              <a:rPr sz="1500" b="0" i="1">
+                <a:solidFill>
+                  <a:srgbClr val="BFD3E6"/>
+                </a:solidFill>
+              </a:rPr>
+              <a:t>The core scientific contribution</a:t>
+            </a:r>
+          </a:p>
+        </p:txBody>
+      </p:sp>
+    </p:spTree>
+  </p:cSld>
+  <p:clrMapOvr>
+    <a:masterClrMapping/>
+  </p:clrMapOvr>
+</p:sld>
+</file>
+
+<file path=ppt/slides/slide15.xml><?xml version="1.0" encoding="utf-8"?>
+<p:sld xmlns:a="http://schemas.openxmlformats.org/drawingml/2006/main" xmlns:p="http://schemas.openxmlformats.org/presentationml/2006/main" xmlns:r="http://schemas.openxmlformats.org/officeDocument/2006/relationships">
+  <p:cSld>
+    <p:spTree>
+      <p:nvGrpSpPr>
+        <p:cNvPr id="1" name=""/>
+        <p:cNvGrpSpPr/>
+        <p:nvPr/>
+      </p:nvGrpSpPr>
+      <p:grpSpPr/>
+      <p:sp>
+        <p:nvSpPr>
+          <p:cNvPr id="2" name="Rectangle 1"/>
+          <p:cNvSpPr/>
+          <p:nvPr/>
+        </p:nvSpPr>
+        <p:spPr>
+          <a:xfrm>
+            <a:off x="0" y="0"/>
+            <a:ext cx="12191695" cy="960120"/>
+          </a:xfrm>
+          <a:prstGeom prst="rect">
+            <a:avLst/>
+          </a:prstGeom>
+          <a:solidFill>
+            <a:srgbClr val="1E3A5F"/>
+          </a:solidFill>
+          <a:ln>
+            <a:noFill/>
+          </a:ln>
+          <a:effectLst/>
+        </p:spPr>
+        <p:style>
+          <a:lnRef idx="1">
+            <a:schemeClr val="accent1"/>
+          </a:lnRef>
+          <a:fillRef idx="3">
+            <a:schemeClr val="accent1"/>
+          </a:fillRef>
+          <a:effectRef idx="2">
+            <a:schemeClr val="accent1"/>
+          </a:effectRef>
+          <a:fontRef idx="minor">
+            <a:schemeClr val="lt1"/>
+          </a:fontRef>
+        </p:style>
+        <p:txBody>
+          <a:bodyPr rtlCol="0" anchor="ctr"/>
+          <a:lstStyle/>
+          <a:p>
+            <a:pPr algn="ctr"/>
+          </a:p>
+        </p:txBody>
+      </p:sp>
+      <p:sp>
+        <p:nvSpPr>
+          <p:cNvPr id="3" name="TextBox 2"/>
+          <p:cNvSpPr txBox="1"/>
+          <p:nvPr/>
+        </p:nvSpPr>
+        <p:spPr>
+          <a:xfrm>
+            <a:off x="457200" y="73152"/>
+            <a:ext cx="11277295" cy="822960"/>
+          </a:xfrm>
+          <a:prstGeom prst="rect">
+            <a:avLst/>
+          </a:prstGeom>
+          <a:noFill/>
+        </p:spPr>
+        <p:txBody>
+          <a:bodyPr wrap="square">
+            <a:spAutoFit/>
+          </a:bodyPr>
+          <a:lstStyle/>
+          <a:p>
+            <a:r>
+              <a:rPr sz="2700" b="1" i="0">
+                <a:solidFill>
+                  <a:srgbClr val="FFFFFF"/>
+                </a:solidFill>
+              </a:rPr>
+              <a:t>12. Benchmark — Why It Matters</a:t>
+            </a:r>
+          </a:p>
+        </p:txBody>
+      </p:sp>
+      <p:sp>
+        <p:nvSpPr>
+          <p:cNvPr id="4" name="TextBox 3"/>
+          <p:cNvSpPr txBox="1"/>
+          <p:nvPr/>
+        </p:nvSpPr>
+        <p:spPr>
+          <a:xfrm>
+            <a:off x="640080" y="1188720"/>
+            <a:ext cx="10911535" cy="5349240"/>
+          </a:xfrm>
+          <a:prstGeom prst="rect">
+            <a:avLst/>
+          </a:prstGeom>
+          <a:noFill/>
+        </p:spPr>
+        <p:txBody>
+          <a:bodyPr wrap="square">
+            <a:spAutoFit/>
+          </a:bodyPr>
+          <a:lstStyle/>
+          <a:p>
+            <a:pPr>
+              <a:spcAft>
+                <a:spcPts val="1100"/>
+              </a:spcAft>
+            </a:pPr>
+            <a:r>
+              <a:rPr sz="1750" b="1" i="0">
+                <a:solidFill>
+                  <a:srgbClr val="1E3A5F"/>
+                </a:solidFill>
+              </a:rPr>
+              <a:t>• Motivation: </a:t>
+            </a:r>
+            <a:r>
+              <a:rPr sz="1750" b="0" i="0">
+                <a:solidFill>
+                  <a:srgbClr val="444444"/>
+                </a:solidFill>
+              </a:rPr>
+              <a:t>a legal AI is only credible if its accuracy can be MEASURED, not just claimed.</a:t>
+            </a:r>
+          </a:p>
+          <a:p>
+            <a:pPr>
+              <a:spcAft>
+                <a:spcPts val="1100"/>
+              </a:spcAft>
+            </a:pPr>
+            <a:r>
+              <a:rPr sz="1750" b="1" i="0">
+                <a:solidFill>
+                  <a:srgbClr val="1E3A5F"/>
+                </a:solidFill>
+              </a:rPr>
+              <a:t>• Compare: </a:t>
+            </a:r>
+            <a:r>
+              <a:rPr sz="1750" b="0" i="0">
+                <a:solidFill>
+                  <a:srgbClr val="444444"/>
+                </a:solidFill>
+              </a:rPr>
+              <a:t>prove whether the multi-agent design beats a single-LLM baseline.</a:t>
+            </a:r>
+          </a:p>
+          <a:p>
+            <a:pPr>
+              <a:spcAft>
+                <a:spcPts val="1100"/>
+              </a:spcAft>
+            </a:pPr>
+            <a:r>
+              <a:rPr sz="1750" b="1" i="0">
+                <a:solidFill>
+                  <a:srgbClr val="1E3A5F"/>
+                </a:solidFill>
+              </a:rPr>
+              <a:t>• Quantify: </a:t>
+            </a:r>
+            <a:r>
+              <a:rPr sz="1750" b="0" i="0">
+                <a:solidFill>
+                  <a:srgbClr val="444444"/>
+                </a:solidFill>
+              </a:rPr>
+              <a:t>quantify how often the system finds the right law and cites the right articles.</a:t>
+            </a:r>
+          </a:p>
+          <a:p>
+            <a:pPr>
+              <a:spcAft>
+                <a:spcPts val="1100"/>
+              </a:spcAft>
+            </a:pPr>
+            <a:r>
+              <a:rPr sz="1750" b="1" i="0">
+                <a:solidFill>
+                  <a:srgbClr val="1E3A5F"/>
+                </a:solidFill>
+              </a:rPr>
+              <a:t>• Rigour: </a:t>
+            </a:r>
+            <a:r>
+              <a:rPr sz="1750" b="0" i="0">
+                <a:solidFill>
+                  <a:srgbClr val="444444"/>
+                </a:solidFill>
+              </a:rPr>
+              <a:t>turn subjective impressions into objective, repeatable, defensible numbers.</a:t>
+            </a:r>
+          </a:p>
+          <a:p>
+            <a:pPr>
+              <a:spcAft>
+                <a:spcPts val="1100"/>
+              </a:spcAft>
+            </a:pPr>
+            <a:r>
+              <a:rPr sz="1750" b="1" i="0">
+                <a:solidFill>
+                  <a:srgbClr val="1E3A5F"/>
+                </a:solidFill>
+              </a:rPr>
+              <a:t>• Guide design: </a:t>
+            </a:r>
+            <a:r>
+              <a:rPr sz="1750" b="0" i="0">
+                <a:solidFill>
+                  <a:srgbClr val="444444"/>
+                </a:solidFill>
+              </a:rPr>
+              <a:t>test every design decision (search method, embedding, re-ranker) with data.</a:t>
+            </a:r>
+          </a:p>
+        </p:txBody>
+      </p:sp>
+    </p:spTree>
+  </p:cSld>
+  <p:clrMapOvr>
+    <a:masterClrMapping/>
+  </p:clrMapOvr>
+</p:sld>
+</file>
+
+<file path=ppt/slides/slide16.xml><?xml version="1.0" encoding="utf-8"?>
+<p:sld xmlns:a="http://schemas.openxmlformats.org/drawingml/2006/main" xmlns:p="http://schemas.openxmlformats.org/presentationml/2006/main" xmlns:r="http://schemas.openxmlformats.org/officeDocument/2006/relationships">
+  <p:cSld>
+    <p:spTree>
+      <p:nvGrpSpPr>
+        <p:cNvPr id="1" name=""/>
+        <p:cNvGrpSpPr/>
+        <p:nvPr/>
+      </p:nvGrpSpPr>
+      <p:grpSpPr/>
+      <p:sp>
+        <p:nvSpPr>
+          <p:cNvPr id="2" name="Rectangle 1"/>
+          <p:cNvSpPr/>
+          <p:nvPr/>
+        </p:nvSpPr>
+        <p:spPr>
+          <a:xfrm>
+            <a:off x="0" y="0"/>
+            <a:ext cx="12191695" cy="960120"/>
+          </a:xfrm>
+          <a:prstGeom prst="rect">
+            <a:avLst/>
+          </a:prstGeom>
+          <a:solidFill>
+            <a:srgbClr val="1E3A5F"/>
+          </a:solidFill>
+          <a:ln>
+            <a:noFill/>
+          </a:ln>
+          <a:effectLst/>
+        </p:spPr>
+        <p:style>
+          <a:lnRef idx="1">
+            <a:schemeClr val="accent1"/>
+          </a:lnRef>
+          <a:fillRef idx="3">
+            <a:schemeClr val="accent1"/>
+          </a:fillRef>
+          <a:effectRef idx="2">
+            <a:schemeClr val="accent1"/>
+          </a:effectRef>
+          <a:fontRef idx="minor">
+            <a:schemeClr val="lt1"/>
+          </a:fontRef>
+        </p:style>
+        <p:txBody>
+          <a:bodyPr rtlCol="0" anchor="ctr"/>
+          <a:lstStyle/>
+          <a:p>
+            <a:pPr algn="ctr"/>
+          </a:p>
+        </p:txBody>
+      </p:sp>
+      <p:sp>
+        <p:nvSpPr>
+          <p:cNvPr id="3" name="TextBox 2"/>
+          <p:cNvSpPr txBox="1"/>
+          <p:nvPr/>
+        </p:nvSpPr>
+        <p:spPr>
+          <a:xfrm>
+            <a:off x="457200" y="73152"/>
+            <a:ext cx="11277295" cy="822960"/>
+          </a:xfrm>
+          <a:prstGeom prst="rect">
+            <a:avLst/>
+          </a:prstGeom>
+          <a:noFill/>
+        </p:spPr>
+        <p:txBody>
+          <a:bodyPr wrap="square">
+            <a:spAutoFit/>
+          </a:bodyPr>
+          <a:lstStyle/>
+          <a:p>
+            <a:r>
+              <a:rPr sz="2700" b="1" i="0">
+                <a:solidFill>
+                  <a:srgbClr val="FFFFFF"/>
+                </a:solidFill>
+              </a:rPr>
+              <a:t>13. Generating Benchmark Questions</a:t>
+            </a:r>
+          </a:p>
+          <a:p>
+            <a:r>
+              <a:rPr sz="1300" b="0" i="0">
+                <a:solidFill>
+                  <a:srgbClr val="BFD3E6"/>
+                </a:solidFill>
+              </a:rPr>
+              <a:t>A dedicated generation agent builds grounded questions from the real corpus</a:t>
+            </a:r>
+          </a:p>
+        </p:txBody>
+      </p:sp>
+      <p:sp>
+        <p:nvSpPr>
+          <p:cNvPr id="4" name="TextBox 3"/>
+          <p:cNvSpPr txBox="1"/>
+          <p:nvPr/>
+        </p:nvSpPr>
+        <p:spPr>
+          <a:xfrm>
+            <a:off x="548640" y="1143000"/>
+            <a:ext cx="6126480" cy="5394960"/>
+          </a:xfrm>
+          <a:prstGeom prst="rect">
+            <a:avLst/>
+          </a:prstGeom>
+          <a:noFill/>
+        </p:spPr>
+        <p:txBody>
+          <a:bodyPr wrap="square">
+            <a:spAutoFit/>
+          </a:bodyPr>
+          <a:lstStyle/>
+          <a:p>
+            <a:pPr>
+              <a:spcAft>
+                <a:spcPts val="700"/>
+              </a:spcAft>
+            </a:pPr>
+            <a:r>
+              <a:rPr sz="1500" b="1" i="0">
+                <a:solidFill>
+                  <a:srgbClr val="1E3A5F"/>
+                </a:solidFill>
+              </a:rPr>
+              <a:t>• Step 1 — </a:t>
+            </a:r>
+            <a:r>
+              <a:rPr sz="1500" b="0" i="0">
+                <a:solidFill>
+                  <a:srgbClr val="444444"/>
+                </a:solidFill>
+              </a:rPr>
+              <a:t>sample real Penal-Code articles (and rulings) from the corpus.</a:t>
+            </a:r>
+          </a:p>
+          <a:p>
+            <a:pPr>
+              <a:spcAft>
+                <a:spcPts val="700"/>
+              </a:spcAft>
+            </a:pPr>
+            <a:r>
+              <a:rPr sz="1500" b="1" i="0">
+                <a:solidFill>
+                  <a:srgbClr val="1E3A5F"/>
+                </a:solidFill>
+              </a:rPr>
+              <a:t>• Step 2 — </a:t>
+            </a:r>
+            <a:r>
+              <a:rPr sz="1500" b="0" i="0">
+                <a:solidFill>
+                  <a:srgbClr val="444444"/>
+                </a:solidFill>
+              </a:rPr>
+              <a:t>the LLM writes realistic questions answerable from THOSE articles, in a target language.</a:t>
+            </a:r>
+          </a:p>
+          <a:p>
+            <a:pPr>
+              <a:spcAft>
+                <a:spcPts val="700"/>
+              </a:spcAft>
+            </a:pPr>
+            <a:r>
+              <a:rPr sz="1500" b="1" i="0">
+                <a:solidFill>
+                  <a:srgbClr val="1E3A5F"/>
+                </a:solidFill>
+              </a:rPr>
+              <a:t>• Step 3 — </a:t>
+            </a:r>
+            <a:r>
+              <a:rPr sz="1500" b="0" i="0">
+                <a:solidFill>
+                  <a:srgbClr val="444444"/>
+                </a:solidFill>
+              </a:rPr>
+              <a:t>it returns each question WITH the article numbers it is based on (the gold answer).</a:t>
+            </a:r>
+          </a:p>
+          <a:p>
+            <a:pPr>
+              <a:spcAft>
+                <a:spcPts val="700"/>
+              </a:spcAft>
+            </a:pPr>
+            <a:r>
+              <a:rPr sz="1500" b="1" i="0">
+                <a:solidFill>
+                  <a:srgbClr val="1E3A5F"/>
+                </a:solidFill>
+              </a:rPr>
+              <a:t>• Step 4 — </a:t>
+            </a:r>
+            <a:r>
+              <a:rPr sz="1500" b="0" i="0">
+                <a:solidFill>
+                  <a:srgbClr val="444444"/>
+                </a:solidFill>
+              </a:rPr>
+              <a:t>gold numbers are validated against the corpus index; invalid ones are dropped.</a:t>
+            </a:r>
+          </a:p>
+          <a:p>
+            <a:pPr>
+              <a:spcAft>
+                <a:spcPts val="700"/>
+              </a:spcAft>
+            </a:pPr>
+            <a:r>
+              <a:rPr sz="1500" b="1" i="0">
+                <a:solidFill>
+                  <a:srgbClr val="1E3A5F"/>
+                </a:solidFill>
+              </a:rPr>
+              <a:t>• Step 5 — </a:t>
+            </a:r>
+            <a:r>
+              <a:rPr sz="1500" b="0" i="0">
+                <a:solidFill>
+                  <a:srgbClr val="444444"/>
+                </a:solidFill>
+              </a:rPr>
+              <a:t>batched (~10 questions / call) for efficiency; deduped; mixes general + case questions.</a:t>
+            </a:r>
+          </a:p>
+          <a:p>
+            <a:pPr>
+              <a:spcAft>
+                <a:spcPts val="700"/>
+              </a:spcAft>
+            </a:pPr>
+            <a:r>
+              <a:rPr sz="1500" b="1" i="0">
+                <a:solidFill>
+                  <a:srgbClr val="1E3A5F"/>
+                </a:solidFill>
+              </a:rPr>
+              <a:t>• Result: </a:t>
+            </a:r>
+            <a:r>
+              <a:rPr sz="1500" b="0" i="0">
+                <a:solidFill>
+                  <a:srgbClr val="1E3A5F"/>
+                </a:solidFill>
+              </a:rPr>
+              <a:t>questions are grounded in real law, so each has a known, checkable correct answer.</a:t>
+            </a:r>
+          </a:p>
+        </p:txBody>
+      </p:sp>
+      <p:sp>
+        <p:nvSpPr>
+          <p:cNvPr id="5" name="Rectangle 4"/>
+          <p:cNvSpPr/>
+          <p:nvPr/>
+        </p:nvSpPr>
+        <p:spPr>
+          <a:xfrm>
+            <a:off x="6858000" y="1371600"/>
+            <a:ext cx="4800600" cy="3108960"/>
+          </a:xfrm>
+          <a:prstGeom prst="rect">
+            <a:avLst/>
+          </a:prstGeom>
+          <a:solidFill>
+            <a:srgbClr val="0F172A"/>
+          </a:solidFill>
+          <a:ln>
+            <a:noFill/>
+          </a:ln>
+          <a:effectLst/>
+        </p:spPr>
+        <p:style>
+          <a:lnRef idx="1">
+            <a:schemeClr val="accent1"/>
+          </a:lnRef>
+          <a:fillRef idx="3">
+            <a:schemeClr val="accent1"/>
+          </a:fillRef>
+          <a:effectRef idx="2">
+            <a:schemeClr val="accent1"/>
+          </a:effectRef>
+          <a:fontRef idx="minor">
+            <a:schemeClr val="lt1"/>
+          </a:fontRef>
+        </p:style>
+        <p:txBody>
+          <a:bodyPr rtlCol="0" anchor="ctr" wrap="square" lIns="164592" tIns="109728" rIns="137160"/>
+          <a:lstStyle/>
+          <a:p>
+            <a:pPr algn="ctr"/>
+            <a:r>
+              <a:rPr sz="1200" b="1" i="0">
+                <a:solidFill>
+                  <a:srgbClr val="7AD1A0"/>
+                </a:solidFill>
+                <a:latin typeface="Consolas"/>
+              </a:rPr>
+              <a:t>Generation prompt (excerpt)</a:t>
+            </a:r>
+          </a:p>
+          <a:p>
+            <a:pPr>
+              <a:spcAft>
+                <a:spcPts val="200"/>
+              </a:spcAft>
+            </a:pPr>
+            <a:r>
+              <a:rPr sz="1100" b="0" i="0">
+                <a:solidFill>
+                  <a:srgbClr val="D7E3F4"/>
+                </a:solidFill>
+                <a:latin typeface="Consolas"/>
+              </a:rPr>
+              <a:t>From these Lebanese Penal Code articles:</a:t>
+            </a:r>
+          </a:p>
+          <a:p>
+            <a:pPr>
+              <a:spcAft>
+                <a:spcPts val="200"/>
+              </a:spcAft>
+            </a:pPr>
+            <a:r>
+              <a:rPr sz="1100" b="0" i="0">
+                <a:solidFill>
+                  <a:srgbClr val="D7E3F4"/>
+                </a:solidFill>
+                <a:latin typeface="Consolas"/>
+              </a:rPr>
+              <a:t>  - Article 549: ...</a:t>
+            </a:r>
+          </a:p>
+          <a:p>
+            <a:pPr>
+              <a:spcAft>
+                <a:spcPts val="200"/>
+              </a:spcAft>
+            </a:pPr>
+            <a:r>
+              <a:rPr sz="1100" b="0" i="0">
+                <a:solidFill>
+                  <a:srgbClr val="D7E3F4"/>
+                </a:solidFill>
+                <a:latin typeface="Consolas"/>
+              </a:rPr>
+              <a:t>  - Article 547: ...</a:t>
+            </a:r>
+          </a:p>
+          <a:p>
+            <a:pPr>
+              <a:spcAft>
+                <a:spcPts val="200"/>
+              </a:spcAft>
+            </a:pPr>
+            <a:r>
+              <a:rPr sz="1100" b="0" i="0">
+                <a:solidFill>
+                  <a:srgbClr val="D7E3F4"/>
+                </a:solidFill>
+                <a:latin typeface="Consolas"/>
+              </a:rPr>
+              <a:t/>
+            </a:r>
+          </a:p>
+          <a:p>
+            <a:pPr>
+              <a:spcAft>
+                <a:spcPts val="200"/>
+              </a:spcAft>
+            </a:pPr>
+            <a:r>
+              <a:rPr sz="1100" b="0" i="0">
+                <a:solidFill>
+                  <a:srgbClr val="D7E3F4"/>
+                </a:solidFill>
+                <a:latin typeface="Consolas"/>
+              </a:rPr>
+              <a:t>Generate N diverse questions in {language}.</a:t>
+            </a:r>
+          </a:p>
+          <a:p>
+            <a:pPr>
+              <a:spcAft>
+                <a:spcPts val="200"/>
+              </a:spcAft>
+            </a:pPr>
+            <a:r>
+              <a:rPr sz="1100" b="0" i="0">
+                <a:solidFill>
+                  <a:srgbClr val="D7E3F4"/>
+                </a:solidFill>
+                <a:latin typeface="Consolas"/>
+              </a:rPr>
+              <a:t>Set gold_articles to those article numbers</a:t>
+            </a:r>
+          </a:p>
+          <a:p>
+            <a:pPr>
+              <a:spcAft>
+                <a:spcPts val="200"/>
+              </a:spcAft>
+            </a:pPr>
+            <a:r>
+              <a:rPr sz="1100" b="0" i="0">
+                <a:solidFill>
+                  <a:srgbClr val="D7E3F4"/>
+                </a:solidFill>
+                <a:latin typeface="Consolas"/>
+              </a:rPr>
+              <a:t>(choose only from: 547, 548, 549).</a:t>
+            </a:r>
+          </a:p>
+          <a:p>
+            <a:pPr>
+              <a:spcAft>
+                <a:spcPts val="200"/>
+              </a:spcAft>
+            </a:pPr>
+            <a:r>
+              <a:rPr sz="1100" b="0" i="0">
+                <a:solidFill>
+                  <a:srgbClr val="D7E3F4"/>
+                </a:solidFill>
+                <a:latin typeface="Consolas"/>
+              </a:rPr>
+              <a:t>Mix general questions and case scenarios.</a:t>
+            </a:r>
+          </a:p>
+        </p:txBody>
+      </p:sp>
+    </p:spTree>
+  </p:cSld>
+  <p:clrMapOvr>
+    <a:masterClrMapping/>
+  </p:clrMapOvr>
+</p:sld>
+</file>
+
+<file path=ppt/slides/slide17.xml><?xml version="1.0" encoding="utf-8"?>
+<p:sld xmlns:a="http://schemas.openxmlformats.org/drawingml/2006/main" xmlns:p="http://schemas.openxmlformats.org/presentationml/2006/main" xmlns:r="http://schemas.openxmlformats.org/officeDocument/2006/relationships">
+  <p:cSld>
+    <p:spTree>
+      <p:nvGrpSpPr>
+        <p:cNvPr id="1" name=""/>
+        <p:cNvGrpSpPr/>
+        <p:nvPr/>
+      </p:nvGrpSpPr>
+      <p:grpSpPr/>
+      <p:sp>
+        <p:nvSpPr>
+          <p:cNvPr id="2" name="Rectangle 1"/>
+          <p:cNvSpPr/>
+          <p:nvPr/>
+        </p:nvSpPr>
+        <p:spPr>
+          <a:xfrm>
+            <a:off x="0" y="0"/>
+            <a:ext cx="12191695" cy="960120"/>
+          </a:xfrm>
+          <a:prstGeom prst="rect">
+            <a:avLst/>
+          </a:prstGeom>
+          <a:solidFill>
+            <a:srgbClr val="1E3A5F"/>
+          </a:solidFill>
+          <a:ln>
+            <a:noFill/>
+          </a:ln>
+          <a:effectLst/>
+        </p:spPr>
+        <p:style>
+          <a:lnRef idx="1">
+            <a:schemeClr val="accent1"/>
+          </a:lnRef>
+          <a:fillRef idx="3">
+            <a:schemeClr val="accent1"/>
+          </a:fillRef>
+          <a:effectRef idx="2">
+            <a:schemeClr val="accent1"/>
+          </a:effectRef>
+          <a:fontRef idx="minor">
+            <a:schemeClr val="lt1"/>
+          </a:fontRef>
+        </p:style>
+        <p:txBody>
+          <a:bodyPr rtlCol="0" anchor="ctr"/>
+          <a:lstStyle/>
+          <a:p>
+            <a:pPr algn="ctr"/>
+          </a:p>
+        </p:txBody>
+      </p:sp>
+      <p:sp>
+        <p:nvSpPr>
+          <p:cNvPr id="3" name="TextBox 2"/>
+          <p:cNvSpPr txBox="1"/>
+          <p:nvPr/>
+        </p:nvSpPr>
+        <p:spPr>
+          <a:xfrm>
+            <a:off x="457200" y="73152"/>
+            <a:ext cx="11277295" cy="822960"/>
+          </a:xfrm>
+          <a:prstGeom prst="rect">
+            <a:avLst/>
+          </a:prstGeom>
+          <a:noFill/>
+        </p:spPr>
+        <p:txBody>
+          <a:bodyPr wrap="square">
+            <a:spAutoFit/>
+          </a:bodyPr>
+          <a:lstStyle/>
+          <a:p>
+            <a:r>
+              <a:rPr sz="2700" b="1" i="0">
+                <a:solidFill>
+                  <a:srgbClr val="FFFFFF"/>
+                </a:solidFill>
+              </a:rPr>
+              <a:t>14. Benchmark — What Is Measured</a:t>
             </a:r>
           </a:p>
         </p:txBody>
@@ -4226,8 +5108,8 @@
           <p:nvPr/>
         </p:nvGraphicFramePr>
         <p:xfrm>
-          <a:off x="548640" y="1280160"/>
-          <a:ext cx="11064240" cy="4846320"/>
+          <a:off x="548640" y="1234440"/>
+          <a:ext cx="11064240" cy="4937760"/>
         </p:xfrm>
         <a:graphic>
           <a:graphicData uri="http://schemas.openxmlformats.org/drawingml/2006/table">
@@ -4237,10 +5119,10 @@
               </a:tblPr>
               <a:tblGrid>
                 <a:gridCol w="2194560"/>
-                <a:gridCol w="5577840"/>
-                <a:gridCol w="3291840"/>
+                <a:gridCol w="5669280"/>
+                <a:gridCol w="3200400"/>
               </a:tblGrid>
-              <a:tr h="692331">
+              <a:tr h="705394">
                 <a:tc>
                   <a:txBody>
                     <a:bodyPr/>
@@ -4305,7 +5187,7 @@
                   </a:tcPr>
                 </a:tc>
               </a:tr>
-              <a:tr h="692331">
+              <a:tr h="705394">
                 <a:tc>
                   <a:txBody>
                     <a:bodyPr/>
@@ -4358,7 +5240,7 @@
                   <a:tcPr/>
                 </a:tc>
               </a:tr>
-              <a:tr h="692331">
+              <a:tr h="705394">
                 <a:tc>
                   <a:txBody>
                     <a:bodyPr/>
@@ -4411,7 +5293,7 @@
                   <a:tcPr/>
                 </a:tc>
               </a:tr>
-              <a:tr h="692331">
+              <a:tr h="705394">
                 <a:tc>
                   <a:txBody>
                     <a:bodyPr/>
@@ -4464,7 +5346,7 @@
                   <a:tcPr/>
                 </a:tc>
               </a:tr>
-              <a:tr h="692331">
+              <a:tr h="705394">
                 <a:tc>
                   <a:txBody>
                     <a:bodyPr/>
@@ -4493,7 +5375,7 @@
                             <a:srgbClr val="444444"/>
                           </a:solidFill>
                         </a:rPr>
-                        <a:t>Judge compares vs. a human 'source of truth' answer</a:t>
+                        <a:t>Judge compares answer vs. a human source-of-truth answer</a:t>
                       </a:r>
                     </a:p>
                   </a:txBody>
@@ -4517,7 +5399,7 @@
                   <a:tcPr/>
                 </a:tc>
               </a:tr>
-              <a:tr h="692331">
+              <a:tr h="705394">
                 <a:tc>
                   <a:txBody>
                     <a:bodyPr/>
@@ -4570,7 +5452,7 @@
                   <a:tcPr/>
                 </a:tc>
               </a:tr>
-              <a:tr h="692334">
+              <a:tr h="705396">
                 <a:tc>
                   <a:txBody>
                     <a:bodyPr/>
@@ -4635,7 +5517,7 @@
 </p:sld>
 </file>
 
-<file path=ppt/slides/slide15.xml><?xml version="1.0" encoding="utf-8"?>
+<file path=ppt/slides/slide18.xml><?xml version="1.0" encoding="utf-8"?>
 <p:sld xmlns:a="http://schemas.openxmlformats.org/drawingml/2006/main" xmlns:p="http://schemas.openxmlformats.org/presentationml/2006/main" xmlns:r="http://schemas.openxmlformats.org/officeDocument/2006/relationships">
   <p:cSld>
     <p:spTree>
@@ -4654,7 +5536,7 @@
         <p:spPr>
           <a:xfrm>
             <a:off x="0" y="0"/>
-            <a:ext cx="12191695" cy="1005840"/>
+            <a:ext cx="12191695" cy="960120"/>
           </a:xfrm>
           <a:prstGeom prst="rect">
             <a:avLst/>
@@ -4697,8 +5579,8 @@
         </p:nvSpPr>
         <p:spPr>
           <a:xfrm>
-            <a:off x="457200" y="91440"/>
-            <a:ext cx="11277295" cy="868680"/>
+            <a:off x="457200" y="73152"/>
+            <a:ext cx="11277295" cy="822960"/>
           </a:xfrm>
           <a:prstGeom prst="rect">
             <a:avLst/>
@@ -4712,12 +5594,22 @@
           <a:lstStyle/>
           <a:p>
             <a:r>
-              <a:rPr sz="2800" b="1" i="0">
+              <a:rPr sz="2700" b="1" i="0">
                 <a:solidFill>
                   <a:srgbClr val="FFFFFF"/>
                 </a:solidFill>
               </a:rPr>
-              <a:t>12. Benchmark — How It Runs (in the App)</a:t>
+              <a:t>15. The Evaluator Agent (LLM-as-Judge)</a:t>
+            </a:r>
+          </a:p>
+          <a:p>
+            <a:r>
+              <a:rPr sz="1300" b="0" i="0">
+                <a:solidFill>
+                  <a:srgbClr val="BFD3E6"/>
+                </a:solidFill>
+              </a:rPr>
+              <a:t>A separate LLM scores each answer — an automated expert reviewer</a:t>
             </a:r>
           </a:p>
         </p:txBody>
@@ -4730,8 +5622,8 @@
         </p:nvSpPr>
         <p:spPr>
           <a:xfrm>
-            <a:off x="640080" y="1234440"/>
-            <a:ext cx="10911535" cy="5257800"/>
+            <a:off x="548640" y="1143000"/>
+            <a:ext cx="6126480" cy="5394960"/>
           </a:xfrm>
           <a:prstGeom prst="rect">
             <a:avLst/>
@@ -4750,20 +5642,20 @@
               </a:spcAft>
             </a:pPr>
             <a:r>
-              <a:rPr sz="1650" b="1" i="0">
+              <a:rPr sz="1500" b="1" i="0">
                 <a:solidFill>
                   <a:srgbClr val="1E3A5F"/>
                 </a:solidFill>
               </a:rPr>
-              <a:t>• On-the-fly generation: </a:t>
-            </a:r>
-            <a:r>
-              <a:rPr sz="1650" b="0" i="0">
+              <a:t>• What it is: </a:t>
+            </a:r>
+            <a:r>
+              <a:rPr sz="1500" b="0" i="0">
                 <a:solidFill>
                   <a:srgbClr val="444444"/>
                 </a:solidFill>
               </a:rPr>
-              <a:t>the user sets the number of questions; the generator produces grounded questions and shows them 10 per page.</a:t>
+              <a:t>a second, independent LLM (Claude), separate from the answering agents.</a:t>
             </a:r>
           </a:p>
           <a:p>
@@ -4773,20 +5665,20 @@
               </a:spcAft>
             </a:pPr>
             <a:r>
-              <a:rPr sz="1650" b="1" i="0">
+              <a:rPr sz="1500" b="1" i="0">
                 <a:solidFill>
                   <a:srgbClr val="1E3A5F"/>
                 </a:solidFill>
               </a:rPr>
-              <a:t>• Reference answers: </a:t>
-            </a:r>
-            <a:r>
-              <a:rPr sz="1650" b="0" i="0">
+              <a:t>• Deterministic: </a:t>
+            </a:r>
+            <a:r>
+              <a:rPr sz="1500" b="0" i="0">
                 <a:solidFill>
                   <a:srgbClr val="444444"/>
                 </a:solidFill>
               </a:rPr>
-              <a:t>an editable column where the user enters the ground-truth answer (REQUIRED for judged runs).</a:t>
+              <a:t>temperature 0 for consistent, deterministic scoring.</a:t>
             </a:r>
           </a:p>
           <a:p>
@@ -4796,20 +5688,20 @@
               </a:spcAft>
             </a:pPr>
             <a:r>
-              <a:rPr sz="1650" b="1" i="0">
+              <a:rPr sz="1500" b="1" i="0">
                 <a:solidFill>
                   <a:srgbClr val="1E3A5F"/>
                 </a:solidFill>
               </a:rPr>
-              <a:t>• Full-pipeline comparison: </a:t>
-            </a:r>
-            <a:r>
-              <a:rPr sz="1650" b="0" i="0">
+              <a:t>• Rubric: </a:t>
+            </a:r>
+            <a:r>
+              <a:rPr sz="1500" b="0" i="0">
                 <a:solidFill>
                   <a:srgbClr val="444444"/>
                 </a:solidFill>
               </a:rPr>
-              <a:t>compares Multi-Agent vs. Single-Agent vs. No-RAG baselines; the judge scores each against the reference.</a:t>
+              <a:t>scores 4 dimensions 1–5: legal correctness, citation quality, completeness, clarity.</a:t>
             </a:r>
           </a:p>
           <a:p>
@@ -4819,20 +5711,20 @@
               </a:spcAft>
             </a:pPr>
             <a:r>
-              <a:rPr sz="1650" b="1" i="0">
+              <a:rPr sz="1500" b="1" i="0">
                 <a:solidFill>
                   <a:srgbClr val="1E3A5F"/>
                 </a:solidFill>
               </a:rPr>
-              <a:t>• Automatic scoring: </a:t>
-            </a:r>
-            <a:r>
-              <a:rPr sz="1650" b="0" i="0">
+              <a:t>• Output: </a:t>
+            </a:r>
+            <a:r>
+              <a:rPr sz="1500" b="0" i="0">
                 <a:solidFill>
                   <a:srgbClr val="444444"/>
                 </a:solidFill>
               </a:rPr>
-              <a:t>objective citation metrics are computed automatically from the gold article numbers.</a:t>
+              <a:t>returns a strict JSON verdict + a one-line explanation; the average is the score.</a:t>
             </a:r>
           </a:p>
           <a:p>
@@ -4842,58 +5734,40 @@
               </a:spcAft>
             </a:pPr>
             <a:r>
-              <a:rPr sz="1650" b="1" i="0">
+              <a:rPr sz="1500" b="1" i="0">
                 <a:solidFill>
                   <a:srgbClr val="1E3A5F"/>
                 </a:solidFill>
               </a:rPr>
-              <a:t>• Output: </a:t>
-            </a:r>
-            <a:r>
-              <a:rPr sz="1650" b="0" i="0">
+              <a:t>• Cross-checked: </a:t>
+            </a:r>
+            <a:r>
+              <a:rPr sz="1500" b="0" i="0">
                 <a:solidFill>
                   <a:srgbClr val="444444"/>
                 </a:solidFill>
               </a:rPr>
-              <a:t>results: per-system scores, per-dimension table, charts, and downloadable JSON.</a:t>
-            </a:r>
-          </a:p>
-        </p:txBody>
-      </p:sp>
-    </p:spTree>
-  </p:cSld>
-  <p:clrMapOvr>
-    <a:masterClrMapping/>
-  </p:clrMapOvr>
-</p:sld>
-</file>
-
-<file path=ppt/slides/slide16.xml><?xml version="1.0" encoding="utf-8"?>
-<p:sld xmlns:a="http://schemas.openxmlformats.org/drawingml/2006/main" xmlns:p="http://schemas.openxmlformats.org/presentationml/2006/main" xmlns:r="http://schemas.openxmlformats.org/officeDocument/2006/relationships">
-  <p:cSld>
-    <p:spTree>
-      <p:nvGrpSpPr>
-        <p:cNvPr id="1" name=""/>
-        <p:cNvGrpSpPr/>
-        <p:nvPr/>
-      </p:nvGrpSpPr>
-      <p:grpSpPr/>
-      <p:sp>
-        <p:nvSpPr>
-          <p:cNvPr id="2" name="Rectangle 1"/>
+              <a:t>objective citation-F1 (vs gold articles) is ALSO computed automatically to cross-check the judge.</a:t>
+            </a:r>
+          </a:p>
+        </p:txBody>
+      </p:sp>
+      <p:sp>
+        <p:nvSpPr>
+          <p:cNvPr id="5" name="Rectangle 4"/>
           <p:cNvSpPr/>
           <p:nvPr/>
         </p:nvSpPr>
         <p:spPr>
           <a:xfrm>
-            <a:off x="0" y="0"/>
-            <a:ext cx="12191695" cy="1005840"/>
+            <a:off x="6858000" y="1371600"/>
+            <a:ext cx="4800600" cy="4206240"/>
           </a:xfrm>
           <a:prstGeom prst="rect">
             <a:avLst/>
           </a:prstGeom>
           <a:solidFill>
-            <a:srgbClr val="1E3A5F"/>
+            <a:srgbClr val="0F172A"/>
           </a:solidFill>
           <a:ln>
             <a:noFill/>
@@ -4915,602 +5789,178 @@
           </a:fontRef>
         </p:style>
         <p:txBody>
-          <a:bodyPr rtlCol="0" anchor="ctr"/>
+          <a:bodyPr rtlCol="0" anchor="ctr" wrap="square" lIns="164592" tIns="109728" rIns="137160"/>
           <a:lstStyle/>
           <a:p>
             <a:pPr algn="ctr"/>
-          </a:p>
-        </p:txBody>
-      </p:sp>
-      <p:sp>
-        <p:nvSpPr>
-          <p:cNvPr id="3" name="TextBox 2"/>
-          <p:cNvSpPr txBox="1"/>
-          <p:nvPr/>
-        </p:nvSpPr>
-        <p:spPr>
-          <a:xfrm>
-            <a:off x="457200" y="91440"/>
-            <a:ext cx="11277295" cy="868680"/>
-          </a:xfrm>
-          <a:prstGeom prst="rect">
-            <a:avLst/>
-          </a:prstGeom>
-          <a:noFill/>
-        </p:spPr>
-        <p:txBody>
-          <a:bodyPr wrap="square">
-            <a:spAutoFit/>
-          </a:bodyPr>
-          <a:lstStyle/>
-          <a:p>
-            <a:r>
-              <a:rPr sz="2800" b="1" i="0">
-                <a:solidFill>
-                  <a:srgbClr val="FFFFFF"/>
-                </a:solidFill>
-              </a:rPr>
-              <a:t>13. Results — Accuracy by Language</a:t>
-            </a:r>
-          </a:p>
-        </p:txBody>
-      </p:sp>
-      <p:pic>
-        <p:nvPicPr>
-          <p:cNvPr id="4" name="Picture 3" descr="fig_languages.png"/>
-          <p:cNvPicPr>
-            <a:picLocks noChangeAspect="1"/>
-          </p:cNvPicPr>
-          <p:nvPr/>
-        </p:nvPicPr>
-        <p:blipFill>
-          <a:blip r:embed="rId2"/>
-          <a:stretch>
-            <a:fillRect/>
-          </a:stretch>
-        </p:blipFill>
-        <p:spPr>
-          <a:xfrm>
-            <a:off x="548640" y="1371600"/>
-            <a:ext cx="6890418" cy="4206240"/>
-          </a:xfrm>
-          <a:prstGeom prst="rect">
-            <a:avLst/>
-          </a:prstGeom>
-        </p:spPr>
-      </p:pic>
-      <p:sp>
-        <p:nvSpPr>
-          <p:cNvPr id="5" name="TextBox 4"/>
-          <p:cNvSpPr txBox="1"/>
-          <p:nvPr/>
-        </p:nvSpPr>
-        <p:spPr>
-          <a:xfrm>
-            <a:off x="6858000" y="1737360"/>
-            <a:ext cx="4846320" cy="4206240"/>
-          </a:xfrm>
-          <a:prstGeom prst="rect">
-            <a:avLst/>
-          </a:prstGeom>
-          <a:noFill/>
-        </p:spPr>
-        <p:txBody>
-          <a:bodyPr wrap="square">
-            <a:spAutoFit/>
-          </a:bodyPr>
-          <a:lstStyle/>
-          <a:p>
-            <a:pPr>
-              <a:spcAft>
-                <a:spcPts val="1200"/>
-              </a:spcAft>
-            </a:pPr>
-            <a:r>
-              <a:rPr sz="1700" b="1" i="0">
-                <a:solidFill>
-                  <a:srgbClr val="1E3A5F"/>
-                </a:solidFill>
-              </a:rPr>
-              <a:t>• Arabic (primary legal language): </a:t>
-            </a:r>
-            <a:r>
-              <a:rPr sz="1700" b="0" i="0">
-                <a:solidFill>
-                  <a:srgbClr val="444444"/>
-                </a:solidFill>
-              </a:rPr>
-              <a:t>72% of correct articles in the top 5, 81% in the top 10.</a:t>
-            </a:r>
-          </a:p>
-          <a:p>
-            <a:pPr>
-              <a:spcAft>
-                <a:spcPts val="1200"/>
-              </a:spcAft>
-            </a:pPr>
-            <a:r>
-              <a:rPr sz="1700" b="1" i="0">
-                <a:solidFill>
-                  <a:srgbClr val="1E3A5F"/>
-                </a:solidFill>
-              </a:rPr>
-              <a:t>• English / French: </a:t>
-            </a:r>
-            <a:r>
-              <a:rPr sz="1700" b="0" i="0">
-                <a:solidFill>
-                  <a:srgbClr val="444444"/>
-                </a:solidFill>
-              </a:rPr>
-              <a:t>lower — the corpus is Arabic-primary; cross-lingual retrieval is the main next step.</a:t>
-            </a:r>
-          </a:p>
-          <a:p>
-            <a:pPr>
-              <a:spcAft>
-                <a:spcPts val="800"/>
-              </a:spcAft>
-            </a:pPr>
-            <a:r>
-              <a:rPr sz="1500" b="1" i="0">
-                <a:solidFill>
-                  <a:srgbClr val="1E3A5F"/>
-                </a:solidFill>
-              </a:rPr>
-              <a:t>• Note: </a:t>
-            </a:r>
-            <a:r>
-              <a:rPr sz="1500" b="0" i="0">
-                <a:solidFill>
-                  <a:srgbClr val="444444"/>
-                </a:solidFill>
-              </a:rPr>
-              <a:t>the article-number metric fairly credits cross-lingual matches.</a:t>
-            </a:r>
-          </a:p>
-        </p:txBody>
-      </p:sp>
-    </p:spTree>
-  </p:cSld>
-  <p:clrMapOvr>
-    <a:masterClrMapping/>
-  </p:clrMapOvr>
-</p:sld>
-</file>
-
-<file path=ppt/slides/slide17.xml><?xml version="1.0" encoding="utf-8"?>
-<p:sld xmlns:a="http://schemas.openxmlformats.org/drawingml/2006/main" xmlns:p="http://schemas.openxmlformats.org/presentationml/2006/main" xmlns:r="http://schemas.openxmlformats.org/officeDocument/2006/relationships">
-  <p:cSld>
-    <p:spTree>
-      <p:nvGrpSpPr>
-        <p:cNvPr id="1" name=""/>
-        <p:cNvGrpSpPr/>
-        <p:nvPr/>
-      </p:nvGrpSpPr>
-      <p:grpSpPr/>
-      <p:sp>
-        <p:nvSpPr>
-          <p:cNvPr id="2" name="Rectangle 1"/>
-          <p:cNvSpPr/>
-          <p:nvPr/>
-        </p:nvSpPr>
-        <p:spPr>
-          <a:xfrm>
-            <a:off x="0" y="0"/>
-            <a:ext cx="12191695" cy="1005840"/>
-          </a:xfrm>
-          <a:prstGeom prst="rect">
-            <a:avLst/>
-          </a:prstGeom>
-          <a:solidFill>
-            <a:srgbClr val="1E3A5F"/>
-          </a:solidFill>
-          <a:ln>
-            <a:noFill/>
-          </a:ln>
-          <a:effectLst/>
-        </p:spPr>
-        <p:style>
-          <a:lnRef idx="1">
-            <a:schemeClr val="accent1"/>
-          </a:lnRef>
-          <a:fillRef idx="3">
-            <a:schemeClr val="accent1"/>
-          </a:fillRef>
-          <a:effectRef idx="2">
-            <a:schemeClr val="accent1"/>
-          </a:effectRef>
-          <a:fontRef idx="minor">
-            <a:schemeClr val="lt1"/>
-          </a:fontRef>
-        </p:style>
-        <p:txBody>
-          <a:bodyPr rtlCol="0" anchor="ctr"/>
-          <a:lstStyle/>
-          <a:p>
-            <a:pPr algn="ctr"/>
-          </a:p>
-        </p:txBody>
-      </p:sp>
-      <p:sp>
-        <p:nvSpPr>
-          <p:cNvPr id="3" name="TextBox 2"/>
-          <p:cNvSpPr txBox="1"/>
-          <p:nvPr/>
-        </p:nvSpPr>
-        <p:spPr>
-          <a:xfrm>
-            <a:off x="457200" y="91440"/>
-            <a:ext cx="11277295" cy="868680"/>
-          </a:xfrm>
-          <a:prstGeom prst="rect">
-            <a:avLst/>
-          </a:prstGeom>
-          <a:noFill/>
-        </p:spPr>
-        <p:txBody>
-          <a:bodyPr wrap="square">
-            <a:spAutoFit/>
-          </a:bodyPr>
-          <a:lstStyle/>
-          <a:p>
-            <a:r>
-              <a:rPr sz="2800" b="1" i="0">
-                <a:solidFill>
-                  <a:srgbClr val="FFFFFF"/>
-                </a:solidFill>
-              </a:rPr>
-              <a:t>14. Results — Search Method &amp; Answer Quality</a:t>
-            </a:r>
-          </a:p>
-        </p:txBody>
-      </p:sp>
-      <p:pic>
-        <p:nvPicPr>
-          <p:cNvPr id="4" name="Picture 3" descr="fig_methods.png"/>
-          <p:cNvPicPr>
-            <a:picLocks noChangeAspect="1"/>
-          </p:cNvPicPr>
-          <p:nvPr/>
-        </p:nvPicPr>
-        <p:blipFill>
-          <a:blip r:embed="rId2"/>
-          <a:stretch>
-            <a:fillRect/>
-          </a:stretch>
-        </p:blipFill>
-        <p:spPr>
-          <a:xfrm>
-            <a:off x="548640" y="1371600"/>
-            <a:ext cx="6950335" cy="4114800"/>
-          </a:xfrm>
-          <a:prstGeom prst="rect">
-            <a:avLst/>
-          </a:prstGeom>
-        </p:spPr>
-      </p:pic>
-      <p:sp>
-        <p:nvSpPr>
-          <p:cNvPr id="5" name="TextBox 4"/>
-          <p:cNvSpPr txBox="1"/>
-          <p:nvPr/>
-        </p:nvSpPr>
-        <p:spPr>
-          <a:xfrm>
-            <a:off x="6858000" y="1737360"/>
-            <a:ext cx="4846320" cy="4206240"/>
-          </a:xfrm>
-          <a:prstGeom prst="rect">
-            <a:avLst/>
-          </a:prstGeom>
-          <a:noFill/>
-        </p:spPr>
-        <p:txBody>
-          <a:bodyPr wrap="square">
-            <a:spAutoFit/>
-          </a:bodyPr>
-          <a:lstStyle/>
-          <a:p>
-            <a:pPr>
-              <a:spcAft>
-                <a:spcPts val="1200"/>
-              </a:spcAft>
-            </a:pPr>
-            <a:r>
-              <a:rPr sz="1700" b="1" i="0">
-                <a:solidFill>
-                  <a:srgbClr val="1E3A5F"/>
-                </a:solidFill>
-              </a:rPr>
-              <a:t>• Best method: </a:t>
-            </a:r>
-            <a:r>
-              <a:rPr sz="1700" b="0" i="0">
-                <a:solidFill>
-                  <a:srgbClr val="444444"/>
-                </a:solidFill>
-              </a:rPr>
-              <a:t>hybrid (keyword + meaning) finds the correct law most often — chosen default.</a:t>
-            </a:r>
-          </a:p>
-          <a:p>
-            <a:pPr>
-              <a:spcAft>
-                <a:spcPts val="1200"/>
-              </a:spcAft>
-            </a:pPr>
-            <a:r>
-              <a:rPr sz="1700" b="1" i="0">
-                <a:solidFill>
-                  <a:srgbClr val="1E3A5F"/>
-                </a:solidFill>
-              </a:rPr>
-              <a:t>• Rejected by data: </a:t>
-            </a:r>
-            <a:r>
-              <a:rPr sz="1700" b="0" i="0">
-                <a:solidFill>
-                  <a:srgbClr val="444444"/>
-                </a:solidFill>
-              </a:rPr>
-              <a:t>a popular English re-ranker made results worse and was removed.</a:t>
-            </a:r>
-          </a:p>
-          <a:p>
-            <a:pPr>
-              <a:spcAft>
-                <a:spcPts val="1200"/>
-              </a:spcAft>
-            </a:pPr>
-            <a:r>
-              <a:rPr sz="1700" b="1" i="0">
-                <a:solidFill>
-                  <a:srgbClr val="1E3A5F"/>
-                </a:solidFill>
-              </a:rPr>
-              <a:t>• Answer quality: </a:t>
-            </a:r>
-            <a:r>
-              <a:rPr sz="1700" b="0" i="0">
-                <a:solidFill>
-                  <a:srgbClr val="444444"/>
-                </a:solidFill>
-              </a:rPr>
-              <a:t>final memoranda rated ~4.6/5 for legal quality by the LLM judge.</a:t>
-            </a:r>
-          </a:p>
-          <a:p>
-            <a:pPr>
-              <a:spcAft>
-                <a:spcPts val="1200"/>
-              </a:spcAft>
-            </a:pPr>
-            <a:r>
-              <a:rPr sz="1700" b="1" i="0">
-                <a:solidFill>
-                  <a:srgbClr val="1E3A5F"/>
-                </a:solidFill>
-              </a:rPr>
-              <a:t>• Practical: </a:t>
-            </a:r>
-            <a:r>
-              <a:rPr sz="1700" b="0" i="0">
-                <a:solidFill>
-                  <a:srgbClr val="444444"/>
-                </a:solidFill>
-              </a:rPr>
-              <a:t>~2–3 minutes, ~$0.12 per full answer.</a:t>
-            </a:r>
-          </a:p>
-        </p:txBody>
-      </p:sp>
-    </p:spTree>
-  </p:cSld>
-  <p:clrMapOvr>
-    <a:masterClrMapping/>
-  </p:clrMapOvr>
-</p:sld>
-</file>
-
-<file path=ppt/slides/slide18.xml><?xml version="1.0" encoding="utf-8"?>
-<p:sld xmlns:a="http://schemas.openxmlformats.org/drawingml/2006/main" xmlns:p="http://schemas.openxmlformats.org/presentationml/2006/main" xmlns:r="http://schemas.openxmlformats.org/officeDocument/2006/relationships">
-  <p:cSld>
-    <p:spTree>
-      <p:nvGrpSpPr>
-        <p:cNvPr id="1" name=""/>
-        <p:cNvGrpSpPr/>
-        <p:nvPr/>
-      </p:nvGrpSpPr>
-      <p:grpSpPr/>
-      <p:sp>
-        <p:nvSpPr>
-          <p:cNvPr id="2" name="Rectangle 1"/>
-          <p:cNvSpPr/>
-          <p:nvPr/>
-        </p:nvSpPr>
-        <p:spPr>
-          <a:xfrm>
-            <a:off x="0" y="0"/>
-            <a:ext cx="12191695" cy="1005840"/>
-          </a:xfrm>
-          <a:prstGeom prst="rect">
-            <a:avLst/>
-          </a:prstGeom>
-          <a:solidFill>
-            <a:srgbClr val="1E3A5F"/>
-          </a:solidFill>
-          <a:ln>
-            <a:noFill/>
-          </a:ln>
-          <a:effectLst/>
-        </p:spPr>
-        <p:style>
-          <a:lnRef idx="1">
-            <a:schemeClr val="accent1"/>
-          </a:lnRef>
-          <a:fillRef idx="3">
-            <a:schemeClr val="accent1"/>
-          </a:fillRef>
-          <a:effectRef idx="2">
-            <a:schemeClr val="accent1"/>
-          </a:effectRef>
-          <a:fontRef idx="minor">
-            <a:schemeClr val="lt1"/>
-          </a:fontRef>
-        </p:style>
-        <p:txBody>
-          <a:bodyPr rtlCol="0" anchor="ctr"/>
-          <a:lstStyle/>
-          <a:p>
-            <a:pPr algn="ctr"/>
-          </a:p>
-        </p:txBody>
-      </p:sp>
-      <p:sp>
-        <p:nvSpPr>
-          <p:cNvPr id="3" name="TextBox 2"/>
-          <p:cNvSpPr txBox="1"/>
-          <p:nvPr/>
-        </p:nvSpPr>
-        <p:spPr>
-          <a:xfrm>
-            <a:off x="457200" y="91440"/>
-            <a:ext cx="11277295" cy="868680"/>
-          </a:xfrm>
-          <a:prstGeom prst="rect">
-            <a:avLst/>
-          </a:prstGeom>
-          <a:noFill/>
-        </p:spPr>
-        <p:txBody>
-          <a:bodyPr wrap="square">
-            <a:spAutoFit/>
-          </a:bodyPr>
-          <a:lstStyle/>
-          <a:p>
-            <a:r>
-              <a:rPr sz="2800" b="1" i="0">
-                <a:solidFill>
-                  <a:srgbClr val="FFFFFF"/>
-                </a:solidFill>
-              </a:rPr>
-              <a:t>15. Key Findings</a:t>
-            </a:r>
-          </a:p>
-        </p:txBody>
-      </p:sp>
-      <p:sp>
-        <p:nvSpPr>
-          <p:cNvPr id="4" name="TextBox 3"/>
-          <p:cNvSpPr txBox="1"/>
-          <p:nvPr/>
-        </p:nvSpPr>
-        <p:spPr>
-          <a:xfrm>
-            <a:off x="640080" y="1234440"/>
-            <a:ext cx="10911535" cy="5257800"/>
-          </a:xfrm>
-          <a:prstGeom prst="rect">
-            <a:avLst/>
-          </a:prstGeom>
-          <a:noFill/>
-        </p:spPr>
-        <p:txBody>
-          <a:bodyPr wrap="square">
-            <a:spAutoFit/>
-          </a:bodyPr>
-          <a:lstStyle/>
-          <a:p>
-            <a:pPr>
-              <a:spcAft>
-                <a:spcPts val="800"/>
-              </a:spcAft>
-            </a:pPr>
-            <a:r>
-              <a:rPr sz="1700" b="1" i="0">
-                <a:solidFill>
-                  <a:srgbClr val="1E3A5F"/>
-                </a:solidFill>
-              </a:rPr>
-              <a:t>• Multi-agent works: </a:t>
-            </a:r>
-            <a:r>
-              <a:rPr sz="1700" b="0" i="0">
-                <a:solidFill>
-                  <a:srgbClr val="444444"/>
-                </a:solidFill>
-              </a:rPr>
-              <a:t>specialised agents produce grounded, well-structured answers (4.6/5).</a:t>
-            </a:r>
-          </a:p>
-          <a:p>
-            <a:pPr>
-              <a:spcAft>
-                <a:spcPts val="800"/>
-              </a:spcAft>
-            </a:pPr>
-            <a:r>
-              <a:rPr sz="1700" b="1" i="0">
-                <a:solidFill>
-                  <a:srgbClr val="1E3A5F"/>
-                </a:solidFill>
-              </a:rPr>
-              <a:t>• Evidence-based engineering: </a:t>
-            </a:r>
-            <a:r>
-              <a:rPr sz="1700" b="0" i="0">
-                <a:solidFill>
-                  <a:srgbClr val="444444"/>
-                </a:solidFill>
-              </a:rPr>
-              <a:t>hybrid &gt; semantic; the re-ranker hurts; the current embedding is validated — all decided by the benchmark.</a:t>
-            </a:r>
-          </a:p>
-          <a:p>
-            <a:pPr>
-              <a:spcAft>
-                <a:spcPts val="800"/>
-              </a:spcAft>
-            </a:pPr>
-            <a:r>
-              <a:rPr sz="1700" b="1" i="0">
-                <a:solidFill>
-                  <a:srgbClr val="1E3A5F"/>
-                </a:solidFill>
-              </a:rPr>
-              <a:t>• Bottleneck identified: </a:t>
-            </a:r>
-            <a:r>
-              <a:rPr sz="1700" b="0" i="0">
-                <a:solidFill>
-                  <a:srgbClr val="444444"/>
-                </a:solidFill>
-              </a:rPr>
-              <a:t>answer quality is bounded by retrieval recall — if the article isn't found, it can't be cited.</a:t>
-            </a:r>
-          </a:p>
-          <a:p>
-            <a:pPr>
-              <a:spcAft>
-                <a:spcPts val="800"/>
-              </a:spcAft>
-            </a:pPr>
-            <a:r>
-              <a:rPr sz="1700" b="1" i="0">
-                <a:solidFill>
-                  <a:srgbClr val="1E3A5F"/>
-                </a:solidFill>
-              </a:rPr>
-              <a:t>• Precision fix measured: </a:t>
-            </a:r>
-            <a:r>
-              <a:rPr sz="1700" b="0" i="0">
-                <a:solidFill>
-                  <a:srgbClr val="444444"/>
-                </a:solidFill>
-              </a:rPr>
-              <a:t>tightening citations raised citation-F1 ~3× (0.04 → 0.13) on the same questions.</a:t>
+            <a:r>
+              <a:rPr sz="1200" b="1" i="0">
+                <a:solidFill>
+                  <a:srgbClr val="7AD1A0"/>
+                </a:solidFill>
+                <a:latin typeface="Consolas"/>
+              </a:rPr>
+              <a:t>Judge prompt (reference-free)</a:t>
+            </a:r>
+          </a:p>
+          <a:p>
+            <a:pPr>
+              <a:spcAft>
+                <a:spcPts val="200"/>
+              </a:spcAft>
+            </a:pPr>
+            <a:r>
+              <a:rPr sz="1100" b="0" i="0">
+                <a:solidFill>
+                  <a:srgbClr val="D7E3F4"/>
+                </a:solidFill>
+                <a:latin typeface="Consolas"/>
+              </a:rPr>
+              <a:t>You are a Lebanese legal evaluation expert.</a:t>
+            </a:r>
+          </a:p>
+          <a:p>
+            <a:pPr>
+              <a:spcAft>
+                <a:spcPts val="200"/>
+              </a:spcAft>
+            </a:pPr>
+            <a:r>
+              <a:rPr sz="1100" b="0" i="0">
+                <a:solidFill>
+                  <a:srgbClr val="D7E3F4"/>
+                </a:solidFill>
+                <a:latin typeface="Consolas"/>
+              </a:rPr>
+              <a:t>User Query: "..."</a:t>
+            </a:r>
+          </a:p>
+          <a:p>
+            <a:pPr>
+              <a:spcAft>
+                <a:spcPts val="200"/>
+              </a:spcAft>
+            </a:pPr>
+            <a:r>
+              <a:rPr sz="1100" b="0" i="0">
+                <a:solidFill>
+                  <a:srgbClr val="D7E3F4"/>
+                </a:solidFill>
+                <a:latin typeface="Consolas"/>
+              </a:rPr>
+              <a:t>Legal Memorandum: "..."</a:t>
+            </a:r>
+          </a:p>
+          <a:p>
+            <a:pPr>
+              <a:spcAft>
+                <a:spcPts val="200"/>
+              </a:spcAft>
+            </a:pPr>
+            <a:r>
+              <a:rPr sz="1100" b="0" i="0">
+                <a:solidFill>
+                  <a:srgbClr val="D7E3F4"/>
+                </a:solidFill>
+                <a:latin typeface="Consolas"/>
+              </a:rPr>
+              <a:t/>
+            </a:r>
+          </a:p>
+          <a:p>
+            <a:pPr>
+              <a:spcAft>
+                <a:spcPts val="200"/>
+              </a:spcAft>
+            </a:pPr>
+            <a:r>
+              <a:rPr sz="1100" b="0" i="0">
+                <a:solidFill>
+                  <a:srgbClr val="D7E3F4"/>
+                </a:solidFill>
+                <a:latin typeface="Consolas"/>
+              </a:rPr>
+              <a:t>Score each 1-5:</a:t>
+            </a:r>
+          </a:p>
+          <a:p>
+            <a:pPr>
+              <a:spcAft>
+                <a:spcPts val="200"/>
+              </a:spcAft>
+            </a:pPr>
+            <a:r>
+              <a:rPr sz="1100" b="0" i="0">
+                <a:solidFill>
+                  <a:srgbClr val="D7E3F4"/>
+                </a:solidFill>
+                <a:latin typeface="Consolas"/>
+              </a:rPr>
+              <a:t>  legal_correctness, citation_quality,</a:t>
+            </a:r>
+          </a:p>
+          <a:p>
+            <a:pPr>
+              <a:spcAft>
+                <a:spcPts val="200"/>
+              </a:spcAft>
+            </a:pPr>
+            <a:r>
+              <a:rPr sz="1100" b="0" i="0">
+                <a:solidFill>
+                  <a:srgbClr val="D7E3F4"/>
+                </a:solidFill>
+                <a:latin typeface="Consolas"/>
+              </a:rPr>
+              <a:t>  completeness, clarity</a:t>
+            </a:r>
+          </a:p>
+          <a:p>
+            <a:pPr>
+              <a:spcAft>
+                <a:spcPts val="200"/>
+              </a:spcAft>
+            </a:pPr>
+            <a:r>
+              <a:rPr sz="1100" b="0" i="0">
+                <a:solidFill>
+                  <a:srgbClr val="D7E3F4"/>
+                </a:solidFill>
+                <a:latin typeface="Consolas"/>
+              </a:rPr>
+              <a:t>Return ONLY JSON:</a:t>
+            </a:r>
+          </a:p>
+          <a:p>
+            <a:pPr>
+              <a:spcAft>
+                <a:spcPts val="200"/>
+              </a:spcAft>
+            </a:pPr>
+            <a:r>
+              <a:rPr sz="1100" b="0" i="0">
+                <a:solidFill>
+                  <a:srgbClr val="D7E3F4"/>
+                </a:solidFill>
+                <a:latin typeface="Consolas"/>
+              </a:rPr>
+              <a:t>  {legal_correctness:N, ... ,</a:t>
+            </a:r>
+          </a:p>
+          <a:p>
+            <a:pPr>
+              <a:spcAft>
+                <a:spcPts val="200"/>
+              </a:spcAft>
+            </a:pPr>
+            <a:r>
+              <a:rPr sz="1100" b="0" i="0">
+                <a:solidFill>
+                  <a:srgbClr val="D7E3F4"/>
+                </a:solidFill>
+                <a:latin typeface="Consolas"/>
+              </a:rPr>
+              <a:t>   explanation:"one sentence"}</a:t>
             </a:r>
           </a:p>
         </p:txBody>
@@ -5542,7 +5992,7 @@
         <p:spPr>
           <a:xfrm>
             <a:off x="0" y="0"/>
-            <a:ext cx="12191695" cy="1005840"/>
+            <a:ext cx="12191695" cy="960120"/>
           </a:xfrm>
           <a:prstGeom prst="rect">
             <a:avLst/>
@@ -5585,8 +6035,8 @@
         </p:nvSpPr>
         <p:spPr>
           <a:xfrm>
-            <a:off x="457200" y="91440"/>
-            <a:ext cx="11277295" cy="868680"/>
+            <a:off x="457200" y="73152"/>
+            <a:ext cx="11277295" cy="822960"/>
           </a:xfrm>
           <a:prstGeom prst="rect">
             <a:avLst/>
@@ -5600,12 +6050,22 @@
           <a:lstStyle/>
           <a:p>
             <a:r>
-              <a:rPr sz="2800" b="1" i="0">
+              <a:rPr sz="2700" b="1" i="0">
                 <a:solidFill>
                   <a:srgbClr val="FFFFFF"/>
                 </a:solidFill>
               </a:rPr>
-              <a:t>16. Engineering &amp; Reproducibility</a:t>
+              <a:t>16. The Source-of-Truth (Reference) Answer</a:t>
+            </a:r>
+          </a:p>
+          <a:p>
+            <a:r>
+              <a:rPr sz="1300" b="0" i="0">
+                <a:solidFill>
+                  <a:srgbClr val="BFD3E6"/>
+                </a:solidFill>
+              </a:rPr>
+              <a:t>Why the human ground-truth answer is essential</a:t>
             </a:r>
           </a:p>
         </p:txBody>
@@ -5618,8 +6078,8 @@
         </p:nvSpPr>
         <p:spPr>
           <a:xfrm>
-            <a:off x="640080" y="1234440"/>
-            <a:ext cx="10911535" cy="5257800"/>
+            <a:off x="548640" y="1143000"/>
+            <a:ext cx="6126480" cy="5394960"/>
           </a:xfrm>
           <a:prstGeom prst="rect">
             <a:avLst/>
@@ -5638,20 +6098,20 @@
               </a:spcAft>
             </a:pPr>
             <a:r>
-              <a:rPr sz="1650" b="1" i="0">
+              <a:rPr sz="1500" b="1" i="0">
                 <a:solidFill>
                   <a:srgbClr val="1E3A5F"/>
                 </a:solidFill>
               </a:rPr>
-              <a:t>• Standardised model: </a:t>
-            </a:r>
-            <a:r>
-              <a:rPr sz="1650" b="0" i="0">
+              <a:t>• The problem: </a:t>
+            </a:r>
+            <a:r>
+              <a:rPr sz="1500" b="0" i="0">
                 <a:solidFill>
                   <a:srgbClr val="444444"/>
                 </a:solidFill>
               </a:rPr>
-              <a:t>Claude Sonnet 4.5 (selectable: 4.6 / Opus / Haiku).</a:t>
+              <a:t>without a reference, the judge scores on its own opinion — which can be biased or wrong on Lebanese law.</a:t>
             </a:r>
           </a:p>
           <a:p>
@@ -5661,20 +6121,20 @@
               </a:spcAft>
             </a:pPr>
             <a:r>
-              <a:rPr sz="1650" b="1" i="0">
+              <a:rPr sz="1500" b="1" i="0">
                 <a:solidFill>
                   <a:srgbClr val="1E3A5F"/>
                 </a:solidFill>
               </a:rPr>
-              <a:t>• Headless pipeline: </a:t>
-            </a:r>
-            <a:r>
-              <a:rPr sz="1650" b="0" i="0">
+              <a:t>• The fix: </a:t>
+            </a:r>
+            <a:r>
+              <a:rPr sz="1500" b="0" i="0">
                 <a:solidFill>
                   <a:srgbClr val="444444"/>
                 </a:solidFill>
               </a:rPr>
-              <a:t>the full system runs without the UI for batch evaluation.</a:t>
+              <a:t>the user enters the correct expert answer per question — the SOURCE OF TRUTH.</a:t>
             </a:r>
           </a:p>
           <a:p>
@@ -5684,20 +6144,20 @@
               </a:spcAft>
             </a:pPr>
             <a:r>
-              <a:rPr sz="1650" b="1" i="0">
+              <a:rPr sz="1500" b="1" i="0">
                 <a:solidFill>
                   <a:srgbClr val="1E3A5F"/>
                 </a:solidFill>
               </a:rPr>
-              <a:t>• Tests + CI: </a:t>
-            </a:r>
-            <a:r>
-              <a:rPr sz="1650" b="0" i="0">
+              <a:t>• Comparison: </a:t>
+            </a:r>
+            <a:r>
+              <a:rPr sz="1500" b="0" i="0">
                 <a:solidFill>
                   <a:srgbClr val="444444"/>
                 </a:solidFill>
               </a:rPr>
-              <a:t>unit tests and GitHub Actions run automatically on every change.</a:t>
+              <a:t>the judge then compares the AI answer AGAINST this reference (agreement on law, citations, completeness).</a:t>
             </a:r>
           </a:p>
           <a:p>
@@ -5707,20 +6167,20 @@
               </a:spcAft>
             </a:pPr>
             <a:r>
-              <a:rPr sz="1650" b="1" i="0">
+              <a:rPr sz="1500" b="1" i="0">
                 <a:solidFill>
                   <a:srgbClr val="1E3A5F"/>
                 </a:solidFill>
               </a:rPr>
-              <a:t>• Telemetry: </a:t>
-            </a:r>
-            <a:r>
-              <a:rPr sz="1650" b="0" i="0">
+              <a:t>• Why it matters: </a:t>
+            </a:r>
+            <a:r>
+              <a:rPr sz="1500" b="0" i="0">
                 <a:solidFill>
                   <a:srgbClr val="444444"/>
                 </a:solidFill>
               </a:rPr>
-              <a:t>tokens, cost, and latency tracked per agent.</a:t>
+              <a:t>grounds evaluation in human expertise — objective and reproducible, not the judge's guess.</a:t>
             </a:r>
           </a:p>
           <a:p>
@@ -5730,43 +6190,217 @@
               </a:spcAft>
             </a:pPr>
             <a:r>
-              <a:rPr sz="1650" b="1" i="0">
+              <a:rPr sz="1500" b="1" i="0">
                 <a:solidFill>
                   <a:srgbClr val="1E3A5F"/>
                 </a:solidFill>
               </a:rPr>
-              <a:t>• Reproducible: </a:t>
-            </a:r>
-            <a:r>
-              <a:rPr sz="1650" b="0" i="0">
+              <a:t>• Mandatory: </a:t>
+            </a:r>
+            <a:r>
+              <a:rPr sz="1500" b="0" i="0">
                 <a:solidFill>
                   <a:srgbClr val="444444"/>
                 </a:solidFill>
               </a:rPr>
-              <a:t>one command rebuilds the index; the benchmark is regenerable.</a:t>
-            </a:r>
-          </a:p>
-          <a:p>
-            <a:pPr>
-              <a:spcAft>
-                <a:spcPts val="900"/>
-              </a:spcAft>
-            </a:pPr>
-            <a:r>
-              <a:rPr sz="1650" b="1" i="0">
-                <a:solidFill>
-                  <a:srgbClr val="1E3A5F"/>
-                </a:solidFill>
-              </a:rPr>
-              <a:t>• Version-controlled: </a:t>
-            </a:r>
-            <a:r>
-              <a:rPr sz="1650" b="0" i="0">
-                <a:solidFill>
-                  <a:srgbClr val="444444"/>
-                </a:solidFill>
-              </a:rPr>
-              <a:t>all work committed and pushed to GitHub.</a:t>
+              <a:t>it is REQUIRED for a judged comparison run — the run is blocked until every question has one.</a:t>
+            </a:r>
+          </a:p>
+        </p:txBody>
+      </p:sp>
+      <p:sp>
+        <p:nvSpPr>
+          <p:cNvPr id="5" name="Rectangle 4"/>
+          <p:cNvSpPr/>
+          <p:nvPr/>
+        </p:nvSpPr>
+        <p:spPr>
+          <a:xfrm>
+            <a:off x="6858000" y="1371600"/>
+            <a:ext cx="4800600" cy="3931920"/>
+          </a:xfrm>
+          <a:prstGeom prst="rect">
+            <a:avLst/>
+          </a:prstGeom>
+          <a:solidFill>
+            <a:srgbClr val="0F172A"/>
+          </a:solidFill>
+          <a:ln>
+            <a:noFill/>
+          </a:ln>
+          <a:effectLst/>
+        </p:spPr>
+        <p:style>
+          <a:lnRef idx="1">
+            <a:schemeClr val="accent1"/>
+          </a:lnRef>
+          <a:fillRef idx="3">
+            <a:schemeClr val="accent1"/>
+          </a:fillRef>
+          <a:effectRef idx="2">
+            <a:schemeClr val="accent1"/>
+          </a:effectRef>
+          <a:fontRef idx="minor">
+            <a:schemeClr val="lt1"/>
+          </a:fontRef>
+        </p:style>
+        <p:txBody>
+          <a:bodyPr rtlCol="0" anchor="ctr" wrap="square" lIns="164592" tIns="109728" rIns="137160"/>
+          <a:lstStyle/>
+          <a:p>
+            <a:pPr algn="ctr"/>
+            <a:r>
+              <a:rPr sz="1200" b="1" i="0">
+                <a:solidFill>
+                  <a:srgbClr val="7AD1A0"/>
+                </a:solidFill>
+                <a:latin typeface="Consolas"/>
+              </a:rPr>
+              <a:t>Judge prompt (reference-based)</a:t>
+            </a:r>
+          </a:p>
+          <a:p>
+            <a:pPr>
+              <a:spcAft>
+                <a:spcPts val="200"/>
+              </a:spcAft>
+            </a:pPr>
+            <a:r>
+              <a:rPr sz="1100" b="0" i="0">
+                <a:solidFill>
+                  <a:srgbClr val="D7E3F4"/>
+                </a:solidFill>
+                <a:latin typeface="Consolas"/>
+              </a:rPr>
+              <a:t>Compare the AI answer against the</a:t>
+            </a:r>
+          </a:p>
+          <a:p>
+            <a:pPr>
+              <a:spcAft>
+                <a:spcPts val="200"/>
+              </a:spcAft>
+            </a:pPr>
+            <a:r>
+              <a:rPr sz="1100" b="0" i="0">
+                <a:solidFill>
+                  <a:srgbClr val="D7E3F4"/>
+                </a:solidFill>
+                <a:latin typeface="Consolas"/>
+              </a:rPr>
+              <a:t>REFERENCE (ground-truth) answer.</a:t>
+            </a:r>
+          </a:p>
+          <a:p>
+            <a:pPr>
+              <a:spcAft>
+                <a:spcPts val="200"/>
+              </a:spcAft>
+            </a:pPr>
+            <a:r>
+              <a:rPr sz="1100" b="0" i="0">
+                <a:solidFill>
+                  <a:srgbClr val="D7E3F4"/>
+                </a:solidFill>
+                <a:latin typeface="Consolas"/>
+              </a:rPr>
+              <a:t/>
+            </a:r>
+          </a:p>
+          <a:p>
+            <a:pPr>
+              <a:spcAft>
+                <a:spcPts val="200"/>
+              </a:spcAft>
+            </a:pPr>
+            <a:r>
+              <a:rPr sz="1100" b="0" i="0">
+                <a:solidFill>
+                  <a:srgbClr val="D7E3F4"/>
+                </a:solidFill>
+                <a:latin typeface="Consolas"/>
+              </a:rPr>
+              <a:t>REFERENCE answer: "..."</a:t>
+            </a:r>
+          </a:p>
+          <a:p>
+            <a:pPr>
+              <a:spcAft>
+                <a:spcPts val="200"/>
+              </a:spcAft>
+            </a:pPr>
+            <a:r>
+              <a:rPr sz="1100" b="0" i="0">
+                <a:solidFill>
+                  <a:srgbClr val="D7E3F4"/>
+                </a:solidFill>
+                <a:latin typeface="Consolas"/>
+              </a:rPr>
+              <a:t>AI answer: "..."</a:t>
+            </a:r>
+          </a:p>
+          <a:p>
+            <a:pPr>
+              <a:spcAft>
+                <a:spcPts val="200"/>
+              </a:spcAft>
+            </a:pPr>
+            <a:r>
+              <a:rPr sz="1100" b="0" i="0">
+                <a:solidFill>
+                  <a:srgbClr val="D7E3F4"/>
+                </a:solidFill>
+                <a:latin typeface="Consolas"/>
+              </a:rPr>
+              <a:t/>
+            </a:r>
+          </a:p>
+          <a:p>
+            <a:pPr>
+              <a:spcAft>
+                <a:spcPts val="200"/>
+              </a:spcAft>
+            </a:pPr>
+            <a:r>
+              <a:rPr sz="1100" b="0" i="0">
+                <a:solidFill>
+                  <a:srgbClr val="D7E3F4"/>
+                </a:solidFill>
+                <a:latin typeface="Consolas"/>
+              </a:rPr>
+              <a:t>Score 1-5, judged AGAINST the reference:</a:t>
+            </a:r>
+          </a:p>
+          <a:p>
+            <a:pPr>
+              <a:spcAft>
+                <a:spcPts val="200"/>
+              </a:spcAft>
+            </a:pPr>
+            <a:r>
+              <a:rPr sz="1100" b="0" i="0">
+                <a:solidFill>
+                  <a:srgbClr val="D7E3F4"/>
+                </a:solidFill>
+                <a:latin typeface="Consolas"/>
+              </a:rPr>
+              <a:t>  correctness, citations, completeness,</a:t>
+            </a:r>
+          </a:p>
+          <a:p>
+            <a:pPr>
+              <a:spcAft>
+                <a:spcPts val="200"/>
+              </a:spcAft>
+            </a:pPr>
+            <a:r>
+              <a:rPr sz="1100" b="0" i="0">
+                <a:solidFill>
+                  <a:srgbClr val="D7E3F4"/>
+                </a:solidFill>
+                <a:latin typeface="Consolas"/>
+              </a:rPr>
+              <a:t>  clarity.</a:t>
             </a:r>
           </a:p>
         </p:txBody>
@@ -5798,7 +6432,7 @@
         <p:spPr>
           <a:xfrm>
             <a:off x="0" y="0"/>
-            <a:ext cx="12191695" cy="1005840"/>
+            <a:ext cx="12191695" cy="960120"/>
           </a:xfrm>
           <a:prstGeom prst="rect">
             <a:avLst/>
@@ -5841,8 +6475,8 @@
         </p:nvSpPr>
         <p:spPr>
           <a:xfrm>
-            <a:off x="457200" y="91440"/>
-            <a:ext cx="11277295" cy="868680"/>
+            <a:off x="457200" y="73152"/>
+            <a:ext cx="11277295" cy="822960"/>
           </a:xfrm>
           <a:prstGeom prst="rect">
             <a:avLst/>
@@ -5856,7 +6490,7 @@
           <a:lstStyle/>
           <a:p>
             <a:r>
-              <a:rPr sz="2800" b="1" i="0">
+              <a:rPr sz="2700" b="1" i="0">
                 <a:solidFill>
                   <a:srgbClr val="FFFFFF"/>
                 </a:solidFill>
@@ -5884,8 +6518,8 @@
         </p:nvSpPr>
         <p:spPr>
           <a:xfrm>
-            <a:off x="640080" y="1234440"/>
-            <a:ext cx="10911535" cy="5257800"/>
+            <a:off x="640080" y="1188720"/>
+            <a:ext cx="10911535" cy="5349240"/>
           </a:xfrm>
           <a:prstGeom prst="rect">
             <a:avLst/>
@@ -5940,7 +6574,7 @@
                   <a:srgbClr val="444444"/>
                 </a:solidFill>
               </a:rPr>
-              <a:t>citizens struggle to understand their rights; lawyers spend hours locating the right articles and precedents.</a:t>
+              <a:t>ordinary citizens cannot easily understand their rights or obligations.</a:t>
             </a:r>
           </a:p>
           <a:p>
@@ -5955,6 +6589,29 @@
                   <a:srgbClr val="1E3A5F"/>
                 </a:solidFill>
               </a:rPr>
+              <a:t>• Professional burden — </a:t>
+            </a:r>
+            <a:r>
+              <a:rPr sz="1700" b="0" i="0">
+                <a:solidFill>
+                  <a:srgbClr val="444444"/>
+                </a:solidFill>
+              </a:rPr>
+              <a:t>lawyers spend hours locating the correct articles and relevant precedents for a case.</a:t>
+            </a:r>
+          </a:p>
+          <a:p>
+            <a:pPr>
+              <a:spcAft>
+                <a:spcPts val="800"/>
+              </a:spcAft>
+            </a:pPr>
+            <a:r>
+              <a:rPr sz="1700" b="1" i="0">
+                <a:solidFill>
+                  <a:srgbClr val="1E3A5F"/>
+                </a:solidFill>
+              </a:rPr>
               <a:t>• Reliability gap — </a:t>
             </a:r>
             <a:r>
@@ -5963,7 +6620,7 @@
                   <a:srgbClr val="444444"/>
                 </a:solidFill>
               </a:rPr>
-              <a:t>generic chatbots invent article numbers and cannot be trusted for legal citations (hallucination).</a:t>
+              <a:t>generic chatbots invent article numbers and cannot be trusted for legal citation (hallucination).</a:t>
             </a:r>
           </a:p>
           <a:p>
@@ -6018,7 +6675,7 @@
         <p:spPr>
           <a:xfrm>
             <a:off x="0" y="0"/>
-            <a:ext cx="12191695" cy="1005840"/>
+            <a:ext cx="12191695" cy="960120"/>
           </a:xfrm>
           <a:prstGeom prst="rect">
             <a:avLst/>
@@ -6061,8 +6718,8 @@
         </p:nvSpPr>
         <p:spPr>
           <a:xfrm>
-            <a:off x="457200" y="91440"/>
-            <a:ext cx="11277295" cy="868680"/>
+            <a:off x="457200" y="73152"/>
+            <a:ext cx="11277295" cy="822960"/>
           </a:xfrm>
           <a:prstGeom prst="rect">
             <a:avLst/>
@@ -6076,12 +6733,12 @@
           <a:lstStyle/>
           <a:p>
             <a:r>
-              <a:rPr sz="2800" b="1" i="0">
+              <a:rPr sz="2700" b="1" i="0">
                 <a:solidFill>
                   <a:srgbClr val="FFFFFF"/>
                 </a:solidFill>
               </a:rPr>
-              <a:t>17. Limitations &amp; Future Work</a:t>
+              <a:t>17. Benchmark — The Workflow in the App</a:t>
             </a:r>
           </a:p>
         </p:txBody>
@@ -6094,8 +6751,8 @@
         </p:nvSpPr>
         <p:spPr>
           <a:xfrm>
-            <a:off x="640080" y="1234440"/>
-            <a:ext cx="10911535" cy="5257800"/>
+            <a:off x="640080" y="1188720"/>
+            <a:ext cx="10911535" cy="5349240"/>
           </a:xfrm>
           <a:prstGeom prst="rect">
             <a:avLst/>
@@ -6110,116 +6767,116 @@
           <a:p>
             <a:pPr>
               <a:spcAft>
-                <a:spcPts val="800"/>
-              </a:spcAft>
-            </a:pPr>
-            <a:r>
-              <a:rPr sz="1700" b="1" i="0">
+                <a:spcPts val="900"/>
+              </a:spcAft>
+            </a:pPr>
+            <a:r>
+              <a:rPr sz="1650" b="1" i="0">
                 <a:solidFill>
                   <a:srgbClr val="1E3A5F"/>
                 </a:solidFill>
               </a:rPr>
-              <a:t>• Limitation: </a:t>
-            </a:r>
-            <a:r>
-              <a:rPr sz="1700" b="0" i="0">
+              <a:t>• 1 · Generate: </a:t>
+            </a:r>
+            <a:r>
+              <a:rPr sz="1650" b="0" i="0">
                 <a:solidFill>
                   <a:srgbClr val="444444"/>
                 </a:solidFill>
               </a:rPr>
-              <a:t>English/French retrieval lags Arabic (~40% vs 72%).</a:t>
-            </a:r>
-          </a:p>
-          <a:p>
-            <a:pPr>
-              <a:spcAft>
-                <a:spcPts val="800"/>
-              </a:spcAft>
-            </a:pPr>
-            <a:r>
-              <a:rPr sz="1700" b="1" i="0">
+              <a:t>set the number of questions; the generator produces grounded questions, shown 10 per page.</a:t>
+            </a:r>
+          </a:p>
+          <a:p>
+            <a:pPr>
+              <a:spcAft>
+                <a:spcPts val="900"/>
+              </a:spcAft>
+            </a:pPr>
+            <a:r>
+              <a:rPr sz="1650" b="1" i="0">
                 <a:solidFill>
                   <a:srgbClr val="1E3A5F"/>
                 </a:solidFill>
               </a:rPr>
-              <a:t>• Scope: </a:t>
-            </a:r>
-            <a:r>
-              <a:rPr sz="1700" b="0" i="0">
+              <a:t>• 2 · Reference: </a:t>
+            </a:r>
+            <a:r>
+              <a:rPr sz="1650" b="0" i="0">
                 <a:solidFill>
                   <a:srgbClr val="444444"/>
                 </a:solidFill>
               </a:rPr>
-              <a:t>corpus is criminal (Penal) law only; single-article gold is strict for multi-article questions.</a:t>
-            </a:r>
-          </a:p>
-          <a:p>
-            <a:pPr>
-              <a:spcAft>
-                <a:spcPts val="800"/>
-              </a:spcAft>
-            </a:pPr>
-            <a:r>
-              <a:rPr sz="1700" b="1" i="0">
+              <a:t>review them, then type the source-of-truth answer in the editable table (required).</a:t>
+            </a:r>
+          </a:p>
+          <a:p>
+            <a:pPr>
+              <a:spcAft>
+                <a:spcPts val="900"/>
+              </a:spcAft>
+            </a:pPr>
+            <a:r>
+              <a:rPr sz="1650" b="1" i="0">
                 <a:solidFill>
                   <a:srgbClr val="1E3A5F"/>
                 </a:solidFill>
               </a:rPr>
-              <a:t>• Next — retrieval: </a:t>
-            </a:r>
-            <a:r>
-              <a:rPr sz="1700" b="0" i="0">
+              <a:t>• 3 · Select: </a:t>
+            </a:r>
+            <a:r>
+              <a:rPr sz="1650" b="0" i="0">
                 <a:solidFill>
                   <a:srgbClr val="444444"/>
                 </a:solidFill>
               </a:rPr>
-              <a:t>evaluate the built-in cross-lingual translation; test stronger multilingual embeddings.</a:t>
-            </a:r>
-          </a:p>
-          <a:p>
-            <a:pPr>
-              <a:spcAft>
-                <a:spcPts val="800"/>
-              </a:spcAft>
-            </a:pPr>
-            <a:r>
-              <a:rPr sz="1700" b="1" i="0">
+              <a:t>choose systems — Multi-Agent vs Single-Agent vs No-RAG.</a:t>
+            </a:r>
+          </a:p>
+          <a:p>
+            <a:pPr>
+              <a:spcAft>
+                <a:spcPts val="900"/>
+              </a:spcAft>
+            </a:pPr>
+            <a:r>
+              <a:rPr sz="1650" b="1" i="0">
                 <a:solidFill>
                   <a:srgbClr val="1E3A5F"/>
                 </a:solidFill>
               </a:rPr>
-              <a:t>• Next — corpus &amp; rigor: </a:t>
-            </a:r>
-            <a:r>
-              <a:rPr sz="1700" b="0" i="0">
+              <a:t>• 4 · Run: </a:t>
+            </a:r>
+            <a:r>
+              <a:rPr sz="1650" b="0" i="0">
                 <a:solidFill>
                   <a:srgbClr val="444444"/>
                 </a:solidFill>
               </a:rPr>
-              <a:t>add contract law + French texts (pipeline supports it); expert (human) validation.</a:t>
-            </a:r>
-          </a:p>
-          <a:p>
-            <a:pPr>
-              <a:spcAft>
-                <a:spcPts val="800"/>
-              </a:spcAft>
-            </a:pPr>
-            <a:r>
-              <a:rPr sz="1700" b="1" i="0">
+              <a:t>each system answers; the judge scores every answer against the reference.</a:t>
+            </a:r>
+          </a:p>
+          <a:p>
+            <a:pPr>
+              <a:spcAft>
+                <a:spcPts val="900"/>
+              </a:spcAft>
+            </a:pPr>
+            <a:r>
+              <a:rPr sz="1650" b="1" i="0">
                 <a:solidFill>
                   <a:srgbClr val="1E3A5F"/>
                 </a:solidFill>
               </a:rPr>
-              <a:t>• Next — agents &amp; eval: </a:t>
-            </a:r>
-            <a:r>
-              <a:rPr sz="1700" b="0" i="0">
+              <a:t>• 5 · Results: </a:t>
+            </a:r>
+            <a:r>
+              <a:rPr sz="1650" b="0" i="0">
                 <a:solidFill>
                   <a:srgbClr val="444444"/>
                 </a:solidFill>
               </a:rPr>
-              <a:t>structured reasoning, a verifier agent, and a full statistical comparison run.</a:t>
+              <a:t>per-system scores, per-dimension table, charts, citation metrics, and downloadable JSON.</a:t>
             </a:r>
           </a:p>
         </p:txBody>
@@ -6251,7 +6908,7 @@
         <p:spPr>
           <a:xfrm>
             <a:off x="0" y="0"/>
-            <a:ext cx="12191695" cy="6858000"/>
+            <a:ext cx="12191695" cy="960120"/>
           </a:xfrm>
           <a:prstGeom prst="rect">
             <a:avLst/>
@@ -6288,6 +6945,1150 @@
       </p:sp>
       <p:sp>
         <p:nvSpPr>
+          <p:cNvPr id="3" name="TextBox 2"/>
+          <p:cNvSpPr txBox="1"/>
+          <p:nvPr/>
+        </p:nvSpPr>
+        <p:spPr>
+          <a:xfrm>
+            <a:off x="457200" y="73152"/>
+            <a:ext cx="11277295" cy="822960"/>
+          </a:xfrm>
+          <a:prstGeom prst="rect">
+            <a:avLst/>
+          </a:prstGeom>
+          <a:noFill/>
+        </p:spPr>
+        <p:txBody>
+          <a:bodyPr wrap="square">
+            <a:spAutoFit/>
+          </a:bodyPr>
+          <a:lstStyle/>
+          <a:p>
+            <a:r>
+              <a:rPr sz="2700" b="1" i="0">
+                <a:solidFill>
+                  <a:srgbClr val="FFFFFF"/>
+                </a:solidFill>
+              </a:rPr>
+              <a:t>18. Results — Accuracy by Language</a:t>
+            </a:r>
+          </a:p>
+        </p:txBody>
+      </p:sp>
+      <p:pic>
+        <p:nvPicPr>
+          <p:cNvPr id="4" name="Picture 3" descr="fig_languages.png"/>
+          <p:cNvPicPr>
+            <a:picLocks noChangeAspect="1"/>
+          </p:cNvPicPr>
+          <p:nvPr/>
+        </p:nvPicPr>
+        <p:blipFill>
+          <a:blip r:embed="rId2"/>
+          <a:stretch>
+            <a:fillRect/>
+          </a:stretch>
+        </p:blipFill>
+        <p:spPr>
+          <a:xfrm>
+            <a:off x="548640" y="1280160"/>
+            <a:ext cx="7040209" cy="4297680"/>
+          </a:xfrm>
+          <a:prstGeom prst="rect">
+            <a:avLst/>
+          </a:prstGeom>
+        </p:spPr>
+      </p:pic>
+      <p:sp>
+        <p:nvSpPr>
+          <p:cNvPr id="5" name="TextBox 4"/>
+          <p:cNvSpPr txBox="1"/>
+          <p:nvPr/>
+        </p:nvSpPr>
+        <p:spPr>
+          <a:xfrm>
+            <a:off x="6858000" y="1645920"/>
+            <a:ext cx="4846320" cy="4297680"/>
+          </a:xfrm>
+          <a:prstGeom prst="rect">
+            <a:avLst/>
+          </a:prstGeom>
+          <a:noFill/>
+        </p:spPr>
+        <p:txBody>
+          <a:bodyPr wrap="square">
+            <a:spAutoFit/>
+          </a:bodyPr>
+          <a:lstStyle/>
+          <a:p>
+            <a:pPr>
+              <a:spcAft>
+                <a:spcPts val="1300"/>
+              </a:spcAft>
+            </a:pPr>
+            <a:r>
+              <a:rPr sz="1700" b="1" i="0">
+                <a:solidFill>
+                  <a:srgbClr val="1E3A5F"/>
+                </a:solidFill>
+              </a:rPr>
+              <a:t>• Arabic (primary legal language): </a:t>
+            </a:r>
+            <a:r>
+              <a:rPr sz="1700" b="0" i="0">
+                <a:solidFill>
+                  <a:srgbClr val="444444"/>
+                </a:solidFill>
+              </a:rPr>
+              <a:t>72% of correct articles in the top 5, 81% in the top 10.</a:t>
+            </a:r>
+          </a:p>
+          <a:p>
+            <a:pPr>
+              <a:spcAft>
+                <a:spcPts val="1300"/>
+              </a:spcAft>
+            </a:pPr>
+            <a:r>
+              <a:rPr sz="1700" b="1" i="0">
+                <a:solidFill>
+                  <a:srgbClr val="1E3A5F"/>
+                </a:solidFill>
+              </a:rPr>
+              <a:t>• English / French: </a:t>
+            </a:r>
+            <a:r>
+              <a:rPr sz="1700" b="0" i="0">
+                <a:solidFill>
+                  <a:srgbClr val="444444"/>
+                </a:solidFill>
+              </a:rPr>
+              <a:t>lower — the corpus is Arabic-primary; closing this is the main next step.</a:t>
+            </a:r>
+          </a:p>
+          <a:p>
+            <a:pPr>
+              <a:spcAft>
+                <a:spcPts val="800"/>
+              </a:spcAft>
+            </a:pPr>
+            <a:r>
+              <a:rPr sz="1500" b="1" i="0">
+                <a:solidFill>
+                  <a:srgbClr val="1E3A5F"/>
+                </a:solidFill>
+              </a:rPr>
+              <a:t>• Note: </a:t>
+            </a:r>
+            <a:r>
+              <a:rPr sz="1500" b="0" i="0">
+                <a:solidFill>
+                  <a:srgbClr val="444444"/>
+                </a:solidFill>
+              </a:rPr>
+              <a:t>the article-number metric fairly credits cross-lingual matches.</a:t>
+            </a:r>
+          </a:p>
+        </p:txBody>
+      </p:sp>
+    </p:spTree>
+  </p:cSld>
+  <p:clrMapOvr>
+    <a:masterClrMapping/>
+  </p:clrMapOvr>
+</p:sld>
+</file>
+
+<file path=ppt/slides/slide22.xml><?xml version="1.0" encoding="utf-8"?>
+<p:sld xmlns:a="http://schemas.openxmlformats.org/drawingml/2006/main" xmlns:p="http://schemas.openxmlformats.org/presentationml/2006/main" xmlns:r="http://schemas.openxmlformats.org/officeDocument/2006/relationships">
+  <p:cSld>
+    <p:spTree>
+      <p:nvGrpSpPr>
+        <p:cNvPr id="1" name=""/>
+        <p:cNvGrpSpPr/>
+        <p:nvPr/>
+      </p:nvGrpSpPr>
+      <p:grpSpPr/>
+      <p:sp>
+        <p:nvSpPr>
+          <p:cNvPr id="2" name="Rectangle 1"/>
+          <p:cNvSpPr/>
+          <p:nvPr/>
+        </p:nvSpPr>
+        <p:spPr>
+          <a:xfrm>
+            <a:off x="0" y="0"/>
+            <a:ext cx="12191695" cy="960120"/>
+          </a:xfrm>
+          <a:prstGeom prst="rect">
+            <a:avLst/>
+          </a:prstGeom>
+          <a:solidFill>
+            <a:srgbClr val="1E3A5F"/>
+          </a:solidFill>
+          <a:ln>
+            <a:noFill/>
+          </a:ln>
+          <a:effectLst/>
+        </p:spPr>
+        <p:style>
+          <a:lnRef idx="1">
+            <a:schemeClr val="accent1"/>
+          </a:lnRef>
+          <a:fillRef idx="3">
+            <a:schemeClr val="accent1"/>
+          </a:fillRef>
+          <a:effectRef idx="2">
+            <a:schemeClr val="accent1"/>
+          </a:effectRef>
+          <a:fontRef idx="minor">
+            <a:schemeClr val="lt1"/>
+          </a:fontRef>
+        </p:style>
+        <p:txBody>
+          <a:bodyPr rtlCol="0" anchor="ctr"/>
+          <a:lstStyle/>
+          <a:p>
+            <a:pPr algn="ctr"/>
+          </a:p>
+        </p:txBody>
+      </p:sp>
+      <p:sp>
+        <p:nvSpPr>
+          <p:cNvPr id="3" name="TextBox 2"/>
+          <p:cNvSpPr txBox="1"/>
+          <p:nvPr/>
+        </p:nvSpPr>
+        <p:spPr>
+          <a:xfrm>
+            <a:off x="457200" y="73152"/>
+            <a:ext cx="11277295" cy="822960"/>
+          </a:xfrm>
+          <a:prstGeom prst="rect">
+            <a:avLst/>
+          </a:prstGeom>
+          <a:noFill/>
+        </p:spPr>
+        <p:txBody>
+          <a:bodyPr wrap="square">
+            <a:spAutoFit/>
+          </a:bodyPr>
+          <a:lstStyle/>
+          <a:p>
+            <a:r>
+              <a:rPr sz="2700" b="1" i="0">
+                <a:solidFill>
+                  <a:srgbClr val="FFFFFF"/>
+                </a:solidFill>
+              </a:rPr>
+              <a:t>19. Results — Search Method &amp; Answer Quality</a:t>
+            </a:r>
+          </a:p>
+        </p:txBody>
+      </p:sp>
+      <p:pic>
+        <p:nvPicPr>
+          <p:cNvPr id="4" name="Picture 3" descr="fig_methods.png"/>
+          <p:cNvPicPr>
+            <a:picLocks noChangeAspect="1"/>
+          </p:cNvPicPr>
+          <p:nvPr/>
+        </p:nvPicPr>
+        <p:blipFill>
+          <a:blip r:embed="rId2"/>
+          <a:stretch>
+            <a:fillRect/>
+          </a:stretch>
+        </p:blipFill>
+        <p:spPr>
+          <a:xfrm>
+            <a:off x="548640" y="1280160"/>
+            <a:ext cx="7104787" cy="4206240"/>
+          </a:xfrm>
+          <a:prstGeom prst="rect">
+            <a:avLst/>
+          </a:prstGeom>
+        </p:spPr>
+      </p:pic>
+      <p:sp>
+        <p:nvSpPr>
+          <p:cNvPr id="5" name="TextBox 4"/>
+          <p:cNvSpPr txBox="1"/>
+          <p:nvPr/>
+        </p:nvSpPr>
+        <p:spPr>
+          <a:xfrm>
+            <a:off x="6858000" y="1645920"/>
+            <a:ext cx="4846320" cy="4297680"/>
+          </a:xfrm>
+          <a:prstGeom prst="rect">
+            <a:avLst/>
+          </a:prstGeom>
+          <a:noFill/>
+        </p:spPr>
+        <p:txBody>
+          <a:bodyPr wrap="square">
+            <a:spAutoFit/>
+          </a:bodyPr>
+          <a:lstStyle/>
+          <a:p>
+            <a:pPr>
+              <a:spcAft>
+                <a:spcPts val="1300"/>
+              </a:spcAft>
+            </a:pPr>
+            <a:r>
+              <a:rPr sz="1700" b="1" i="0">
+                <a:solidFill>
+                  <a:srgbClr val="1E3A5F"/>
+                </a:solidFill>
+              </a:rPr>
+              <a:t>• Best method: </a:t>
+            </a:r>
+            <a:r>
+              <a:rPr sz="1700" b="0" i="0">
+                <a:solidFill>
+                  <a:srgbClr val="444444"/>
+                </a:solidFill>
+              </a:rPr>
+              <a:t>hybrid (keyword + meaning) finds the correct law most often — chosen default.</a:t>
+            </a:r>
+          </a:p>
+          <a:p>
+            <a:pPr>
+              <a:spcAft>
+                <a:spcPts val="1300"/>
+              </a:spcAft>
+            </a:pPr>
+            <a:r>
+              <a:rPr sz="1700" b="1" i="0">
+                <a:solidFill>
+                  <a:srgbClr val="1E3A5F"/>
+                </a:solidFill>
+              </a:rPr>
+              <a:t>• Rejected by data: </a:t>
+            </a:r>
+            <a:r>
+              <a:rPr sz="1700" b="0" i="0">
+                <a:solidFill>
+                  <a:srgbClr val="444444"/>
+                </a:solidFill>
+              </a:rPr>
+              <a:t>a popular English re-ranker made results worse and was removed.</a:t>
+            </a:r>
+          </a:p>
+          <a:p>
+            <a:pPr>
+              <a:spcAft>
+                <a:spcPts val="1300"/>
+              </a:spcAft>
+            </a:pPr>
+            <a:r>
+              <a:rPr sz="1700" b="1" i="0">
+                <a:solidFill>
+                  <a:srgbClr val="1E3A5F"/>
+                </a:solidFill>
+              </a:rPr>
+              <a:t>• Answer quality: </a:t>
+            </a:r>
+            <a:r>
+              <a:rPr sz="1700" b="0" i="0">
+                <a:solidFill>
+                  <a:srgbClr val="444444"/>
+                </a:solidFill>
+              </a:rPr>
+              <a:t>final memoranda rated ~4.6/5 for legal quality by the judge.</a:t>
+            </a:r>
+          </a:p>
+          <a:p>
+            <a:pPr>
+              <a:spcAft>
+                <a:spcPts val="1300"/>
+              </a:spcAft>
+            </a:pPr>
+            <a:r>
+              <a:rPr sz="1700" b="1" i="0">
+                <a:solidFill>
+                  <a:srgbClr val="1E3A5F"/>
+                </a:solidFill>
+              </a:rPr>
+              <a:t>• Practical: </a:t>
+            </a:r>
+            <a:r>
+              <a:rPr sz="1700" b="0" i="0">
+                <a:solidFill>
+                  <a:srgbClr val="444444"/>
+                </a:solidFill>
+              </a:rPr>
+              <a:t>~2–3 minutes, ~$0.12 per full answer.</a:t>
+            </a:r>
+          </a:p>
+        </p:txBody>
+      </p:sp>
+    </p:spTree>
+  </p:cSld>
+  <p:clrMapOvr>
+    <a:masterClrMapping/>
+  </p:clrMapOvr>
+</p:sld>
+</file>
+
+<file path=ppt/slides/slide23.xml><?xml version="1.0" encoding="utf-8"?>
+<p:sld xmlns:a="http://schemas.openxmlformats.org/drawingml/2006/main" xmlns:p="http://schemas.openxmlformats.org/presentationml/2006/main" xmlns:r="http://schemas.openxmlformats.org/officeDocument/2006/relationships">
+  <p:cSld>
+    <p:spTree>
+      <p:nvGrpSpPr>
+        <p:cNvPr id="1" name=""/>
+        <p:cNvGrpSpPr/>
+        <p:nvPr/>
+      </p:nvGrpSpPr>
+      <p:grpSpPr/>
+      <p:sp>
+        <p:nvSpPr>
+          <p:cNvPr id="2" name="Rectangle 1"/>
+          <p:cNvSpPr/>
+          <p:nvPr/>
+        </p:nvSpPr>
+        <p:spPr>
+          <a:xfrm>
+            <a:off x="0" y="0"/>
+            <a:ext cx="12191695" cy="960120"/>
+          </a:xfrm>
+          <a:prstGeom prst="rect">
+            <a:avLst/>
+          </a:prstGeom>
+          <a:solidFill>
+            <a:srgbClr val="1E3A5F"/>
+          </a:solidFill>
+          <a:ln>
+            <a:noFill/>
+          </a:ln>
+          <a:effectLst/>
+        </p:spPr>
+        <p:style>
+          <a:lnRef idx="1">
+            <a:schemeClr val="accent1"/>
+          </a:lnRef>
+          <a:fillRef idx="3">
+            <a:schemeClr val="accent1"/>
+          </a:fillRef>
+          <a:effectRef idx="2">
+            <a:schemeClr val="accent1"/>
+          </a:effectRef>
+          <a:fontRef idx="minor">
+            <a:schemeClr val="lt1"/>
+          </a:fontRef>
+        </p:style>
+        <p:txBody>
+          <a:bodyPr rtlCol="0" anchor="ctr"/>
+          <a:lstStyle/>
+          <a:p>
+            <a:pPr algn="ctr"/>
+          </a:p>
+        </p:txBody>
+      </p:sp>
+      <p:sp>
+        <p:nvSpPr>
+          <p:cNvPr id="3" name="TextBox 2"/>
+          <p:cNvSpPr txBox="1"/>
+          <p:nvPr/>
+        </p:nvSpPr>
+        <p:spPr>
+          <a:xfrm>
+            <a:off x="457200" y="73152"/>
+            <a:ext cx="11277295" cy="822960"/>
+          </a:xfrm>
+          <a:prstGeom prst="rect">
+            <a:avLst/>
+          </a:prstGeom>
+          <a:noFill/>
+        </p:spPr>
+        <p:txBody>
+          <a:bodyPr wrap="square">
+            <a:spAutoFit/>
+          </a:bodyPr>
+          <a:lstStyle/>
+          <a:p>
+            <a:r>
+              <a:rPr sz="2700" b="1" i="0">
+                <a:solidFill>
+                  <a:srgbClr val="FFFFFF"/>
+                </a:solidFill>
+              </a:rPr>
+              <a:t>20. Key Findings</a:t>
+            </a:r>
+          </a:p>
+        </p:txBody>
+      </p:sp>
+      <p:sp>
+        <p:nvSpPr>
+          <p:cNvPr id="4" name="TextBox 3"/>
+          <p:cNvSpPr txBox="1"/>
+          <p:nvPr/>
+        </p:nvSpPr>
+        <p:spPr>
+          <a:xfrm>
+            <a:off x="640080" y="1188720"/>
+            <a:ext cx="10911535" cy="5349240"/>
+          </a:xfrm>
+          <a:prstGeom prst="rect">
+            <a:avLst/>
+          </a:prstGeom>
+          <a:noFill/>
+        </p:spPr>
+        <p:txBody>
+          <a:bodyPr wrap="square">
+            <a:spAutoFit/>
+          </a:bodyPr>
+          <a:lstStyle/>
+          <a:p>
+            <a:pPr>
+              <a:spcAft>
+                <a:spcPts val="800"/>
+              </a:spcAft>
+            </a:pPr>
+            <a:r>
+              <a:rPr sz="1700" b="1" i="0">
+                <a:solidFill>
+                  <a:srgbClr val="1E3A5F"/>
+                </a:solidFill>
+              </a:rPr>
+              <a:t>• Multi-agent works: </a:t>
+            </a:r>
+            <a:r>
+              <a:rPr sz="1700" b="0" i="0">
+                <a:solidFill>
+                  <a:srgbClr val="444444"/>
+                </a:solidFill>
+              </a:rPr>
+              <a:t>specialised agents produce grounded, well-structured answers (~4.6/5).</a:t>
+            </a:r>
+          </a:p>
+          <a:p>
+            <a:pPr>
+              <a:spcAft>
+                <a:spcPts val="800"/>
+              </a:spcAft>
+            </a:pPr>
+            <a:r>
+              <a:rPr sz="1700" b="1" i="0">
+                <a:solidFill>
+                  <a:srgbClr val="1E3A5F"/>
+                </a:solidFill>
+              </a:rPr>
+              <a:t>• Evidence-based engineering: </a:t>
+            </a:r>
+            <a:r>
+              <a:rPr sz="1700" b="0" i="0">
+                <a:solidFill>
+                  <a:srgbClr val="444444"/>
+                </a:solidFill>
+              </a:rPr>
+              <a:t>hybrid &gt; semantic; the re-ranker hurts; the embedding is validated — all decided by the benchmark.</a:t>
+            </a:r>
+          </a:p>
+          <a:p>
+            <a:pPr>
+              <a:spcAft>
+                <a:spcPts val="800"/>
+              </a:spcAft>
+            </a:pPr>
+            <a:r>
+              <a:rPr sz="1700" b="1" i="0">
+                <a:solidFill>
+                  <a:srgbClr val="1E3A5F"/>
+                </a:solidFill>
+              </a:rPr>
+              <a:t>• Bottleneck identified: </a:t>
+            </a:r>
+            <a:r>
+              <a:rPr sz="1700" b="0" i="0">
+                <a:solidFill>
+                  <a:srgbClr val="444444"/>
+                </a:solidFill>
+              </a:rPr>
+              <a:t>answer quality is bounded by retrieval recall — if the article isn't found, it can't be cited.</a:t>
+            </a:r>
+          </a:p>
+          <a:p>
+            <a:pPr>
+              <a:spcAft>
+                <a:spcPts val="800"/>
+              </a:spcAft>
+            </a:pPr>
+            <a:r>
+              <a:rPr sz="1700" b="1" i="0">
+                <a:solidFill>
+                  <a:srgbClr val="1E3A5F"/>
+                </a:solidFill>
+              </a:rPr>
+              <a:t>• Precision fix, measured: </a:t>
+            </a:r>
+            <a:r>
+              <a:rPr sz="1700" b="0" i="0">
+                <a:solidFill>
+                  <a:srgbClr val="444444"/>
+                </a:solidFill>
+              </a:rPr>
+              <a:t>tightening citations raised citation-F1 ~3× (0.04 → 0.13) on the same questions.</a:t>
+            </a:r>
+          </a:p>
+        </p:txBody>
+      </p:sp>
+    </p:spTree>
+  </p:cSld>
+  <p:clrMapOvr>
+    <a:masterClrMapping/>
+  </p:clrMapOvr>
+</p:sld>
+</file>
+
+<file path=ppt/slides/slide24.xml><?xml version="1.0" encoding="utf-8"?>
+<p:sld xmlns:a="http://schemas.openxmlformats.org/drawingml/2006/main" xmlns:p="http://schemas.openxmlformats.org/presentationml/2006/main" xmlns:r="http://schemas.openxmlformats.org/officeDocument/2006/relationships">
+  <p:cSld>
+    <p:spTree>
+      <p:nvGrpSpPr>
+        <p:cNvPr id="1" name=""/>
+        <p:cNvGrpSpPr/>
+        <p:nvPr/>
+      </p:nvGrpSpPr>
+      <p:grpSpPr/>
+      <p:sp>
+        <p:nvSpPr>
+          <p:cNvPr id="2" name="Rectangle 1"/>
+          <p:cNvSpPr/>
+          <p:nvPr/>
+        </p:nvSpPr>
+        <p:spPr>
+          <a:xfrm>
+            <a:off x="0" y="0"/>
+            <a:ext cx="12191695" cy="960120"/>
+          </a:xfrm>
+          <a:prstGeom prst="rect">
+            <a:avLst/>
+          </a:prstGeom>
+          <a:solidFill>
+            <a:srgbClr val="1E3A5F"/>
+          </a:solidFill>
+          <a:ln>
+            <a:noFill/>
+          </a:ln>
+          <a:effectLst/>
+        </p:spPr>
+        <p:style>
+          <a:lnRef idx="1">
+            <a:schemeClr val="accent1"/>
+          </a:lnRef>
+          <a:fillRef idx="3">
+            <a:schemeClr val="accent1"/>
+          </a:fillRef>
+          <a:effectRef idx="2">
+            <a:schemeClr val="accent1"/>
+          </a:effectRef>
+          <a:fontRef idx="minor">
+            <a:schemeClr val="lt1"/>
+          </a:fontRef>
+        </p:style>
+        <p:txBody>
+          <a:bodyPr rtlCol="0" anchor="ctr"/>
+          <a:lstStyle/>
+          <a:p>
+            <a:pPr algn="ctr"/>
+          </a:p>
+        </p:txBody>
+      </p:sp>
+      <p:sp>
+        <p:nvSpPr>
+          <p:cNvPr id="3" name="TextBox 2"/>
+          <p:cNvSpPr txBox="1"/>
+          <p:nvPr/>
+        </p:nvSpPr>
+        <p:spPr>
+          <a:xfrm>
+            <a:off x="457200" y="73152"/>
+            <a:ext cx="11277295" cy="822960"/>
+          </a:xfrm>
+          <a:prstGeom prst="rect">
+            <a:avLst/>
+          </a:prstGeom>
+          <a:noFill/>
+        </p:spPr>
+        <p:txBody>
+          <a:bodyPr wrap="square">
+            <a:spAutoFit/>
+          </a:bodyPr>
+          <a:lstStyle/>
+          <a:p>
+            <a:r>
+              <a:rPr sz="2700" b="1" i="0">
+                <a:solidFill>
+                  <a:srgbClr val="FFFFFF"/>
+                </a:solidFill>
+              </a:rPr>
+              <a:t>21. Engineering &amp; Reproducibility</a:t>
+            </a:r>
+          </a:p>
+        </p:txBody>
+      </p:sp>
+      <p:sp>
+        <p:nvSpPr>
+          <p:cNvPr id="4" name="TextBox 3"/>
+          <p:cNvSpPr txBox="1"/>
+          <p:nvPr/>
+        </p:nvSpPr>
+        <p:spPr>
+          <a:xfrm>
+            <a:off x="640080" y="1188720"/>
+            <a:ext cx="10911535" cy="5349240"/>
+          </a:xfrm>
+          <a:prstGeom prst="rect">
+            <a:avLst/>
+          </a:prstGeom>
+          <a:noFill/>
+        </p:spPr>
+        <p:txBody>
+          <a:bodyPr wrap="square">
+            <a:spAutoFit/>
+          </a:bodyPr>
+          <a:lstStyle/>
+          <a:p>
+            <a:pPr>
+              <a:spcAft>
+                <a:spcPts val="900"/>
+              </a:spcAft>
+            </a:pPr>
+            <a:r>
+              <a:rPr sz="1650" b="1" i="0">
+                <a:solidFill>
+                  <a:srgbClr val="1E3A5F"/>
+                </a:solidFill>
+              </a:rPr>
+              <a:t>• Standardised model: </a:t>
+            </a:r>
+            <a:r>
+              <a:rPr sz="1650" b="0" i="0">
+                <a:solidFill>
+                  <a:srgbClr val="444444"/>
+                </a:solidFill>
+              </a:rPr>
+              <a:t>Claude Sonnet 4.5 (selectable: 4.6 / Opus / Haiku).</a:t>
+            </a:r>
+          </a:p>
+          <a:p>
+            <a:pPr>
+              <a:spcAft>
+                <a:spcPts val="900"/>
+              </a:spcAft>
+            </a:pPr>
+            <a:r>
+              <a:rPr sz="1650" b="1" i="0">
+                <a:solidFill>
+                  <a:srgbClr val="1E3A5F"/>
+                </a:solidFill>
+              </a:rPr>
+              <a:t>• Headless pipeline: </a:t>
+            </a:r>
+            <a:r>
+              <a:rPr sz="1650" b="0" i="0">
+                <a:solidFill>
+                  <a:srgbClr val="444444"/>
+                </a:solidFill>
+              </a:rPr>
+              <a:t>the full system runs without the UI for batch evaluation.</a:t>
+            </a:r>
+          </a:p>
+          <a:p>
+            <a:pPr>
+              <a:spcAft>
+                <a:spcPts val="900"/>
+              </a:spcAft>
+            </a:pPr>
+            <a:r>
+              <a:rPr sz="1650" b="1" i="0">
+                <a:solidFill>
+                  <a:srgbClr val="1E3A5F"/>
+                </a:solidFill>
+              </a:rPr>
+              <a:t>• Tests + CI: </a:t>
+            </a:r>
+            <a:r>
+              <a:rPr sz="1650" b="0" i="0">
+                <a:solidFill>
+                  <a:srgbClr val="444444"/>
+                </a:solidFill>
+              </a:rPr>
+              <a:t>unit tests and GitHub Actions run automatically on every change.</a:t>
+            </a:r>
+          </a:p>
+          <a:p>
+            <a:pPr>
+              <a:spcAft>
+                <a:spcPts val="900"/>
+              </a:spcAft>
+            </a:pPr>
+            <a:r>
+              <a:rPr sz="1650" b="1" i="0">
+                <a:solidFill>
+                  <a:srgbClr val="1E3A5F"/>
+                </a:solidFill>
+              </a:rPr>
+              <a:t>• Telemetry: </a:t>
+            </a:r>
+            <a:r>
+              <a:rPr sz="1650" b="0" i="0">
+                <a:solidFill>
+                  <a:srgbClr val="444444"/>
+                </a:solidFill>
+              </a:rPr>
+              <a:t>tokens, cost, and latency tracked per agent.</a:t>
+            </a:r>
+          </a:p>
+          <a:p>
+            <a:pPr>
+              <a:spcAft>
+                <a:spcPts val="900"/>
+              </a:spcAft>
+            </a:pPr>
+            <a:r>
+              <a:rPr sz="1650" b="1" i="0">
+                <a:solidFill>
+                  <a:srgbClr val="1E3A5F"/>
+                </a:solidFill>
+              </a:rPr>
+              <a:t>• Reproducible: </a:t>
+            </a:r>
+            <a:r>
+              <a:rPr sz="1650" b="0" i="0">
+                <a:solidFill>
+                  <a:srgbClr val="444444"/>
+                </a:solidFill>
+              </a:rPr>
+              <a:t>one command rebuilds the index; the benchmark is regenerable.</a:t>
+            </a:r>
+          </a:p>
+          <a:p>
+            <a:pPr>
+              <a:spcAft>
+                <a:spcPts val="900"/>
+              </a:spcAft>
+            </a:pPr>
+            <a:r>
+              <a:rPr sz="1650" b="1" i="0">
+                <a:solidFill>
+                  <a:srgbClr val="1E3A5F"/>
+                </a:solidFill>
+              </a:rPr>
+              <a:t>• Version-controlled: </a:t>
+            </a:r>
+            <a:r>
+              <a:rPr sz="1650" b="0" i="0">
+                <a:solidFill>
+                  <a:srgbClr val="444444"/>
+                </a:solidFill>
+              </a:rPr>
+              <a:t>all work committed and pushed to GitHub.</a:t>
+            </a:r>
+          </a:p>
+        </p:txBody>
+      </p:sp>
+    </p:spTree>
+  </p:cSld>
+  <p:clrMapOvr>
+    <a:masterClrMapping/>
+  </p:clrMapOvr>
+</p:sld>
+</file>
+
+<file path=ppt/slides/slide25.xml><?xml version="1.0" encoding="utf-8"?>
+<p:sld xmlns:a="http://schemas.openxmlformats.org/drawingml/2006/main" xmlns:p="http://schemas.openxmlformats.org/presentationml/2006/main" xmlns:r="http://schemas.openxmlformats.org/officeDocument/2006/relationships">
+  <p:cSld>
+    <p:spTree>
+      <p:nvGrpSpPr>
+        <p:cNvPr id="1" name=""/>
+        <p:cNvGrpSpPr/>
+        <p:nvPr/>
+      </p:nvGrpSpPr>
+      <p:grpSpPr/>
+      <p:sp>
+        <p:nvSpPr>
+          <p:cNvPr id="2" name="Rectangle 1"/>
+          <p:cNvSpPr/>
+          <p:nvPr/>
+        </p:nvSpPr>
+        <p:spPr>
+          <a:xfrm>
+            <a:off x="0" y="0"/>
+            <a:ext cx="12191695" cy="960120"/>
+          </a:xfrm>
+          <a:prstGeom prst="rect">
+            <a:avLst/>
+          </a:prstGeom>
+          <a:solidFill>
+            <a:srgbClr val="1E3A5F"/>
+          </a:solidFill>
+          <a:ln>
+            <a:noFill/>
+          </a:ln>
+          <a:effectLst/>
+        </p:spPr>
+        <p:style>
+          <a:lnRef idx="1">
+            <a:schemeClr val="accent1"/>
+          </a:lnRef>
+          <a:fillRef idx="3">
+            <a:schemeClr val="accent1"/>
+          </a:fillRef>
+          <a:effectRef idx="2">
+            <a:schemeClr val="accent1"/>
+          </a:effectRef>
+          <a:fontRef idx="minor">
+            <a:schemeClr val="lt1"/>
+          </a:fontRef>
+        </p:style>
+        <p:txBody>
+          <a:bodyPr rtlCol="0" anchor="ctr"/>
+          <a:lstStyle/>
+          <a:p>
+            <a:pPr algn="ctr"/>
+          </a:p>
+        </p:txBody>
+      </p:sp>
+      <p:sp>
+        <p:nvSpPr>
+          <p:cNvPr id="3" name="TextBox 2"/>
+          <p:cNvSpPr txBox="1"/>
+          <p:nvPr/>
+        </p:nvSpPr>
+        <p:spPr>
+          <a:xfrm>
+            <a:off x="457200" y="73152"/>
+            <a:ext cx="11277295" cy="822960"/>
+          </a:xfrm>
+          <a:prstGeom prst="rect">
+            <a:avLst/>
+          </a:prstGeom>
+          <a:noFill/>
+        </p:spPr>
+        <p:txBody>
+          <a:bodyPr wrap="square">
+            <a:spAutoFit/>
+          </a:bodyPr>
+          <a:lstStyle/>
+          <a:p>
+            <a:r>
+              <a:rPr sz="2700" b="1" i="0">
+                <a:solidFill>
+                  <a:srgbClr val="FFFFFF"/>
+                </a:solidFill>
+              </a:rPr>
+              <a:t>22. Limitations &amp; Future Work</a:t>
+            </a:r>
+          </a:p>
+        </p:txBody>
+      </p:sp>
+      <p:sp>
+        <p:nvSpPr>
+          <p:cNvPr id="4" name="TextBox 3"/>
+          <p:cNvSpPr txBox="1"/>
+          <p:nvPr/>
+        </p:nvSpPr>
+        <p:spPr>
+          <a:xfrm>
+            <a:off x="640080" y="1188720"/>
+            <a:ext cx="10911535" cy="5349240"/>
+          </a:xfrm>
+          <a:prstGeom prst="rect">
+            <a:avLst/>
+          </a:prstGeom>
+          <a:noFill/>
+        </p:spPr>
+        <p:txBody>
+          <a:bodyPr wrap="square">
+            <a:spAutoFit/>
+          </a:bodyPr>
+          <a:lstStyle/>
+          <a:p>
+            <a:pPr>
+              <a:spcAft>
+                <a:spcPts val="800"/>
+              </a:spcAft>
+            </a:pPr>
+            <a:r>
+              <a:rPr sz="1700" b="1" i="0">
+                <a:solidFill>
+                  <a:srgbClr val="1E3A5F"/>
+                </a:solidFill>
+              </a:rPr>
+              <a:t>• Limitation: </a:t>
+            </a:r>
+            <a:r>
+              <a:rPr sz="1700" b="0" i="0">
+                <a:solidFill>
+                  <a:srgbClr val="444444"/>
+                </a:solidFill>
+              </a:rPr>
+              <a:t>English/French retrieval lags Arabic (~40% vs 72%).</a:t>
+            </a:r>
+          </a:p>
+          <a:p>
+            <a:pPr>
+              <a:spcAft>
+                <a:spcPts val="800"/>
+              </a:spcAft>
+            </a:pPr>
+            <a:r>
+              <a:rPr sz="1700" b="1" i="0">
+                <a:solidFill>
+                  <a:srgbClr val="1E3A5F"/>
+                </a:solidFill>
+              </a:rPr>
+              <a:t>• Scope: </a:t>
+            </a:r>
+            <a:r>
+              <a:rPr sz="1700" b="0" i="0">
+                <a:solidFill>
+                  <a:srgbClr val="444444"/>
+                </a:solidFill>
+              </a:rPr>
+              <a:t>corpus is criminal (Penal) law only; single-article gold is strict for multi-article questions.</a:t>
+            </a:r>
+          </a:p>
+          <a:p>
+            <a:pPr>
+              <a:spcAft>
+                <a:spcPts val="800"/>
+              </a:spcAft>
+            </a:pPr>
+            <a:r>
+              <a:rPr sz="1700" b="1" i="0">
+                <a:solidFill>
+                  <a:srgbClr val="1E3A5F"/>
+                </a:solidFill>
+              </a:rPr>
+              <a:t>• Next — retrieval: </a:t>
+            </a:r>
+            <a:r>
+              <a:rPr sz="1700" b="0" i="0">
+                <a:solidFill>
+                  <a:srgbClr val="444444"/>
+                </a:solidFill>
+              </a:rPr>
+              <a:t>evaluate the built-in cross-lingual translation; test stronger multilingual embeddings.</a:t>
+            </a:r>
+          </a:p>
+          <a:p>
+            <a:pPr>
+              <a:spcAft>
+                <a:spcPts val="800"/>
+              </a:spcAft>
+            </a:pPr>
+            <a:r>
+              <a:rPr sz="1700" b="1" i="0">
+                <a:solidFill>
+                  <a:srgbClr val="1E3A5F"/>
+                </a:solidFill>
+              </a:rPr>
+              <a:t>• Next — corpus &amp; rigor: </a:t>
+            </a:r>
+            <a:r>
+              <a:rPr sz="1700" b="0" i="0">
+                <a:solidFill>
+                  <a:srgbClr val="444444"/>
+                </a:solidFill>
+              </a:rPr>
+              <a:t>add contract law + French texts (pipeline supports it); collect expert reference answers at scale.</a:t>
+            </a:r>
+          </a:p>
+          <a:p>
+            <a:pPr>
+              <a:spcAft>
+                <a:spcPts val="800"/>
+              </a:spcAft>
+            </a:pPr>
+            <a:r>
+              <a:rPr sz="1700" b="1" i="0">
+                <a:solidFill>
+                  <a:srgbClr val="1E3A5F"/>
+                </a:solidFill>
+              </a:rPr>
+              <a:t>• Next — agents &amp; eval: </a:t>
+            </a:r>
+            <a:r>
+              <a:rPr sz="1700" b="0" i="0">
+                <a:solidFill>
+                  <a:srgbClr val="444444"/>
+                </a:solidFill>
+              </a:rPr>
+              <a:t>structured reasoning, a verifier agent, and a full statistical comparison run.</a:t>
+            </a:r>
+          </a:p>
+        </p:txBody>
+      </p:sp>
+    </p:spTree>
+  </p:cSld>
+  <p:clrMapOvr>
+    <a:masterClrMapping/>
+  </p:clrMapOvr>
+</p:sld>
+</file>
+
+<file path=ppt/slides/slide26.xml><?xml version="1.0" encoding="utf-8"?>
+<p:sld xmlns:a="http://schemas.openxmlformats.org/drawingml/2006/main" xmlns:p="http://schemas.openxmlformats.org/presentationml/2006/main" xmlns:r="http://schemas.openxmlformats.org/officeDocument/2006/relationships">
+  <p:cSld>
+    <p:spTree>
+      <p:nvGrpSpPr>
+        <p:cNvPr id="1" name=""/>
+        <p:cNvGrpSpPr/>
+        <p:nvPr/>
+      </p:nvGrpSpPr>
+      <p:grpSpPr/>
+      <p:sp>
+        <p:nvSpPr>
+          <p:cNvPr id="2" name="Rectangle 1"/>
+          <p:cNvSpPr/>
+          <p:nvPr/>
+        </p:nvSpPr>
+        <p:spPr>
+          <a:xfrm>
+            <a:off x="0" y="0"/>
+            <a:ext cx="12191695" cy="6858000"/>
+          </a:xfrm>
+          <a:prstGeom prst="rect">
+            <a:avLst/>
+          </a:prstGeom>
+          <a:solidFill>
+            <a:srgbClr val="1E3A5F"/>
+          </a:solidFill>
+          <a:ln>
+            <a:noFill/>
+          </a:ln>
+          <a:effectLst/>
+        </p:spPr>
+        <p:style>
+          <a:lnRef idx="1">
+            <a:schemeClr val="accent1"/>
+          </a:lnRef>
+          <a:fillRef idx="3">
+            <a:schemeClr val="accent1"/>
+          </a:fillRef>
+          <a:effectRef idx="2">
+            <a:schemeClr val="accent1"/>
+          </a:effectRef>
+          <a:fontRef idx="minor">
+            <a:schemeClr val="lt1"/>
+          </a:fontRef>
+        </p:style>
+        <p:txBody>
+          <a:bodyPr rtlCol="0" anchor="ctr"/>
+          <a:lstStyle/>
+          <a:p>
+            <a:pPr algn="ctr"/>
+          </a:p>
+        </p:txBody>
+      </p:sp>
+      <p:sp>
+        <p:nvSpPr>
           <p:cNvPr id="3" name="Rectangle 2"/>
           <p:cNvSpPr/>
           <p:nvPr/>
@@ -6358,7 +8159,7 @@
                   <a:srgbClr val="FFFFFF"/>
                 </a:solidFill>
               </a:rPr>
-              <a:t>18. Conclusion &amp; Contributions</a:t>
+              <a:t>23. Conclusion &amp; Contributions</a:t>
             </a:r>
           </a:p>
         </p:txBody>
@@ -6371,8 +8172,8 @@
         </p:nvSpPr>
         <p:spPr>
           <a:xfrm>
-            <a:off x="822960" y="1463040"/>
-            <a:ext cx="10545775" cy="4937760"/>
+            <a:off x="822960" y="1417320"/>
+            <a:ext cx="10545775" cy="5029200"/>
           </a:xfrm>
           <a:prstGeom prst="rect">
             <a:avLst/>
@@ -6388,11 +8189,11 @@
           <a:p>
             <a:pPr>
               <a:spcAft>
-                <a:spcPts val="1400"/>
-              </a:spcAft>
-            </a:pPr>
-            <a:r>
-              <a:rPr sz="1800" b="1" i="0">
+                <a:spcPts val="1200"/>
+              </a:spcAft>
+            </a:pPr>
+            <a:r>
+              <a:rPr sz="1700" b="1" i="0">
                 <a:solidFill>
                   <a:srgbClr val="0F9D58"/>
                 </a:solidFill>
@@ -6400,7 +8201,7 @@
               <a:t>✓ A working trilingual legal AI </a:t>
             </a:r>
             <a:r>
-              <a:rPr sz="1800" b="0" i="0">
+              <a:rPr sz="1700" b="0" i="0">
                 <a:solidFill>
                   <a:srgbClr val="FFFFFF"/>
                 </a:solidFill>
@@ -6411,11 +8212,11 @@
           <a:p>
             <a:pPr>
               <a:spcAft>
-                <a:spcPts val="1400"/>
-              </a:spcAft>
-            </a:pPr>
-            <a:r>
-              <a:rPr sz="1800" b="1" i="0">
+                <a:spcPts val="1200"/>
+              </a:spcAft>
+            </a:pPr>
+            <a:r>
+              <a:rPr sz="1700" b="1" i="0">
                 <a:solidFill>
                   <a:srgbClr val="0F9D58"/>
                 </a:solidFill>
@@ -6423,30 +8224,53 @@
               <a:t>✓ A rigorous benchmark </a:t>
             </a:r>
             <a:r>
-              <a:rPr sz="1800" b="0" i="0">
+              <a:rPr sz="1700" b="0" i="0">
                 <a:solidFill>
                   <a:srgbClr val="FFFFFF"/>
                 </a:solidFill>
               </a:rPr>
-              <a:t>of 196 grounded questions with validated gold answers and multi-metric scoring.</a:t>
-            </a:r>
-          </a:p>
-          <a:p>
-            <a:pPr>
-              <a:spcAft>
-                <a:spcPts val="1400"/>
-              </a:spcAft>
-            </a:pPr>
-            <a:r>
-              <a:rPr sz="1800" b="1" i="0">
+              <a:t>of grounded questions with validated gold answers and multi-metric scoring.</a:t>
+            </a:r>
+          </a:p>
+          <a:p>
+            <a:pPr>
+              <a:spcAft>
+                <a:spcPts val="1200"/>
+              </a:spcAft>
+            </a:pPr>
+            <a:r>
+              <a:rPr sz="1700" b="1" i="0">
                 <a:solidFill>
                   <a:srgbClr val="0F9D58"/>
                 </a:solidFill>
               </a:rPr>
+              <a:t>✓ Reference-based evaluation </a:t>
+            </a:r>
+            <a:r>
+              <a:rPr sz="1700" b="0" i="0">
+                <a:solidFill>
+                  <a:srgbClr val="FFFFFF"/>
+                </a:solidFill>
+              </a:rPr>
+              <a:t>— answers judged against a human source of truth, not the judge's opinion.</a:t>
+            </a:r>
+          </a:p>
+          <a:p>
+            <a:pPr>
+              <a:spcAft>
+                <a:spcPts val="1200"/>
+              </a:spcAft>
+            </a:pPr>
+            <a:r>
+              <a:rPr sz="1700" b="1" i="0">
+                <a:solidFill>
+                  <a:srgbClr val="0F9D58"/>
+                </a:solidFill>
+              </a:rPr>
               <a:t>✓ Evidence-based design </a:t>
             </a:r>
             <a:r>
-              <a:rPr sz="1800" b="0" i="0">
+              <a:rPr sz="1700" b="0" i="0">
                 <a:solidFill>
                   <a:srgbClr val="FFFFFF"/>
                 </a:solidFill>
@@ -6457,11 +8281,11 @@
           <a:p>
             <a:pPr>
               <a:spcAft>
-                <a:spcPts val="1400"/>
-              </a:spcAft>
-            </a:pPr>
-            <a:r>
-              <a:rPr sz="1800" b="1" i="0">
+                <a:spcPts val="1200"/>
+              </a:spcAft>
+            </a:pPr>
+            <a:r>
+              <a:rPr sz="1700" b="1" i="0">
                 <a:solidFill>
                   <a:srgbClr val="0F9D58"/>
                 </a:solidFill>
@@ -6469,7 +8293,7 @@
               <a:t>✓ Trust by construction </a:t>
             </a:r>
             <a:r>
-              <a:rPr sz="1800" b="0" i="0">
+              <a:rPr sz="1700" b="0" i="0">
                 <a:solidFill>
                   <a:srgbClr val="FFFFFF"/>
                 </a:solidFill>
@@ -6480,11 +8304,11 @@
           <a:p>
             <a:pPr>
               <a:spcAft>
-                <a:spcPts val="1400"/>
-              </a:spcAft>
-            </a:pPr>
-            <a:r>
-              <a:rPr sz="1800" b="1" i="0">
+                <a:spcPts val="1200"/>
+              </a:spcAft>
+            </a:pPr>
+            <a:r>
+              <a:rPr sz="1700" b="1" i="0">
                 <a:solidFill>
                   <a:srgbClr val="0F9D58"/>
                 </a:solidFill>
@@ -6492,7 +8316,7 @@
               <a:t>✓ Reproducible &amp; engineered </a:t>
             </a:r>
             <a:r>
-              <a:rPr sz="1800" b="0" i="0">
+              <a:rPr sz="1700" b="0" i="0">
                 <a:solidFill>
                   <a:srgbClr val="FFFFFF"/>
                 </a:solidFill>
@@ -6529,7 +8353,7 @@
         <p:spPr>
           <a:xfrm>
             <a:off x="0" y="0"/>
-            <a:ext cx="12191695" cy="1005840"/>
+            <a:ext cx="12191695" cy="960120"/>
           </a:xfrm>
           <a:prstGeom prst="rect">
             <a:avLst/>
@@ -6572,8 +8396,8 @@
         </p:nvSpPr>
         <p:spPr>
           <a:xfrm>
-            <a:off x="457200" y="91440"/>
-            <a:ext cx="11277295" cy="868680"/>
+            <a:off x="457200" y="73152"/>
+            <a:ext cx="11277295" cy="822960"/>
           </a:xfrm>
           <a:prstGeom prst="rect">
             <a:avLst/>
@@ -6587,7 +8411,7 @@
           <a:lstStyle/>
           <a:p>
             <a:r>
-              <a:rPr sz="2800" b="1" i="0">
+              <a:rPr sz="2700" b="1" i="0">
                 <a:solidFill>
                   <a:srgbClr val="FFFFFF"/>
                 </a:solidFill>
@@ -6605,8 +8429,8 @@
         </p:nvSpPr>
         <p:spPr>
           <a:xfrm>
-            <a:off x="640080" y="1234440"/>
-            <a:ext cx="10911535" cy="5257800"/>
+            <a:off x="640080" y="1188720"/>
+            <a:ext cx="10911535" cy="5349240"/>
           </a:xfrm>
           <a:prstGeom prst="rect">
             <a:avLst/>
@@ -6621,7 +8445,7 @@
           <a:p>
             <a:pPr>
               <a:spcAft>
-                <a:spcPts val="1200"/>
+                <a:spcPts val="1300"/>
               </a:spcAft>
             </a:pPr>
             <a:r>
@@ -6644,7 +8468,7 @@
           <a:p>
             <a:pPr>
               <a:spcAft>
-                <a:spcPts val="1200"/>
+                <a:spcPts val="1300"/>
               </a:spcAft>
             </a:pPr>
             <a:r>
@@ -6667,7 +8491,7 @@
           <a:p>
             <a:pPr>
               <a:spcAft>
-                <a:spcPts val="1200"/>
+                <a:spcPts val="1300"/>
               </a:spcAft>
             </a:pPr>
             <a:r>
@@ -6690,7 +8514,7 @@
           <a:p>
             <a:pPr>
               <a:spcAft>
-                <a:spcPts val="1200"/>
+                <a:spcPts val="1300"/>
               </a:spcAft>
             </a:pPr>
             <a:r>
@@ -6707,13 +8531,13 @@
                   <a:srgbClr val="444444"/>
                 </a:solidFill>
               </a:rPr>
-              <a:t>can the output adapt to the user (citizen, lawyer, judge)?</a:t>
-            </a:r>
-          </a:p>
-          <a:p>
-            <a:pPr>
-              <a:spcAft>
-                <a:spcPts val="1200"/>
+              <a:t>can the output adapt to the user — citizen, lawyer, or judge?</a:t>
+            </a:r>
+          </a:p>
+          <a:p>
+            <a:pPr>
+              <a:spcAft>
+                <a:spcPts val="1300"/>
               </a:spcAft>
             </a:pPr>
             <a:r>
@@ -6730,7 +8554,7 @@
                   <a:srgbClr val="444444"/>
                 </a:solidFill>
               </a:rPr>
-              <a:t>build a benchmark that proves accuracy objectively, not anecdotally.</a:t>
+              <a:t>build a benchmark that proves accuracy objectively, against a source of truth.</a:t>
             </a:r>
           </a:p>
         </p:txBody>
@@ -6762,7 +8586,7 @@
         <p:spPr>
           <a:xfrm>
             <a:off x="0" y="0"/>
-            <a:ext cx="12191695" cy="1005840"/>
+            <a:ext cx="12191695" cy="960120"/>
           </a:xfrm>
           <a:prstGeom prst="rect">
             <a:avLst/>
@@ -6805,8 +8629,8 @@
         </p:nvSpPr>
         <p:spPr>
           <a:xfrm>
-            <a:off x="457200" y="91440"/>
-            <a:ext cx="11277295" cy="868680"/>
+            <a:off x="457200" y="73152"/>
+            <a:ext cx="11277295" cy="822960"/>
           </a:xfrm>
           <a:prstGeom prst="rect">
             <a:avLst/>
@@ -6820,7 +8644,7 @@
           <a:lstStyle/>
           <a:p>
             <a:r>
-              <a:rPr sz="2800" b="1" i="0">
+              <a:rPr sz="2700" b="1" i="0">
                 <a:solidFill>
                   <a:srgbClr val="FFFFFF"/>
                 </a:solidFill>
@@ -6838,8 +8662,8 @@
         </p:nvSpPr>
         <p:spPr>
           <a:xfrm>
-            <a:off x="640080" y="1234440"/>
-            <a:ext cx="10911535" cy="5257800"/>
+            <a:off x="640080" y="1188720"/>
+            <a:ext cx="10911535" cy="5349240"/>
           </a:xfrm>
           <a:prstGeom prst="rect">
             <a:avLst/>
@@ -6917,7 +8741,7 @@
                   <a:srgbClr val="444444"/>
                 </a:solidFill>
               </a:rPr>
-              <a:t>Arabic, English, and French questions; the answer is written in the question's language.</a:t>
+              <a:t>Arabic, English, and French; the answer is written in the question's language.</a:t>
             </a:r>
           </a:p>
           <a:p>
@@ -6963,7 +8787,7 @@
                   <a:srgbClr val="444444"/>
                 </a:solidFill>
               </a:rPr>
-              <a:t>a Streamlit web app + a rigorous benchmark to measure quality.</a:t>
+              <a:t>a Streamlit web app + a rigorous, reproducible benchmark to measure quality.</a:t>
             </a:r>
           </a:p>
         </p:txBody>
@@ -6995,7 +8819,7 @@
         <p:spPr>
           <a:xfrm>
             <a:off x="0" y="0"/>
-            <a:ext cx="12191695" cy="1005840"/>
+            <a:ext cx="12191695" cy="960120"/>
           </a:xfrm>
           <a:prstGeom prst="rect">
             <a:avLst/>
@@ -7038,8 +8862,8 @@
         </p:nvSpPr>
         <p:spPr>
           <a:xfrm>
-            <a:off x="457200" y="91440"/>
-            <a:ext cx="11277295" cy="868680"/>
+            <a:off x="457200" y="73152"/>
+            <a:ext cx="11277295" cy="822960"/>
           </a:xfrm>
           <a:prstGeom prst="rect">
             <a:avLst/>
@@ -7053,7 +8877,7 @@
           <a:lstStyle/>
           <a:p>
             <a:r>
-              <a:rPr sz="2800" b="1" i="0">
+              <a:rPr sz="2700" b="1" i="0">
                 <a:solidFill>
                   <a:srgbClr val="FFFFFF"/>
                 </a:solidFill>
@@ -7071,8 +8895,8 @@
         </p:nvSpPr>
         <p:spPr>
           <a:xfrm>
-            <a:off x="457200" y="2377440"/>
-            <a:ext cx="1516989" cy="1371600"/>
+            <a:off x="457200" y="2148840"/>
+            <a:ext cx="1516989" cy="1325880"/>
           </a:xfrm>
           <a:prstGeom prst="rect">
             <a:avLst/>
@@ -7134,8 +8958,8 @@
         </p:nvSpPr>
         <p:spPr>
           <a:xfrm>
-            <a:off x="2083917" y="2377440"/>
-            <a:ext cx="1516989" cy="1371600"/>
+            <a:off x="2083917" y="2148840"/>
+            <a:ext cx="1516989" cy="1325880"/>
           </a:xfrm>
           <a:prstGeom prst="rect">
             <a:avLst/>
@@ -7198,8 +9022,8 @@
         </p:nvSpPr>
         <p:spPr>
           <a:xfrm>
-            <a:off x="3710635" y="2377440"/>
-            <a:ext cx="1516989" cy="1371600"/>
+            <a:off x="3710635" y="2148840"/>
+            <a:ext cx="1516989" cy="1325880"/>
           </a:xfrm>
           <a:prstGeom prst="rect">
             <a:avLst/>
@@ -7262,8 +9086,8 @@
         </p:nvSpPr>
         <p:spPr>
           <a:xfrm>
-            <a:off x="5337352" y="2377440"/>
-            <a:ext cx="1516989" cy="1371600"/>
+            <a:off x="5337352" y="2148840"/>
+            <a:ext cx="1516989" cy="1325880"/>
           </a:xfrm>
           <a:prstGeom prst="rect">
             <a:avLst/>
@@ -7325,8 +9149,8 @@
         </p:nvSpPr>
         <p:spPr>
           <a:xfrm>
-            <a:off x="6964070" y="2377440"/>
-            <a:ext cx="1516989" cy="1371600"/>
+            <a:off x="6964070" y="2148840"/>
+            <a:ext cx="1516989" cy="1325880"/>
           </a:xfrm>
           <a:prstGeom prst="rect">
             <a:avLst/>
@@ -7388,8 +9212,8 @@
         </p:nvSpPr>
         <p:spPr>
           <a:xfrm>
-            <a:off x="8590787" y="2377440"/>
-            <a:ext cx="1516989" cy="1371600"/>
+            <a:off x="8590787" y="2148840"/>
+            <a:ext cx="1516989" cy="1325880"/>
           </a:xfrm>
           <a:prstGeom prst="rect">
             <a:avLst/>
@@ -7451,8 +9275,8 @@
         </p:nvSpPr>
         <p:spPr>
           <a:xfrm>
-            <a:off x="10217505" y="2377440"/>
-            <a:ext cx="1516989" cy="1371600"/>
+            <a:off x="10217505" y="2148840"/>
+            <a:ext cx="1516989" cy="1325880"/>
           </a:xfrm>
           <a:prstGeom prst="rect">
             <a:avLst/>
@@ -7514,8 +9338,8 @@
         </p:nvSpPr>
         <p:spPr>
           <a:xfrm>
-            <a:off x="640080" y="4114800"/>
-            <a:ext cx="10911535" cy="2194560"/>
+            <a:off x="640080" y="3794760"/>
+            <a:ext cx="10911535" cy="2651760"/>
           </a:xfrm>
           <a:prstGeom prst="rect">
             <a:avLst/>
@@ -7534,7 +9358,7 @@
               </a:spcAft>
             </a:pPr>
             <a:r>
-              <a:rPr sz="1500" b="1" i="0">
+              <a:rPr sz="1450" b="1" i="0">
                 <a:solidFill>
                   <a:srgbClr val="1E3A5F"/>
                 </a:solidFill>
@@ -7542,12 +9366,12 @@
               <a:t>• Orchestrator → </a:t>
             </a:r>
             <a:r>
-              <a:rPr sz="1500" b="0" i="0">
+              <a:rPr sz="1450" b="0" i="0">
                 <a:solidFill>
                   <a:srgbClr val="444444"/>
                 </a:solidFill>
               </a:rPr>
-              <a:t>classifies the question type and the USER type, and routes the pipeline.</a:t>
+              <a:t>classifies the question type AND the user type; routes the whole pipeline.</a:t>
             </a:r>
           </a:p>
           <a:p>
@@ -7557,7 +9381,7 @@
               </a:spcAft>
             </a:pPr>
             <a:r>
-              <a:rPr sz="1500" b="1" i="0">
+              <a:rPr sz="1450" b="1" i="0">
                 <a:solidFill>
                   <a:srgbClr val="1E3A5F"/>
                 </a:solidFill>
@@ -7565,12 +9389,12 @@
               <a:t>• Query Understanding → </a:t>
             </a:r>
             <a:r>
-              <a:rPr sz="1500" b="0" i="0">
+              <a:rPr sz="1450" b="0" i="0">
                 <a:solidFill>
                   <a:srgbClr val="444444"/>
                 </a:solidFill>
               </a:rPr>
-              <a:t>parses language/domain/facts (schema-validated).</a:t>
+              <a:t>detects language / domain / facts as validated structured data.</a:t>
             </a:r>
           </a:p>
           <a:p>
@@ -7580,7 +9404,7 @@
               </a:spcAft>
             </a:pPr>
             <a:r>
-              <a:rPr sz="1500" b="1" i="0">
+              <a:rPr sz="1450" b="1" i="0">
                 <a:solidFill>
                   <a:srgbClr val="1E3A5F"/>
                 </a:solidFill>
@@ -7588,7 +9412,7 @@
               <a:t>• Research → </a:t>
             </a:r>
             <a:r>
-              <a:rPr sz="1500" b="0" i="0">
+              <a:rPr sz="1450" b="0" i="0">
                 <a:solidFill>
                   <a:srgbClr val="444444"/>
                 </a:solidFill>
@@ -7603,7 +9427,7 @@
               </a:spcAft>
             </a:pPr>
             <a:r>
-              <a:rPr sz="1500" b="1" i="0">
+              <a:rPr sz="1450" b="1" i="0">
                 <a:solidFill>
                   <a:srgbClr val="1E3A5F"/>
                 </a:solidFill>
@@ -7611,12 +9435,12 @@
               <a:t>• Analysis → </a:t>
             </a:r>
             <a:r>
-              <a:rPr sz="1500" b="0" i="0">
+              <a:rPr sz="1450" b="0" i="0">
                 <a:solidFill>
                   <a:srgbClr val="444444"/>
                 </a:solidFill>
               </a:rPr>
-              <a:t>extracts applicable provisions, grounded against the sources.</a:t>
+              <a:t>extracts applicable provisions, grounded against the retrieved text.</a:t>
             </a:r>
           </a:p>
           <a:p>
@@ -7626,20 +9450,43 @@
               </a:spcAft>
             </a:pPr>
             <a:r>
-              <a:rPr sz="1500" b="1" i="0">
+              <a:rPr sz="1450" b="1" i="0">
                 <a:solidFill>
                   <a:srgbClr val="1E3A5F"/>
                 </a:solidFill>
               </a:rPr>
-              <a:t>• Reasoning · Citation · Writing → </a:t>
-            </a:r>
-            <a:r>
-              <a:rPr sz="1500" b="0" i="0">
+              <a:t>• Reasoning → </a:t>
+            </a:r>
+            <a:r>
+              <a:rPr sz="1450" b="0" i="0">
                 <a:solidFill>
                   <a:srgbClr val="444444"/>
                 </a:solidFill>
               </a:rPr>
-              <a:t>applies the law to the facts; formats &amp; verifies citations; writes the final answer.</a:t>
+              <a:t>applies the law to the facts (chain-of-thought).</a:t>
+            </a:r>
+          </a:p>
+          <a:p>
+            <a:pPr>
+              <a:spcAft>
+                <a:spcPts val="500"/>
+              </a:spcAft>
+            </a:pPr>
+            <a:r>
+              <a:rPr sz="1450" b="1" i="0">
+                <a:solidFill>
+                  <a:srgbClr val="1E3A5F"/>
+                </a:solidFill>
+              </a:rPr>
+              <a:t>• Citation · Writing → </a:t>
+            </a:r>
+            <a:r>
+              <a:rPr sz="1450" b="0" i="0">
+                <a:solidFill>
+                  <a:srgbClr val="444444"/>
+                </a:solidFill>
+              </a:rPr>
+              <a:t>formats + verifies citations, then writes the final answer in the user's shape &amp; language.</a:t>
             </a:r>
           </a:p>
         </p:txBody>
@@ -7671,7 +9518,7 @@
         <p:spPr>
           <a:xfrm>
             <a:off x="0" y="0"/>
-            <a:ext cx="12191695" cy="1005840"/>
+            <a:ext cx="12191695" cy="960120"/>
           </a:xfrm>
           <a:prstGeom prst="rect">
             <a:avLst/>
@@ -7714,8 +9561,8 @@
         </p:nvSpPr>
         <p:spPr>
           <a:xfrm>
-            <a:off x="457200" y="91440"/>
-            <a:ext cx="11277295" cy="868680"/>
+            <a:off x="457200" y="73152"/>
+            <a:ext cx="11277295" cy="822960"/>
           </a:xfrm>
           <a:prstGeom prst="rect">
             <a:avLst/>
@@ -7729,12 +9576,12 @@
           <a:lstStyle/>
           <a:p>
             <a:r>
-              <a:rPr sz="2800" b="1" i="0">
+              <a:rPr sz="2700" b="1" i="0">
                 <a:solidFill>
                   <a:srgbClr val="FFFFFF"/>
                 </a:solidFill>
               </a:rPr>
-              <a:t>5. Adaptive Output — Who Is Asking?</a:t>
+              <a:t>5. How the Agents Are Instructed (System Prompts)</a:t>
             </a:r>
           </a:p>
           <a:p>
@@ -7744,7 +9591,7 @@
                   <a:srgbClr val="BFD3E6"/>
                 </a:solidFill>
               </a:rPr>
-              <a:t>The Orchestrator detects the user type and shapes the answer</a:t>
+              <a:t>Each agent has a role-specific system prompt that fixes its behaviour</a:t>
             </a:r>
           </a:p>
         </p:txBody>
@@ -7757,8 +9604,8 @@
         </p:nvSpPr>
         <p:spPr>
           <a:xfrm>
-            <a:off x="640080" y="1371600"/>
-            <a:ext cx="10911535" cy="5120640"/>
+            <a:off x="548640" y="1143000"/>
+            <a:ext cx="5852160" cy="5303520"/>
           </a:xfrm>
           <a:prstGeom prst="rect">
             <a:avLst/>
@@ -7773,85 +9620,366 @@
           <a:p>
             <a:pPr>
               <a:spcAft>
-                <a:spcPts val="1400"/>
-              </a:spcAft>
-            </a:pPr>
-            <a:r>
-              <a:rPr sz="1800" b="1" i="0">
+                <a:spcPts val="800"/>
+              </a:spcAft>
+            </a:pPr>
+            <a:r>
+              <a:rPr sz="1500" b="1" i="0">
                 <a:solidFill>
                   <a:srgbClr val="1E3A5F"/>
                 </a:solidFill>
               </a:rPr>
-              <a:t>• 👤 Citizen (general question) </a:t>
-            </a:r>
-            <a:r>
-              <a:rPr sz="1800" b="0" i="0">
+              <a:t>• Role-specific: </a:t>
+            </a:r>
+            <a:r>
+              <a:rPr sz="1500" b="0" i="0">
                 <a:solidFill>
                   <a:srgbClr val="444444"/>
                 </a:solidFill>
               </a:rPr>
-              <a:t>→ a plain, jargon-free answer to their question.</a:t>
-            </a:r>
-          </a:p>
-          <a:p>
-            <a:pPr>
-              <a:spcAft>
-                <a:spcPts val="1400"/>
-              </a:spcAft>
-            </a:pPr>
-            <a:r>
-              <a:rPr sz="1800" b="1" i="0">
+              <a:t>each agent gets a dedicated system prompt defining its single job and its rules.</a:t>
+            </a:r>
+          </a:p>
+          <a:p>
+            <a:pPr>
+              <a:spcAft>
+                <a:spcPts val="800"/>
+              </a:spcAft>
+            </a:pPr>
+            <a:r>
+              <a:rPr sz="1500" b="1" i="0">
                 <a:solidFill>
                   <a:srgbClr val="1E3A5F"/>
                 </a:solidFill>
               </a:rPr>
-              <a:t>• ⚖️ Lawyer </a:t>
-            </a:r>
-            <a:r>
-              <a:rPr sz="1800" b="0" i="0">
+              <a:t>• Structured: </a:t>
+            </a:r>
+            <a:r>
+              <a:rPr sz="1500" b="0" i="0">
                 <a:solidFill>
                   <a:srgbClr val="444444"/>
                 </a:solidFill>
               </a:rPr>
-              <a:t>→ a structured advisory memorandum (defence-oriented) for a client's case.</a:t>
-            </a:r>
-          </a:p>
-          <a:p>
-            <a:pPr>
-              <a:spcAft>
-                <a:spcPts val="1400"/>
-              </a:spcAft>
-            </a:pPr>
-            <a:r>
-              <a:rPr sz="1800" b="1" i="0">
+              <a:t>entry agents return VALIDATED structured objects (tool-use), not free text — no fragile parsing.</a:t>
+            </a:r>
+          </a:p>
+          <a:p>
+            <a:pPr>
+              <a:spcAft>
+                <a:spcPts val="800"/>
+              </a:spcAft>
+            </a:pPr>
+            <a:r>
+              <a:rPr sz="1500" b="1" i="0">
                 <a:solidFill>
                   <a:srgbClr val="1E3A5F"/>
                 </a:solidFill>
               </a:rPr>
-              <a:t>• 👨‍⚖️ Judge (gives facts, wants ruling) </a:t>
-            </a:r>
-            <a:r>
-              <a:rPr sz="1800" b="0" i="0">
+              <a:t>• Anti-hallucination: </a:t>
+            </a:r>
+            <a:r>
+              <a:rPr sz="1500" b="0" i="0">
                 <a:solidFill>
                   <a:srgbClr val="444444"/>
                 </a:solidFill>
               </a:rPr>
-              <a:t>→ a formal judicial DECISION: facts → applicable law → reasoning → verdict.</a:t>
-            </a:r>
-          </a:p>
-          <a:p>
-            <a:pPr>
-              <a:spcAft>
-                <a:spcPts val="600"/>
-              </a:spcAft>
-            </a:pPr>
+              <a:t>every generative prompt forbids inventing law: 'cite ONLY articles supplied to you'.</a:t>
+            </a:r>
+          </a:p>
+          <a:p>
+            <a:pPr>
+              <a:spcAft>
+                <a:spcPts val="800"/>
+              </a:spcAft>
+            </a:pPr>
+            <a:r>
+              <a:rPr sz="1500" b="1" i="0">
+                <a:solidFill>
+                  <a:srgbClr val="1E3A5F"/>
+                </a:solidFill>
+              </a:rPr>
+              <a:t>• Language-locked: </a:t>
+            </a:r>
             <a:r>
               <a:rPr sz="1500" b="0" i="0">
                 <a:solidFill>
                   <a:srgbClr val="444444"/>
                 </a:solidFill>
               </a:rPr>
-              <a:t>• The user can pick the role or let the system auto-detect it from the phrasing.</a:t>
+              <a:t>the writer is told to answer entirely in the query's language, with role-specific sections.</a:t>
+            </a:r>
+          </a:p>
+          <a:p>
+            <a:pPr>
+              <a:spcAft>
+                <a:spcPts val="800"/>
+              </a:spcAft>
+            </a:pPr>
+            <a:r>
+              <a:rPr sz="1500" b="1" i="0">
+                <a:solidFill>
+                  <a:srgbClr val="1E3A5F"/>
+                </a:solidFill>
+              </a:rPr>
+              <a:t>• Externalised: </a:t>
+            </a:r>
+            <a:r>
+              <a:rPr sz="1500" b="0" i="0">
+                <a:solidFill>
+                  <a:srgbClr val="444444"/>
+                </a:solidFill>
+              </a:rPr>
+              <a:t>prompts are stored in files and versioned, so they can be tuned and compared.</a:t>
+            </a:r>
+          </a:p>
+        </p:txBody>
+      </p:sp>
+      <p:sp>
+        <p:nvSpPr>
+          <p:cNvPr id="5" name="Rectangle 4"/>
+          <p:cNvSpPr/>
+          <p:nvPr/>
+        </p:nvSpPr>
+        <p:spPr>
+          <a:xfrm>
+            <a:off x="6583680" y="1280160"/>
+            <a:ext cx="5029200" cy="2148840"/>
+          </a:xfrm>
+          <a:prstGeom prst="rect">
+            <a:avLst/>
+          </a:prstGeom>
+          <a:solidFill>
+            <a:srgbClr val="0F172A"/>
+          </a:solidFill>
+          <a:ln>
+            <a:noFill/>
+          </a:ln>
+          <a:effectLst/>
+        </p:spPr>
+        <p:style>
+          <a:lnRef idx="1">
+            <a:schemeClr val="accent1"/>
+          </a:lnRef>
+          <a:fillRef idx="3">
+            <a:schemeClr val="accent1"/>
+          </a:fillRef>
+          <a:effectRef idx="2">
+            <a:schemeClr val="accent1"/>
+          </a:effectRef>
+          <a:fontRef idx="minor">
+            <a:schemeClr val="lt1"/>
+          </a:fontRef>
+        </p:style>
+        <p:txBody>
+          <a:bodyPr rtlCol="0" anchor="ctr" wrap="square" lIns="164592" tIns="109728" rIns="137160"/>
+          <a:lstStyle/>
+          <a:p>
+            <a:pPr algn="ctr"/>
+            <a:r>
+              <a:rPr sz="1200" b="1" i="0">
+                <a:solidFill>
+                  <a:srgbClr val="7AD1A0"/>
+                </a:solidFill>
+                <a:latin typeface="Consolas"/>
+              </a:rPr>
+              <a:t>Orchestrator (system prompt)</a:t>
+            </a:r>
+          </a:p>
+          <a:p>
+            <a:pPr>
+              <a:spcAft>
+                <a:spcPts val="200"/>
+              </a:spcAft>
+            </a:pPr>
+            <a:r>
+              <a:rPr sz="1100" b="0" i="0">
+                <a:solidFill>
+                  <a:srgbClr val="D7E3F4"/>
+                </a:solidFill>
+                <a:latin typeface="Consolas"/>
+              </a:rPr>
+              <a:t>Read the user input, classify it, return a</a:t>
+            </a:r>
+          </a:p>
+          <a:p>
+            <a:pPr>
+              <a:spcAft>
+                <a:spcPts val="200"/>
+              </a:spcAft>
+            </a:pPr>
+            <a:r>
+              <a:rPr sz="1100" b="0" i="0">
+                <a:solidFill>
+                  <a:srgbClr val="D7E3F4"/>
+                </a:solidFill>
+                <a:latin typeface="Consolas"/>
+              </a:rPr>
+              <a:t>routing decision. You never answer directly.</a:t>
+            </a:r>
+          </a:p>
+          <a:p>
+            <a:pPr>
+              <a:spcAft>
+                <a:spcPts val="200"/>
+              </a:spcAft>
+            </a:pPr>
+            <a:r>
+              <a:rPr sz="1100" b="0" i="0">
+                <a:solidFill>
+                  <a:srgbClr val="D7E3F4"/>
+                </a:solidFill>
+                <a:latin typeface="Consolas"/>
+              </a:rPr>
+              <a:t>Classify TWO things:</a:t>
+            </a:r>
+          </a:p>
+          <a:p>
+            <a:pPr>
+              <a:spcAft>
+                <a:spcPts val="200"/>
+              </a:spcAft>
+            </a:pPr>
+            <a:r>
+              <a:rPr sz="1100" b="0" i="0">
+                <a:solidFill>
+                  <a:srgbClr val="D7E3F4"/>
+                </a:solidFill>
+                <a:latin typeface="Consolas"/>
+              </a:rPr>
+              <a:t>  A) query_type: general | case_analysis</a:t>
+            </a:r>
+          </a:p>
+          <a:p>
+            <a:pPr>
+              <a:spcAft>
+                <a:spcPts val="200"/>
+              </a:spcAft>
+            </a:pPr>
+            <a:r>
+              <a:rPr sz="1100" b="0" i="0">
+                <a:solidFill>
+                  <a:srgbClr val="D7E3F4"/>
+                </a:solidFill>
+                <a:latin typeface="Consolas"/>
+              </a:rPr>
+              <a:t>  B) user_type : citizen | lawyer | judge</a:t>
+            </a:r>
+          </a:p>
+        </p:txBody>
+      </p:sp>
+      <p:sp>
+        <p:nvSpPr>
+          <p:cNvPr id="6" name="Rectangle 5"/>
+          <p:cNvSpPr/>
+          <p:nvPr/>
+        </p:nvSpPr>
+        <p:spPr>
+          <a:xfrm>
+            <a:off x="6583680" y="3611880"/>
+            <a:ext cx="5029200" cy="1874519"/>
+          </a:xfrm>
+          <a:prstGeom prst="rect">
+            <a:avLst/>
+          </a:prstGeom>
+          <a:solidFill>
+            <a:srgbClr val="0F172A"/>
+          </a:solidFill>
+          <a:ln>
+            <a:noFill/>
+          </a:ln>
+          <a:effectLst/>
+        </p:spPr>
+        <p:style>
+          <a:lnRef idx="1">
+            <a:schemeClr val="accent1"/>
+          </a:lnRef>
+          <a:fillRef idx="3">
+            <a:schemeClr val="accent1"/>
+          </a:fillRef>
+          <a:effectRef idx="2">
+            <a:schemeClr val="accent1"/>
+          </a:effectRef>
+          <a:fontRef idx="minor">
+            <a:schemeClr val="lt1"/>
+          </a:fontRef>
+        </p:style>
+        <p:txBody>
+          <a:bodyPr rtlCol="0" anchor="ctr" wrap="square" lIns="164592" tIns="109728" rIns="137160"/>
+          <a:lstStyle/>
+          <a:p>
+            <a:pPr algn="ctr"/>
+            <a:r>
+              <a:rPr sz="1200" b="1" i="0">
+                <a:solidFill>
+                  <a:srgbClr val="7AD1A0"/>
+                </a:solidFill>
+                <a:latin typeface="Consolas"/>
+              </a:rPr>
+              <a:t>Writing / Analysis (rules)</a:t>
+            </a:r>
+          </a:p>
+          <a:p>
+            <a:pPr>
+              <a:spcAft>
+                <a:spcPts val="200"/>
+              </a:spcAft>
+            </a:pPr>
+            <a:r>
+              <a:rPr sz="1100" b="0" i="0">
+                <a:solidFill>
+                  <a:srgbClr val="D7E3F4"/>
+                </a:solidFill>
+                <a:latin typeface="Consolas"/>
+              </a:rPr>
+              <a:t>Only cite articles supplied to you;</a:t>
+            </a:r>
+          </a:p>
+          <a:p>
+            <a:pPr>
+              <a:spcAft>
+                <a:spcPts val="200"/>
+              </a:spcAft>
+            </a:pPr>
+            <a:r>
+              <a:rPr sz="1100" b="0" i="0">
+                <a:solidFill>
+                  <a:srgbClr val="D7E3F4"/>
+                </a:solidFill>
+                <a:latin typeface="Consolas"/>
+              </a:rPr>
+              <a:t>never invent legal references.</a:t>
+            </a:r>
+          </a:p>
+          <a:p>
+            <a:pPr>
+              <a:spcAft>
+                <a:spcPts val="200"/>
+              </a:spcAft>
+            </a:pPr>
+            <a:r>
+              <a:rPr sz="1100" b="0" i="0">
+                <a:solidFill>
+                  <a:srgbClr val="D7E3F4"/>
+                </a:solidFill>
+                <a:latin typeface="Consolas"/>
+              </a:rPr>
+              <a:t>Write the ENTIRE memorandum in the</a:t>
+            </a:r>
+          </a:p>
+          <a:p>
+            <a:pPr>
+              <a:spcAft>
+                <a:spcPts val="200"/>
+              </a:spcAft>
+            </a:pPr>
+            <a:r>
+              <a:rPr sz="1100" b="0" i="0">
+                <a:solidFill>
+                  <a:srgbClr val="D7E3F4"/>
+                </a:solidFill>
+                <a:latin typeface="Consolas"/>
+              </a:rPr>
+              <a:t>query's language ONLY.</a:t>
             </a:r>
           </a:p>
         </p:txBody>
@@ -7883,7 +10011,7 @@
         <p:spPr>
           <a:xfrm>
             <a:off x="0" y="0"/>
-            <a:ext cx="12191695" cy="1005840"/>
+            <a:ext cx="12191695" cy="960120"/>
           </a:xfrm>
           <a:prstGeom prst="rect">
             <a:avLst/>
@@ -7926,8 +10054,8 @@
         </p:nvSpPr>
         <p:spPr>
           <a:xfrm>
-            <a:off x="457200" y="91440"/>
-            <a:ext cx="11277295" cy="868680"/>
+            <a:off x="457200" y="73152"/>
+            <a:ext cx="11277295" cy="822960"/>
           </a:xfrm>
           <a:prstGeom prst="rect">
             <a:avLst/>
@@ -7941,12 +10069,12 @@
           <a:lstStyle/>
           <a:p>
             <a:r>
-              <a:rPr sz="2800" b="1" i="0">
+              <a:rPr sz="2700" b="1" i="0">
                 <a:solidFill>
                   <a:srgbClr val="FFFFFF"/>
                 </a:solidFill>
               </a:rPr>
-              <a:t>6. Corpus &amp; Data Foundation</a:t>
+              <a:t>6. Structured Outputs &amp; Grounding</a:t>
             </a:r>
           </a:p>
         </p:txBody>
@@ -7959,8 +10087,8 @@
         </p:nvSpPr>
         <p:spPr>
           <a:xfrm>
-            <a:off x="640080" y="1234440"/>
-            <a:ext cx="10911535" cy="5257800"/>
+            <a:off x="548640" y="1143000"/>
+            <a:ext cx="6035040" cy="5303520"/>
           </a:xfrm>
           <a:prstGeom prst="rect">
             <a:avLst/>
@@ -7975,93 +10103,327 @@
           <a:p>
             <a:pPr>
               <a:spcAft>
-                <a:spcPts val="800"/>
-              </a:spcAft>
-            </a:pPr>
-            <a:r>
-              <a:rPr sz="1700" b="1" i="0">
+                <a:spcPts val="900"/>
+              </a:spcAft>
+            </a:pPr>
+            <a:r>
+              <a:rPr sz="1550" b="1" i="0">
                 <a:solidFill>
                   <a:srgbClr val="1E3A5F"/>
                 </a:solidFill>
               </a:rPr>
-              <a:t>• Bilingual corpus: </a:t>
-            </a:r>
-            <a:r>
-              <a:rPr sz="1700" b="0" i="0">
+              <a:t>• Schema-validated: </a:t>
+            </a:r>
+            <a:r>
+              <a:rPr sz="1550" b="0" i="0">
                 <a:solidFill>
                   <a:srgbClr val="444444"/>
                 </a:solidFill>
               </a:rPr>
-              <a:t>Lebanese Penal Code — 417 Arabic articles + 242 English articles + 54 Court of Cassation rulings = 713 indexed documents.</a:t>
-            </a:r>
-          </a:p>
-          <a:p>
-            <a:pPr>
-              <a:spcAft>
-                <a:spcPts val="800"/>
-              </a:spcAft>
-            </a:pPr>
-            <a:r>
-              <a:rPr sz="1700" b="1" i="0">
+              <a:t>Orchestrator &amp; Query-Understanding emit typed objects via tool-use (Pydantic schema) — the model MUST return valid fields.</a:t>
+            </a:r>
+          </a:p>
+          <a:p>
+            <a:pPr>
+              <a:spcAft>
+                <a:spcPts val="900"/>
+              </a:spcAft>
+            </a:pPr>
+            <a:r>
+              <a:rPr sz="1550" b="1" i="0">
                 <a:solidFill>
                   <a:srgbClr val="1E3A5F"/>
                 </a:solidFill>
               </a:rPr>
-              <a:t>• Ingestion: </a:t>
-            </a:r>
-            <a:r>
-              <a:rPr sz="1700" b="0" i="0">
+              <a:t>• Grounding check: </a:t>
+            </a:r>
+            <a:r>
+              <a:rPr sz="1550" b="0" i="0">
                 <a:solidFill>
                   <a:srgbClr val="444444"/>
                 </a:solidFill>
               </a:rPr>
-              <a:t>a reproducible pipeline reads the sources, embeds them, and records exactly what was indexed.</a:t>
-            </a:r>
-          </a:p>
-          <a:p>
-            <a:pPr>
-              <a:spcAft>
-                <a:spcPts val="800"/>
-              </a:spcAft>
-            </a:pPr>
-            <a:r>
-              <a:rPr sz="1700" b="1" i="0">
+              <a:t>the Analysis agent tags each extracted provision as grounded / ungrounded by matching its article number to the retrieved text.</a:t>
+            </a:r>
+          </a:p>
+          <a:p>
+            <a:pPr>
+              <a:spcAft>
+                <a:spcPts val="900"/>
+              </a:spcAft>
+            </a:pPr>
+            <a:r>
+              <a:rPr sz="1550" b="1" i="0">
                 <a:solidFill>
                   <a:srgbClr val="1E3A5F"/>
                 </a:solidFill>
               </a:rPr>
-              <a:t>• Extensible: </a:t>
-            </a:r>
-            <a:r>
-              <a:rPr sz="1700" b="0" i="0">
+              <a:t>• Citation filter: </a:t>
+            </a:r>
+            <a:r>
+              <a:rPr sz="1550" b="0" i="0">
                 <a:solidFill>
                   <a:srgbClr val="444444"/>
                 </a:solidFill>
               </a:rPr>
-              <a:t>new sources (e.g., contract law, French texts) are auto-indexed by the same pipeline.</a:t>
-            </a:r>
-          </a:p>
-          <a:p>
-            <a:pPr>
-              <a:spcAft>
-                <a:spcPts val="800"/>
-              </a:spcAft>
-            </a:pPr>
-            <a:r>
-              <a:rPr sz="1700" b="1" i="0">
+              <a:t>the Citation agent verifies each article against a master corpus index and drops loosely-related neighbours.</a:t>
+            </a:r>
+          </a:p>
+          <a:p>
+            <a:pPr>
+              <a:spcAft>
+                <a:spcPts val="900"/>
+              </a:spcAft>
+            </a:pPr>
+            <a:r>
+              <a:rPr sz="1550" b="1" i="0">
                 <a:solidFill>
                   <a:srgbClr val="1E3A5F"/>
                 </a:solidFill>
               </a:rPr>
-              <a:t>• Provenance: </a:t>
-            </a:r>
-            <a:r>
-              <a:rPr sz="1700" b="0" i="0">
+              <a:t>• Closed set: </a:t>
+            </a:r>
+            <a:r>
+              <a:rPr sz="1550" b="0" i="0">
                 <a:solidFill>
                   <a:srgbClr val="444444"/>
                 </a:solidFill>
               </a:rPr>
-              <a:t>every article has a validated number, used later as the 'gold answer' in the benchmark.</a:t>
+              <a:t>the Writer receives a CLOSED set — it may cite only those verified numbers.</a:t>
+            </a:r>
+          </a:p>
+        </p:txBody>
+      </p:sp>
+      <p:sp>
+        <p:nvSpPr>
+          <p:cNvPr id="5" name="Rectangle 4"/>
+          <p:cNvSpPr/>
+          <p:nvPr/>
+        </p:nvSpPr>
+        <p:spPr>
+          <a:xfrm>
+            <a:off x="6766560" y="1371600"/>
+            <a:ext cx="4846320" cy="1828800"/>
+          </a:xfrm>
+          <a:prstGeom prst="rect">
+            <a:avLst/>
+          </a:prstGeom>
+          <a:solidFill>
+            <a:srgbClr val="0F172A"/>
+          </a:solidFill>
+          <a:ln>
+            <a:noFill/>
+          </a:ln>
+          <a:effectLst/>
+        </p:spPr>
+        <p:style>
+          <a:lnRef idx="1">
+            <a:schemeClr val="accent1"/>
+          </a:lnRef>
+          <a:fillRef idx="3">
+            <a:schemeClr val="accent1"/>
+          </a:fillRef>
+          <a:effectRef idx="2">
+            <a:schemeClr val="accent1"/>
+          </a:effectRef>
+          <a:fontRef idx="minor">
+            <a:schemeClr val="lt1"/>
+          </a:fontRef>
+        </p:style>
+        <p:txBody>
+          <a:bodyPr rtlCol="0" anchor="ctr" wrap="square" lIns="164592" tIns="109728" rIns="137160"/>
+          <a:lstStyle/>
+          <a:p>
+            <a:pPr algn="ctr"/>
+            <a:r>
+              <a:rPr sz="1200" b="1" i="0">
+                <a:solidFill>
+                  <a:srgbClr val="7AD1A0"/>
+                </a:solidFill>
+                <a:latin typeface="Consolas"/>
+              </a:rPr>
+              <a:t>Routing schema (tool-use)</a:t>
+            </a:r>
+          </a:p>
+          <a:p>
+            <a:pPr>
+              <a:spcAft>
+                <a:spcPts val="200"/>
+              </a:spcAft>
+            </a:pPr>
+            <a:r>
+              <a:rPr sz="1100" b="0" i="0">
+                <a:solidFill>
+                  <a:srgbClr val="D7E3F4"/>
+                </a:solidFill>
+                <a:latin typeface="Consolas"/>
+              </a:rPr>
+              <a:t>class RoutingDecision:</a:t>
+            </a:r>
+          </a:p>
+          <a:p>
+            <a:pPr>
+              <a:spcAft>
+                <a:spcPts val="200"/>
+              </a:spcAft>
+            </a:pPr>
+            <a:r>
+              <a:rPr sz="1100" b="0" i="0">
+                <a:solidFill>
+                  <a:srgbClr val="D7E3F4"/>
+                </a:solidFill>
+                <a:latin typeface="Consolas"/>
+              </a:rPr>
+              <a:t>  query_type: str   # general | case</a:t>
+            </a:r>
+          </a:p>
+          <a:p>
+            <a:pPr>
+              <a:spcAft>
+                <a:spcPts val="200"/>
+              </a:spcAft>
+            </a:pPr>
+            <a:r>
+              <a:rPr sz="1100" b="0" i="0">
+                <a:solidFill>
+                  <a:srgbClr val="D7E3F4"/>
+                </a:solidFill>
+                <a:latin typeface="Consolas"/>
+              </a:rPr>
+              <a:t>  user_type : str   # citizen|lawyer|judge</a:t>
+            </a:r>
+          </a:p>
+          <a:p>
+            <a:pPr>
+              <a:spcAft>
+                <a:spcPts val="200"/>
+              </a:spcAft>
+            </a:pPr>
+            <a:r>
+              <a:rPr sz="1100" b="0" i="0">
+                <a:solidFill>
+                  <a:srgbClr val="D7E3F4"/>
+                </a:solidFill>
+                <a:latin typeface="Consolas"/>
+              </a:rPr>
+              <a:t>  detected_language, legal_domain,</a:t>
+            </a:r>
+          </a:p>
+          <a:p>
+            <a:pPr>
+              <a:spcAft>
+                <a:spcPts val="200"/>
+              </a:spcAft>
+            </a:pPr>
+            <a:r>
+              <a:rPr sz="1100" b="0" i="0">
+                <a:solidFill>
+                  <a:srgbClr val="D7E3F4"/>
+                </a:solidFill>
+                <a:latin typeface="Consolas"/>
+              </a:rPr>
+              <a:t>  extracted_facts[], pipeline_config</a:t>
+            </a:r>
+          </a:p>
+        </p:txBody>
+      </p:sp>
+      <p:sp>
+        <p:nvSpPr>
+          <p:cNvPr id="6" name="Rectangle 5"/>
+          <p:cNvSpPr/>
+          <p:nvPr/>
+        </p:nvSpPr>
+        <p:spPr>
+          <a:xfrm>
+            <a:off x="6766560" y="3383280"/>
+            <a:ext cx="4846320" cy="1554480"/>
+          </a:xfrm>
+          <a:prstGeom prst="rect">
+            <a:avLst/>
+          </a:prstGeom>
+          <a:solidFill>
+            <a:srgbClr val="0F172A"/>
+          </a:solidFill>
+          <a:ln>
+            <a:noFill/>
+          </a:ln>
+          <a:effectLst/>
+        </p:spPr>
+        <p:style>
+          <a:lnRef idx="1">
+            <a:schemeClr val="accent1"/>
+          </a:lnRef>
+          <a:fillRef idx="3">
+            <a:schemeClr val="accent1"/>
+          </a:fillRef>
+          <a:effectRef idx="2">
+            <a:schemeClr val="accent1"/>
+          </a:effectRef>
+          <a:fontRef idx="minor">
+            <a:schemeClr val="lt1"/>
+          </a:fontRef>
+        </p:style>
+        <p:txBody>
+          <a:bodyPr rtlCol="0" anchor="ctr" wrap="square" lIns="164592" tIns="109728" rIns="137160"/>
+          <a:lstStyle/>
+          <a:p>
+            <a:pPr algn="ctr"/>
+            <a:r>
+              <a:rPr sz="1200" b="1" i="0">
+                <a:solidFill>
+                  <a:srgbClr val="7AD1A0"/>
+                </a:solidFill>
+                <a:latin typeface="Consolas"/>
+              </a:rPr>
+              <a:t>Closed-set constraint (writer)</a:t>
+            </a:r>
+          </a:p>
+          <a:p>
+            <a:pPr>
+              <a:spcAft>
+                <a:spcPts val="200"/>
+              </a:spcAft>
+            </a:pPr>
+            <a:r>
+              <a:rPr sz="1100" b="0" i="0">
+                <a:solidFill>
+                  <a:srgbClr val="D7E3F4"/>
+                </a:solidFill>
+                <a:latin typeface="Consolas"/>
+              </a:rPr>
+              <a:t>CITATION CONSTRAINT: You may cite ONLY</a:t>
+            </a:r>
+          </a:p>
+          <a:p>
+            <a:pPr>
+              <a:spcAft>
+                <a:spcPts val="200"/>
+              </a:spcAft>
+            </a:pPr>
+            <a:r>
+              <a:rPr sz="1100" b="0" i="0">
+                <a:solidFill>
+                  <a:srgbClr val="D7E3F4"/>
+                </a:solidFill>
+                <a:latin typeface="Consolas"/>
+              </a:rPr>
+              <a:t>these article numbers: 547, 549.</a:t>
+            </a:r>
+          </a:p>
+          <a:p>
+            <a:pPr>
+              <a:spcAft>
+                <a:spcPts val="200"/>
+              </a:spcAft>
+            </a:pPr>
+            <a:r>
+              <a:rPr sz="1100" b="0" i="0">
+                <a:solidFill>
+                  <a:srgbClr val="D7E3F4"/>
+                </a:solidFill>
+                <a:latin typeface="Consolas"/>
+              </a:rPr>
+              <a:t>Do NOT mention any other article.</a:t>
             </a:r>
           </a:p>
         </p:txBody>
@@ -8093,7 +10455,7 @@
         <p:spPr>
           <a:xfrm>
             <a:off x="0" y="0"/>
-            <a:ext cx="12191695" cy="1005840"/>
+            <a:ext cx="12191695" cy="960120"/>
           </a:xfrm>
           <a:prstGeom prst="rect">
             <a:avLst/>
@@ -8136,8 +10498,8 @@
         </p:nvSpPr>
         <p:spPr>
           <a:xfrm>
-            <a:off x="457200" y="91440"/>
-            <a:ext cx="11277295" cy="868680"/>
+            <a:off x="457200" y="73152"/>
+            <a:ext cx="11277295" cy="822960"/>
           </a:xfrm>
           <a:prstGeom prst="rect">
             <a:avLst/>
@@ -8151,12 +10513,22 @@
           <a:lstStyle/>
           <a:p>
             <a:r>
-              <a:rPr sz="2800" b="1" i="0">
+              <a:rPr sz="2700" b="1" i="0">
                 <a:solidFill>
                   <a:srgbClr val="FFFFFF"/>
                 </a:solidFill>
               </a:rPr>
-              <a:t>7. Retrieval (RAG)</a:t>
+              <a:t>7. Adaptive Output — Who Is Asking?</a:t>
+            </a:r>
+          </a:p>
+          <a:p>
+            <a:r>
+              <a:rPr sz="1300" b="0" i="0">
+                <a:solidFill>
+                  <a:srgbClr val="BFD3E6"/>
+                </a:solidFill>
+              </a:rPr>
+              <a:t>The Orchestrator detects the user type and shapes the answer accordingly</a:t>
             </a:r>
           </a:p>
         </p:txBody>
@@ -8169,8 +10541,8 @@
         </p:nvSpPr>
         <p:spPr>
           <a:xfrm>
-            <a:off x="640080" y="1234440"/>
-            <a:ext cx="10911535" cy="5257800"/>
+            <a:off x="640080" y="1371600"/>
+            <a:ext cx="10911535" cy="5166360"/>
           </a:xfrm>
           <a:prstGeom prst="rect">
             <a:avLst/>
@@ -8185,93 +10557,85 @@
           <a:p>
             <a:pPr>
               <a:spcAft>
+                <a:spcPts val="1500"/>
+              </a:spcAft>
+            </a:pPr>
+            <a:r>
+              <a:rPr sz="1800" b="1" i="0">
+                <a:solidFill>
+                  <a:srgbClr val="1E3A5F"/>
+                </a:solidFill>
+              </a:rPr>
+              <a:t>• 👤 Citizen (general question) </a:t>
+            </a:r>
+            <a:r>
+              <a:rPr sz="1800" b="0" i="0">
+                <a:solidFill>
+                  <a:srgbClr val="444444"/>
+                </a:solidFill>
+              </a:rPr>
+              <a:t>→ a plain, jargon-free answer to their question.</a:t>
+            </a:r>
+          </a:p>
+          <a:p>
+            <a:pPr>
+              <a:spcAft>
+                <a:spcPts val="1500"/>
+              </a:spcAft>
+            </a:pPr>
+            <a:r>
+              <a:rPr sz="1800" b="1" i="0">
+                <a:solidFill>
+                  <a:srgbClr val="1E3A5F"/>
+                </a:solidFill>
+              </a:rPr>
+              <a:t>• ⚖️ Lawyer </a:t>
+            </a:r>
+            <a:r>
+              <a:rPr sz="1800" b="0" i="0">
+                <a:solidFill>
+                  <a:srgbClr val="444444"/>
+                </a:solidFill>
+              </a:rPr>
+              <a:t>→ a structured advisory memorandum (defence-oriented) for a client's case.</a:t>
+            </a:r>
+          </a:p>
+          <a:p>
+            <a:pPr>
+              <a:spcAft>
+                <a:spcPts val="1500"/>
+              </a:spcAft>
+            </a:pPr>
+            <a:r>
+              <a:rPr sz="1800" b="1" i="0">
+                <a:solidFill>
+                  <a:srgbClr val="1E3A5F"/>
+                </a:solidFill>
+              </a:rPr>
+              <a:t>• 👨‍⚖️ Judge (gives facts, wants ruling) </a:t>
+            </a:r>
+            <a:r>
+              <a:rPr sz="1800" b="0" i="0">
+                <a:solidFill>
+                  <a:srgbClr val="444444"/>
+                </a:solidFill>
+              </a:rPr>
+              <a:t>→ a formal judicial DECISION: facts → applicable law → reasoning → verdict.</a:t>
+            </a:r>
+          </a:p>
+          <a:p>
+            <a:pPr>
+              <a:spcAft>
                 <a:spcPts val="800"/>
               </a:spcAft>
             </a:pPr>
             <a:r>
-              <a:rPr sz="1700" b="1" i="0">
-                <a:solidFill>
-                  <a:srgbClr val="1E3A5F"/>
-                </a:solidFill>
-              </a:rPr>
-              <a:t>• Method: </a:t>
-            </a:r>
-            <a:r>
-              <a:rPr sz="1700" b="0" i="0">
+              <a:rPr sz="1500" b="0" i="0">
                 <a:solidFill>
                   <a:srgbClr val="444444"/>
                 </a:solidFill>
               </a:rPr>
-              <a:t>Hybrid search = keyword (BM25) + meaning (dense embeddings) — chosen by benchmark evidence.</a:t>
-            </a:r>
-          </a:p>
-          <a:p>
-            <a:pPr>
-              <a:spcAft>
-                <a:spcPts val="800"/>
-              </a:spcAft>
-            </a:pPr>
-            <a:r>
-              <a:rPr sz="1700" b="1" i="0">
-                <a:solidFill>
-                  <a:srgbClr val="1E3A5F"/>
-                </a:solidFill>
-              </a:rPr>
-              <a:t>• Embeddings: </a:t>
-            </a:r>
-            <a:r>
-              <a:rPr sz="1700" b="0" i="0">
-                <a:solidFill>
-                  <a:srgbClr val="444444"/>
-                </a:solidFill>
-              </a:rPr>
-              <a:t>multilingual sentence-transformer (paraphrase-multilingual-mpnet), local &amp; free.</a:t>
-            </a:r>
-          </a:p>
-          <a:p>
-            <a:pPr>
-              <a:spcAft>
-                <a:spcPts val="800"/>
-              </a:spcAft>
-            </a:pPr>
-            <a:r>
-              <a:rPr sz="1700" b="1" i="0">
-                <a:solidFill>
-                  <a:srgbClr val="1E3A5F"/>
-                </a:solidFill>
-              </a:rPr>
-              <a:t>• Cross-lingual: </a:t>
-            </a:r>
-            <a:r>
-              <a:rPr sz="1700" b="0" i="0">
-                <a:solidFill>
-                  <a:srgbClr val="444444"/>
-                </a:solidFill>
-              </a:rPr>
-              <a:t>articles and rulings are searched in separate pools; the article number makes matches language-agnostic.</a:t>
-            </a:r>
-          </a:p>
-          <a:p>
-            <a:pPr>
-              <a:spcAft>
-                <a:spcPts val="800"/>
-              </a:spcAft>
-            </a:pPr>
-            <a:r>
-              <a:rPr sz="1700" b="1" i="0">
-                <a:solidFill>
-                  <a:srgbClr val="1E3A5F"/>
-                </a:solidFill>
-              </a:rPr>
-              <a:t>• Evidence over intuition: </a:t>
-            </a:r>
-            <a:r>
-              <a:rPr sz="1700" b="0" i="0">
-                <a:solidFill>
-                  <a:srgbClr val="444444"/>
-                </a:solidFill>
-              </a:rPr>
-              <a:t>a popular English re-ranker was TESTED and REJECTED — it hurt this Arabic/legal corpus.</a:t>
+              <a:t>• The user can select the role, or the Orchestrator infers it from the phrasing (e.g. 'my client' → lawyer).</a:t>
             </a:r>
           </a:p>
         </p:txBody>
@@ -8303,7 +10667,7 @@
         <p:spPr>
           <a:xfrm>
             <a:off x="0" y="0"/>
-            <a:ext cx="12191695" cy="1005840"/>
+            <a:ext cx="12191695" cy="960120"/>
           </a:xfrm>
           <a:prstGeom prst="rect">
             <a:avLst/>
@@ -8346,8 +10710,8 @@
         </p:nvSpPr>
         <p:spPr>
           <a:xfrm>
-            <a:off x="457200" y="91440"/>
-            <a:ext cx="11277295" cy="868680"/>
+            <a:off x="457200" y="73152"/>
+            <a:ext cx="11277295" cy="822960"/>
           </a:xfrm>
           <a:prstGeom prst="rect">
             <a:avLst/>
@@ -8361,12 +10725,12 @@
           <a:lstStyle/>
           <a:p>
             <a:r>
-              <a:rPr sz="2800" b="1" i="0">
+              <a:rPr sz="2700" b="1" i="0">
                 <a:solidFill>
                   <a:srgbClr val="FFFFFF"/>
                 </a:solidFill>
               </a:rPr>
-              <a:t>8. Trust &amp; Anti-Hallucination</a:t>
+              <a:t>8. Corpus &amp; Data Foundation</a:t>
             </a:r>
           </a:p>
         </p:txBody>
@@ -8379,8 +10743,8 @@
         </p:nvSpPr>
         <p:spPr>
           <a:xfrm>
-            <a:off x="640080" y="1234440"/>
-            <a:ext cx="10911535" cy="5257800"/>
+            <a:off x="640080" y="1188720"/>
+            <a:ext cx="10911535" cy="5349240"/>
           </a:xfrm>
           <a:prstGeom prst="rect">
             <a:avLst/>
@@ -8404,7 +10768,7 @@
                   <a:srgbClr val="1E3A5F"/>
                 </a:solidFill>
               </a:rPr>
-              <a:t>• Grounding: </a:t>
+              <a:t>• Bilingual corpus: </a:t>
             </a:r>
             <a:r>
               <a:rPr sz="1700" b="0" i="0">
@@ -8412,7 +10776,7 @@
                   <a:srgbClr val="444444"/>
                 </a:solidFill>
               </a:rPr>
-              <a:t>each extracted provision is checked against the retrieved text; ungrounded ones are flagged.</a:t>
+              <a:t>Lebanese Penal Code — 417 Arabic + 242 English articles + 54 Court of Cassation rulings = 713 indexed documents.</a:t>
             </a:r>
           </a:p>
           <a:p>
@@ -8427,7 +10791,7 @@
                   <a:srgbClr val="1E3A5F"/>
                 </a:solidFill>
               </a:rPr>
-              <a:t>• Citation verification: </a:t>
+              <a:t>• Ingestion: </a:t>
             </a:r>
             <a:r>
               <a:rPr sz="1700" b="0" i="0">
@@ -8435,7 +10799,7 @@
                   <a:srgbClr val="444444"/>
                 </a:solidFill>
               </a:rPr>
-              <a:t>every cited article number is verified against the corpus index (no invented citations).</a:t>
+              <a:t>a reproducible pipeline reads the sources, embeds them, and records exactly what was indexed.</a:t>
             </a:r>
           </a:p>
           <a:p>
@@ -8450,7 +10814,7 @@
                   <a:srgbClr val="1E3A5F"/>
                 </a:solidFill>
               </a:rPr>
-              <a:t>• Closed citation set: </a:t>
+              <a:t>• Extensible: </a:t>
             </a:r>
             <a:r>
               <a:rPr sz="1700" b="0" i="0">
@@ -8458,7 +10822,7 @@
                   <a:srgbClr val="444444"/>
                 </a:solidFill>
               </a:rPr>
-              <a:t>the memo may cite ONLY the verified articles it was given (precision-first).</a:t>
+              <a:t>new sources (contract law, French texts) are auto-indexed by the same pipeline.</a:t>
             </a:r>
           </a:p>
           <a:p>
@@ -8473,7 +10837,7 @@
                   <a:srgbClr val="1E3A5F"/>
                 </a:solidFill>
               </a:rPr>
-              <a:t>• Trust metric: </a:t>
+              <a:t>• Provenance: </a:t>
             </a:r>
             <a:r>
               <a:rPr sz="1700" b="0" i="0">
@@ -8481,7 +10845,7 @@
                   <a:srgbClr val="444444"/>
                 </a:solidFill>
               </a:rPr>
-              <a:t>each answer reports a hallucination rate and a grounding rate.</a:t>
+              <a:t>every article keeps a validated number — later used as the 'gold answer' in the benchmark.</a:t>
             </a:r>
           </a:p>
         </p:txBody>

--- a/Legal_AI_Academic_Presentation.pptx
+++ b/Legal_AI_Academic_Presentation.pptx
@@ -30,7 +30,6 @@
     <p:sldId id="278" r:id="rId29"/>
     <p:sldId id="279" r:id="rId30"/>
     <p:sldId id="280" r:id="rId31"/>
-    <p:sldId id="281" r:id="rId32"/>
   </p:sldIdLst>
   <p:sldSz cx="12191695" cy="6858000" type="screen4x3"/>
   <p:notesSz cx="6858000" cy="9144000"/>
@@ -5599,7 +5598,7 @@
                   <a:srgbClr val="FFFFFF"/>
                 </a:solidFill>
               </a:rPr>
-              <a:t>15. The Evaluator Agent (LLM-as-Judge)</a:t>
+              <a:t>15. The Evaluator Agent — Judging Against the Source of Truth</a:t>
             </a:r>
           </a:p>
           <a:p>
@@ -5609,7 +5608,7 @@
                   <a:srgbClr val="BFD3E6"/>
                 </a:solidFill>
               </a:rPr>
-              <a:t>A separate LLM scores each answer — an automated expert reviewer</a:t>
+              <a:t>An independent LLM judge scores each answer relative to the user's ground-truth answer</a:t>
             </a:r>
           </a:p>
         </p:txBody>
@@ -5638,7 +5637,7 @@
           <a:p>
             <a:pPr>
               <a:spcAft>
-                <a:spcPts val="800"/>
+                <a:spcPts val="900"/>
               </a:spcAft>
             </a:pPr>
             <a:r>
@@ -5655,13 +5654,13 @@
                   <a:srgbClr val="444444"/>
                 </a:solidFill>
               </a:rPr>
-              <a:t>a second, independent LLM (Claude), separate from the answering agents.</a:t>
-            </a:r>
-          </a:p>
-          <a:p>
-            <a:pPr>
-              <a:spcAft>
-                <a:spcPts val="800"/>
+              <a:t>a second, independent LLM (Claude, temperature 0), separate from the answering agents.</a:t>
+            </a:r>
+          </a:p>
+          <a:p>
+            <a:pPr>
+              <a:spcAft>
+                <a:spcPts val="900"/>
               </a:spcAft>
             </a:pPr>
             <a:r>
@@ -5670,7 +5669,7 @@
                   <a:srgbClr val="1E3A5F"/>
                 </a:solidFill>
               </a:rPr>
-              <a:t>• Deterministic: </a:t>
+              <a:t>• Depends on the reference: </a:t>
             </a:r>
             <a:r>
               <a:rPr sz="1500" b="0" i="0">
@@ -5678,13 +5677,13 @@
                   <a:srgbClr val="444444"/>
                 </a:solidFill>
               </a:rPr>
-              <a:t>temperature 0 for consistent, deterministic scoring.</a:t>
-            </a:r>
-          </a:p>
-          <a:p>
-            <a:pPr>
-              <a:spcAft>
-                <a:spcPts val="800"/>
+              <a:t>the user provides the correct expert answer per question — the SOURCE OF TRUTH.</a:t>
+            </a:r>
+          </a:p>
+          <a:p>
+            <a:pPr>
+              <a:spcAft>
+                <a:spcPts val="900"/>
               </a:spcAft>
             </a:pPr>
             <a:r>
@@ -5693,6 +5692,29 @@
                   <a:srgbClr val="1E3A5F"/>
                 </a:solidFill>
               </a:rPr>
+              <a:t>• How it scores: </a:t>
+            </a:r>
+            <a:r>
+              <a:rPr sz="1500" b="0" i="0">
+                <a:solidFill>
+                  <a:srgbClr val="444444"/>
+                </a:solidFill>
+              </a:rPr>
+              <a:t>the judge compares the AI answer AGAINST that reference — it does NOT score on its own opinion.</a:t>
+            </a:r>
+          </a:p>
+          <a:p>
+            <a:pPr>
+              <a:spcAft>
+                <a:spcPts val="900"/>
+              </a:spcAft>
+            </a:pPr>
+            <a:r>
+              <a:rPr sz="1500" b="1" i="0">
+                <a:solidFill>
+                  <a:srgbClr val="1E3A5F"/>
+                </a:solidFill>
+              </a:rPr>
               <a:t>• Rubric: </a:t>
             </a:r>
             <a:r>
@@ -5701,13 +5723,13 @@
                   <a:srgbClr val="444444"/>
                 </a:solidFill>
               </a:rPr>
-              <a:t>scores 4 dimensions 1–5: legal correctness, citation quality, completeness, clarity.</a:t>
-            </a:r>
-          </a:p>
-          <a:p>
-            <a:pPr>
-              <a:spcAft>
-                <a:spcPts val="800"/>
+              <a:t>4 dimensions 1–5 (legal correctness, citation quality, completeness, clarity), judged vs. the reference.</a:t>
+            </a:r>
+          </a:p>
+          <a:p>
+            <a:pPr>
+              <a:spcAft>
+                <a:spcPts val="900"/>
               </a:spcAft>
             </a:pPr>
             <a:r>
@@ -5716,7 +5738,7 @@
                   <a:srgbClr val="1E3A5F"/>
                 </a:solidFill>
               </a:rPr>
-              <a:t>• Output: </a:t>
+              <a:t>• Why it matters: </a:t>
             </a:r>
             <a:r>
               <a:rPr sz="1500" b="0" i="0">
@@ -5724,30 +5746,7 @@
                   <a:srgbClr val="444444"/>
                 </a:solidFill>
               </a:rPr>
-              <a:t>returns a strict JSON verdict + a one-line explanation; the average is the score.</a:t>
-            </a:r>
-          </a:p>
-          <a:p>
-            <a:pPr>
-              <a:spcAft>
-                <a:spcPts val="800"/>
-              </a:spcAft>
-            </a:pPr>
-            <a:r>
-              <a:rPr sz="1500" b="1" i="0">
-                <a:solidFill>
-                  <a:srgbClr val="1E3A5F"/>
-                </a:solidFill>
-              </a:rPr>
-              <a:t>• Cross-checked: </a:t>
-            </a:r>
-            <a:r>
-              <a:rPr sz="1500" b="0" i="0">
-                <a:solidFill>
-                  <a:srgbClr val="444444"/>
-                </a:solidFill>
-              </a:rPr>
-              <a:t>objective citation-F1 (vs gold articles) is ALSO computed automatically to cross-check the judge.</a:t>
+              <a:t>grounds evaluation in human expertise → objective &amp; reproducible; REQUIRED for a judged run.</a:t>
             </a:r>
           </a:p>
         </p:txBody>
@@ -5760,8 +5759,8 @@
         </p:nvSpPr>
         <p:spPr>
           <a:xfrm>
-            <a:off x="6858000" y="1371600"/>
-            <a:ext cx="4800600" cy="4206240"/>
+            <a:off x="6858000" y="1280160"/>
+            <a:ext cx="4800600" cy="4389120"/>
           </a:xfrm>
           <a:prstGeom prst="rect">
             <a:avLst/>
@@ -5800,7 +5799,7 @@
                 </a:solidFill>
                 <a:latin typeface="Consolas"/>
               </a:rPr>
-              <a:t>Judge prompt (reference-free)</a:t>
+              <a:t>Judge prompt (reference-based)</a:t>
             </a:r>
           </a:p>
           <a:p>
@@ -5832,7 +5831,7 @@
                 </a:solidFill>
                 <a:latin typeface="Consolas"/>
               </a:rPr>
-              <a:t>User Query: "..."</a:t>
+              <a:t>Compare the AI answer against the</a:t>
             </a:r>
           </a:p>
           <a:p>
@@ -5848,7 +5847,7 @@
                 </a:solidFill>
                 <a:latin typeface="Consolas"/>
               </a:rPr>
-              <a:t>Legal Memorandum: "..."</a:t>
+              <a:t>REFERENCE (ground-truth) answer.</a:t>
             </a:r>
           </a:p>
           <a:p>
@@ -5880,7 +5879,7 @@
                 </a:solidFill>
                 <a:latin typeface="Consolas"/>
               </a:rPr>
-              <a:t>Score each 1-5:</a:t>
+              <a:t>REFERENCE answer: "..."  (from the user)</a:t>
             </a:r>
           </a:p>
           <a:p>
@@ -5896,6 +5895,54 @@
                 </a:solidFill>
                 <a:latin typeface="Consolas"/>
               </a:rPr>
+              <a:t>AI answer: "..."</a:t>
+            </a:r>
+          </a:p>
+          <a:p>
+            <a:pPr>
+              <a:spcAft>
+                <a:spcPts val="200"/>
+              </a:spcAft>
+            </a:pPr>
+            <a:r>
+              <a:rPr sz="1100" b="0" i="0">
+                <a:solidFill>
+                  <a:srgbClr val="D7E3F4"/>
+                </a:solidFill>
+                <a:latin typeface="Consolas"/>
+              </a:rPr>
+              <a:t/>
+            </a:r>
+          </a:p>
+          <a:p>
+            <a:pPr>
+              <a:spcAft>
+                <a:spcPts val="200"/>
+              </a:spcAft>
+            </a:pPr>
+            <a:r>
+              <a:rPr sz="1100" b="0" i="0">
+                <a:solidFill>
+                  <a:srgbClr val="D7E3F4"/>
+                </a:solidFill>
+                <a:latin typeface="Consolas"/>
+              </a:rPr>
+              <a:t>Score 1-5, judged AGAINST the reference:</a:t>
+            </a:r>
+          </a:p>
+          <a:p>
+            <a:pPr>
+              <a:spcAft>
+                <a:spcPts val="200"/>
+              </a:spcAft>
+            </a:pPr>
+            <a:r>
+              <a:rPr sz="1100" b="0" i="0">
+                <a:solidFill>
+                  <a:srgbClr val="D7E3F4"/>
+                </a:solidFill>
+                <a:latin typeface="Consolas"/>
+              </a:rPr>
               <a:t>  legal_correctness, citation_quality,</a:t>
             </a:r>
           </a:p>
@@ -5928,39 +5975,7 @@
                 </a:solidFill>
                 <a:latin typeface="Consolas"/>
               </a:rPr>
-              <a:t>Return ONLY JSON:</a:t>
-            </a:r>
-          </a:p>
-          <a:p>
-            <a:pPr>
-              <a:spcAft>
-                <a:spcPts val="200"/>
-              </a:spcAft>
-            </a:pPr>
-            <a:r>
-              <a:rPr sz="1100" b="0" i="0">
-                <a:solidFill>
-                  <a:srgbClr val="D7E3F4"/>
-                </a:solidFill>
-                <a:latin typeface="Consolas"/>
-              </a:rPr>
-              <a:t>  {legal_correctness:N, ... ,</a:t>
-            </a:r>
-          </a:p>
-          <a:p>
-            <a:pPr>
-              <a:spcAft>
-                <a:spcPts val="200"/>
-              </a:spcAft>
-            </a:pPr>
-            <a:r>
-              <a:rPr sz="1100" b="0" i="0">
-                <a:solidFill>
-                  <a:srgbClr val="D7E3F4"/>
-                </a:solidFill>
-                <a:latin typeface="Consolas"/>
-              </a:rPr>
-              <a:t>   explanation:"one sentence"}</a:t>
+              <a:t>Return ONLY JSON.</a:t>
             </a:r>
           </a:p>
         </p:txBody>
@@ -6055,17 +6070,7 @@
                   <a:srgbClr val="FFFFFF"/>
                 </a:solidFill>
               </a:rPr>
-              <a:t>16. The Source-of-Truth (Reference) Answer</a:t>
-            </a:r>
-          </a:p>
-          <a:p>
-            <a:r>
-              <a:rPr sz="1300" b="0" i="0">
-                <a:solidFill>
-                  <a:srgbClr val="BFD3E6"/>
-                </a:solidFill>
-              </a:rPr>
-              <a:t>Why the human ground-truth answer is essential</a:t>
+              <a:t>16. Benchmark — The Workflow in the App</a:t>
             </a:r>
           </a:p>
         </p:txBody>
@@ -6078,8 +6083,8 @@
         </p:nvSpPr>
         <p:spPr>
           <a:xfrm>
-            <a:off x="548640" y="1143000"/>
-            <a:ext cx="6126480" cy="5394960"/>
+            <a:off x="640080" y="1188720"/>
+            <a:ext cx="10911535" cy="5349240"/>
           </a:xfrm>
           <a:prstGeom prst="rect">
             <a:avLst/>
@@ -6098,20 +6103,20 @@
               </a:spcAft>
             </a:pPr>
             <a:r>
-              <a:rPr sz="1500" b="1" i="0">
+              <a:rPr sz="1650" b="1" i="0">
                 <a:solidFill>
                   <a:srgbClr val="1E3A5F"/>
                 </a:solidFill>
               </a:rPr>
-              <a:t>• The problem: </a:t>
-            </a:r>
-            <a:r>
-              <a:rPr sz="1500" b="0" i="0">
+              <a:t>• 1 · Generate: </a:t>
+            </a:r>
+            <a:r>
+              <a:rPr sz="1650" b="0" i="0">
                 <a:solidFill>
                   <a:srgbClr val="444444"/>
                 </a:solidFill>
               </a:rPr>
-              <a:t>without a reference, the judge scores on its own opinion — which can be biased or wrong on Lebanese law.</a:t>
+              <a:t>set the number of questions; the generator produces grounded questions, shown 10 per page.</a:t>
             </a:r>
           </a:p>
           <a:p>
@@ -6121,20 +6126,20 @@
               </a:spcAft>
             </a:pPr>
             <a:r>
-              <a:rPr sz="1500" b="1" i="0">
+              <a:rPr sz="1650" b="1" i="0">
                 <a:solidFill>
                   <a:srgbClr val="1E3A5F"/>
                 </a:solidFill>
               </a:rPr>
-              <a:t>• The fix: </a:t>
-            </a:r>
-            <a:r>
-              <a:rPr sz="1500" b="0" i="0">
+              <a:t>• 2 · Reference: </a:t>
+            </a:r>
+            <a:r>
+              <a:rPr sz="1650" b="0" i="0">
                 <a:solidFill>
                   <a:srgbClr val="444444"/>
                 </a:solidFill>
               </a:rPr>
-              <a:t>the user enters the correct expert answer per question — the SOURCE OF TRUTH.</a:t>
+              <a:t>review them, then type the source-of-truth answer in the editable table (required).</a:t>
             </a:r>
           </a:p>
           <a:p>
@@ -6144,20 +6149,20 @@
               </a:spcAft>
             </a:pPr>
             <a:r>
-              <a:rPr sz="1500" b="1" i="0">
+              <a:rPr sz="1650" b="1" i="0">
                 <a:solidFill>
                   <a:srgbClr val="1E3A5F"/>
                 </a:solidFill>
               </a:rPr>
-              <a:t>• Comparison: </a:t>
-            </a:r>
-            <a:r>
-              <a:rPr sz="1500" b="0" i="0">
+              <a:t>• 3 · Select: </a:t>
+            </a:r>
+            <a:r>
+              <a:rPr sz="1650" b="0" i="0">
                 <a:solidFill>
                   <a:srgbClr val="444444"/>
                 </a:solidFill>
               </a:rPr>
-              <a:t>the judge then compares the AI answer AGAINST this reference (agreement on law, citations, completeness).</a:t>
+              <a:t>choose systems — Multi-Agent vs Single-Agent vs No-RAG.</a:t>
             </a:r>
           </a:p>
           <a:p>
@@ -6167,20 +6172,20 @@
               </a:spcAft>
             </a:pPr>
             <a:r>
-              <a:rPr sz="1500" b="1" i="0">
+              <a:rPr sz="1650" b="1" i="0">
                 <a:solidFill>
                   <a:srgbClr val="1E3A5F"/>
                 </a:solidFill>
               </a:rPr>
-              <a:t>• Why it matters: </a:t>
-            </a:r>
-            <a:r>
-              <a:rPr sz="1500" b="0" i="0">
+              <a:t>• 4 · Run: </a:t>
+            </a:r>
+            <a:r>
+              <a:rPr sz="1650" b="0" i="0">
                 <a:solidFill>
                   <a:srgbClr val="444444"/>
                 </a:solidFill>
               </a:rPr>
-              <a:t>grounds evaluation in human expertise — objective and reproducible, not the judge's guess.</a:t>
+              <a:t>each system answers; the judge scores every answer against the reference.</a:t>
             </a:r>
           </a:p>
           <a:p>
@@ -6190,217 +6195,20 @@
               </a:spcAft>
             </a:pPr>
             <a:r>
-              <a:rPr sz="1500" b="1" i="0">
+              <a:rPr sz="1650" b="1" i="0">
                 <a:solidFill>
                   <a:srgbClr val="1E3A5F"/>
                 </a:solidFill>
               </a:rPr>
-              <a:t>• Mandatory: </a:t>
-            </a:r>
-            <a:r>
-              <a:rPr sz="1500" b="0" i="0">
+              <a:t>• 5 · Results: </a:t>
+            </a:r>
+            <a:r>
+              <a:rPr sz="1650" b="0" i="0">
                 <a:solidFill>
                   <a:srgbClr val="444444"/>
                 </a:solidFill>
               </a:rPr>
-              <a:t>it is REQUIRED for a judged comparison run — the run is blocked until every question has one.</a:t>
-            </a:r>
-          </a:p>
-        </p:txBody>
-      </p:sp>
-      <p:sp>
-        <p:nvSpPr>
-          <p:cNvPr id="5" name="Rectangle 4"/>
-          <p:cNvSpPr/>
-          <p:nvPr/>
-        </p:nvSpPr>
-        <p:spPr>
-          <a:xfrm>
-            <a:off x="6858000" y="1371600"/>
-            <a:ext cx="4800600" cy="3931920"/>
-          </a:xfrm>
-          <a:prstGeom prst="rect">
-            <a:avLst/>
-          </a:prstGeom>
-          <a:solidFill>
-            <a:srgbClr val="0F172A"/>
-          </a:solidFill>
-          <a:ln>
-            <a:noFill/>
-          </a:ln>
-          <a:effectLst/>
-        </p:spPr>
-        <p:style>
-          <a:lnRef idx="1">
-            <a:schemeClr val="accent1"/>
-          </a:lnRef>
-          <a:fillRef idx="3">
-            <a:schemeClr val="accent1"/>
-          </a:fillRef>
-          <a:effectRef idx="2">
-            <a:schemeClr val="accent1"/>
-          </a:effectRef>
-          <a:fontRef idx="minor">
-            <a:schemeClr val="lt1"/>
-          </a:fontRef>
-        </p:style>
-        <p:txBody>
-          <a:bodyPr rtlCol="0" anchor="ctr" wrap="square" lIns="164592" tIns="109728" rIns="137160"/>
-          <a:lstStyle/>
-          <a:p>
-            <a:pPr algn="ctr"/>
-            <a:r>
-              <a:rPr sz="1200" b="1" i="0">
-                <a:solidFill>
-                  <a:srgbClr val="7AD1A0"/>
-                </a:solidFill>
-                <a:latin typeface="Consolas"/>
-              </a:rPr>
-              <a:t>Judge prompt (reference-based)</a:t>
-            </a:r>
-          </a:p>
-          <a:p>
-            <a:pPr>
-              <a:spcAft>
-                <a:spcPts val="200"/>
-              </a:spcAft>
-            </a:pPr>
-            <a:r>
-              <a:rPr sz="1100" b="0" i="0">
-                <a:solidFill>
-                  <a:srgbClr val="D7E3F4"/>
-                </a:solidFill>
-                <a:latin typeface="Consolas"/>
-              </a:rPr>
-              <a:t>Compare the AI answer against the</a:t>
-            </a:r>
-          </a:p>
-          <a:p>
-            <a:pPr>
-              <a:spcAft>
-                <a:spcPts val="200"/>
-              </a:spcAft>
-            </a:pPr>
-            <a:r>
-              <a:rPr sz="1100" b="0" i="0">
-                <a:solidFill>
-                  <a:srgbClr val="D7E3F4"/>
-                </a:solidFill>
-                <a:latin typeface="Consolas"/>
-              </a:rPr>
-              <a:t>REFERENCE (ground-truth) answer.</a:t>
-            </a:r>
-          </a:p>
-          <a:p>
-            <a:pPr>
-              <a:spcAft>
-                <a:spcPts val="200"/>
-              </a:spcAft>
-            </a:pPr>
-            <a:r>
-              <a:rPr sz="1100" b="0" i="0">
-                <a:solidFill>
-                  <a:srgbClr val="D7E3F4"/>
-                </a:solidFill>
-                <a:latin typeface="Consolas"/>
-              </a:rPr>
-              <a:t/>
-            </a:r>
-          </a:p>
-          <a:p>
-            <a:pPr>
-              <a:spcAft>
-                <a:spcPts val="200"/>
-              </a:spcAft>
-            </a:pPr>
-            <a:r>
-              <a:rPr sz="1100" b="0" i="0">
-                <a:solidFill>
-                  <a:srgbClr val="D7E3F4"/>
-                </a:solidFill>
-                <a:latin typeface="Consolas"/>
-              </a:rPr>
-              <a:t>REFERENCE answer: "..."</a:t>
-            </a:r>
-          </a:p>
-          <a:p>
-            <a:pPr>
-              <a:spcAft>
-                <a:spcPts val="200"/>
-              </a:spcAft>
-            </a:pPr>
-            <a:r>
-              <a:rPr sz="1100" b="0" i="0">
-                <a:solidFill>
-                  <a:srgbClr val="D7E3F4"/>
-                </a:solidFill>
-                <a:latin typeface="Consolas"/>
-              </a:rPr>
-              <a:t>AI answer: "..."</a:t>
-            </a:r>
-          </a:p>
-          <a:p>
-            <a:pPr>
-              <a:spcAft>
-                <a:spcPts val="200"/>
-              </a:spcAft>
-            </a:pPr>
-            <a:r>
-              <a:rPr sz="1100" b="0" i="0">
-                <a:solidFill>
-                  <a:srgbClr val="D7E3F4"/>
-                </a:solidFill>
-                <a:latin typeface="Consolas"/>
-              </a:rPr>
-              <a:t/>
-            </a:r>
-          </a:p>
-          <a:p>
-            <a:pPr>
-              <a:spcAft>
-                <a:spcPts val="200"/>
-              </a:spcAft>
-            </a:pPr>
-            <a:r>
-              <a:rPr sz="1100" b="0" i="0">
-                <a:solidFill>
-                  <a:srgbClr val="D7E3F4"/>
-                </a:solidFill>
-                <a:latin typeface="Consolas"/>
-              </a:rPr>
-              <a:t>Score 1-5, judged AGAINST the reference:</a:t>
-            </a:r>
-          </a:p>
-          <a:p>
-            <a:pPr>
-              <a:spcAft>
-                <a:spcPts val="200"/>
-              </a:spcAft>
-            </a:pPr>
-            <a:r>
-              <a:rPr sz="1100" b="0" i="0">
-                <a:solidFill>
-                  <a:srgbClr val="D7E3F4"/>
-                </a:solidFill>
-                <a:latin typeface="Consolas"/>
-              </a:rPr>
-              <a:t>  correctness, citations, completeness,</a:t>
-            </a:r>
-          </a:p>
-          <a:p>
-            <a:pPr>
-              <a:spcAft>
-                <a:spcPts val="200"/>
-              </a:spcAft>
-            </a:pPr>
-            <a:r>
-              <a:rPr sz="1100" b="0" i="0">
-                <a:solidFill>
-                  <a:srgbClr val="D7E3F4"/>
-                </a:solidFill>
-                <a:latin typeface="Consolas"/>
-              </a:rPr>
-              <a:t>  clarity.</a:t>
+              <a:t>per-system scores, per-dimension table, charts, citation metrics, and downloadable JSON.</a:t>
             </a:r>
           </a:p>
         </p:txBody>
@@ -6738,21 +6546,45 @@
                   <a:srgbClr val="FFFFFF"/>
                 </a:solidFill>
               </a:rPr>
-              <a:t>17. Benchmark — The Workflow in the App</a:t>
-            </a:r>
-          </a:p>
-        </p:txBody>
-      </p:sp>
-      <p:sp>
-        <p:nvSpPr>
-          <p:cNvPr id="4" name="TextBox 3"/>
+              <a:t>17. Results — Accuracy by Language</a:t>
+            </a:r>
+          </a:p>
+        </p:txBody>
+      </p:sp>
+      <p:pic>
+        <p:nvPicPr>
+          <p:cNvPr id="4" name="Picture 3" descr="fig_languages.png"/>
+          <p:cNvPicPr>
+            <a:picLocks noChangeAspect="1"/>
+          </p:cNvPicPr>
+          <p:nvPr/>
+        </p:nvPicPr>
+        <p:blipFill>
+          <a:blip r:embed="rId2"/>
+          <a:stretch>
+            <a:fillRect/>
+          </a:stretch>
+        </p:blipFill>
+        <p:spPr>
+          <a:xfrm>
+            <a:off x="548640" y="1280160"/>
+            <a:ext cx="7040209" cy="4297680"/>
+          </a:xfrm>
+          <a:prstGeom prst="rect">
+            <a:avLst/>
+          </a:prstGeom>
+        </p:spPr>
+      </p:pic>
+      <p:sp>
+        <p:nvSpPr>
+          <p:cNvPr id="5" name="TextBox 4"/>
           <p:cNvSpPr txBox="1"/>
           <p:nvPr/>
         </p:nvSpPr>
         <p:spPr>
           <a:xfrm>
-            <a:off x="640080" y="1188720"/>
-            <a:ext cx="10911535" cy="5349240"/>
+            <a:off x="6858000" y="1645920"/>
+            <a:ext cx="4846320" cy="4297680"/>
           </a:xfrm>
           <a:prstGeom prst="rect">
             <a:avLst/>
@@ -6767,116 +6599,70 @@
           <a:p>
             <a:pPr>
               <a:spcAft>
-                <a:spcPts val="900"/>
-              </a:spcAft>
-            </a:pPr>
-            <a:r>
-              <a:rPr sz="1650" b="1" i="0">
+                <a:spcPts val="1300"/>
+              </a:spcAft>
+            </a:pPr>
+            <a:r>
+              <a:rPr sz="1700" b="1" i="0">
                 <a:solidFill>
                   <a:srgbClr val="1E3A5F"/>
                 </a:solidFill>
               </a:rPr>
-              <a:t>• 1 · Generate: </a:t>
-            </a:r>
-            <a:r>
-              <a:rPr sz="1650" b="0" i="0">
+              <a:t>• Arabic (primary legal language): </a:t>
+            </a:r>
+            <a:r>
+              <a:rPr sz="1700" b="0" i="0">
                 <a:solidFill>
                   <a:srgbClr val="444444"/>
                 </a:solidFill>
               </a:rPr>
-              <a:t>set the number of questions; the generator produces grounded questions, shown 10 per page.</a:t>
-            </a:r>
-          </a:p>
-          <a:p>
-            <a:pPr>
-              <a:spcAft>
-                <a:spcPts val="900"/>
-              </a:spcAft>
-            </a:pPr>
-            <a:r>
-              <a:rPr sz="1650" b="1" i="0">
+              <a:t>72% of correct articles in the top 5, 81% in the top 10.</a:t>
+            </a:r>
+          </a:p>
+          <a:p>
+            <a:pPr>
+              <a:spcAft>
+                <a:spcPts val="1300"/>
+              </a:spcAft>
+            </a:pPr>
+            <a:r>
+              <a:rPr sz="1700" b="1" i="0">
                 <a:solidFill>
                   <a:srgbClr val="1E3A5F"/>
                 </a:solidFill>
               </a:rPr>
-              <a:t>• 2 · Reference: </a:t>
-            </a:r>
-            <a:r>
-              <a:rPr sz="1650" b="0" i="0">
+              <a:t>• English / French: </a:t>
+            </a:r>
+            <a:r>
+              <a:rPr sz="1700" b="0" i="0">
                 <a:solidFill>
                   <a:srgbClr val="444444"/>
                 </a:solidFill>
               </a:rPr>
-              <a:t>review them, then type the source-of-truth answer in the editable table (required).</a:t>
-            </a:r>
-          </a:p>
-          <a:p>
-            <a:pPr>
-              <a:spcAft>
-                <a:spcPts val="900"/>
-              </a:spcAft>
-            </a:pPr>
-            <a:r>
-              <a:rPr sz="1650" b="1" i="0">
+              <a:t>lower — the corpus is Arabic-primary; closing this is the main next step.</a:t>
+            </a:r>
+          </a:p>
+          <a:p>
+            <a:pPr>
+              <a:spcAft>
+                <a:spcPts val="800"/>
+              </a:spcAft>
+            </a:pPr>
+            <a:r>
+              <a:rPr sz="1500" b="1" i="0">
                 <a:solidFill>
                   <a:srgbClr val="1E3A5F"/>
                 </a:solidFill>
               </a:rPr>
-              <a:t>• 3 · Select: </a:t>
-            </a:r>
-            <a:r>
-              <a:rPr sz="1650" b="0" i="0">
+              <a:t>• Note: </a:t>
+            </a:r>
+            <a:r>
+              <a:rPr sz="1500" b="0" i="0">
                 <a:solidFill>
                   <a:srgbClr val="444444"/>
                 </a:solidFill>
               </a:rPr>
-              <a:t>choose systems — Multi-Agent vs Single-Agent vs No-RAG.</a:t>
-            </a:r>
-          </a:p>
-          <a:p>
-            <a:pPr>
-              <a:spcAft>
-                <a:spcPts val="900"/>
-              </a:spcAft>
-            </a:pPr>
-            <a:r>
-              <a:rPr sz="1650" b="1" i="0">
-                <a:solidFill>
-                  <a:srgbClr val="1E3A5F"/>
-                </a:solidFill>
-              </a:rPr>
-              <a:t>• 4 · Run: </a:t>
-            </a:r>
-            <a:r>
-              <a:rPr sz="1650" b="0" i="0">
-                <a:solidFill>
-                  <a:srgbClr val="444444"/>
-                </a:solidFill>
-              </a:rPr>
-              <a:t>each system answers; the judge scores every answer against the reference.</a:t>
-            </a:r>
-          </a:p>
-          <a:p>
-            <a:pPr>
-              <a:spcAft>
-                <a:spcPts val="900"/>
-              </a:spcAft>
-            </a:pPr>
-            <a:r>
-              <a:rPr sz="1650" b="1" i="0">
-                <a:solidFill>
-                  <a:srgbClr val="1E3A5F"/>
-                </a:solidFill>
-              </a:rPr>
-              <a:t>• 5 · Results: </a:t>
-            </a:r>
-            <a:r>
-              <a:rPr sz="1650" b="0" i="0">
-                <a:solidFill>
-                  <a:srgbClr val="444444"/>
-                </a:solidFill>
-              </a:rPr>
-              <a:t>per-system scores, per-dimension table, charts, citation metrics, and downloadable JSON.</a:t>
+              <a:t>the article-number metric fairly credits cross-lingual matches.</a:t>
             </a:r>
           </a:p>
         </p:txBody>
@@ -6971,14 +6757,14 @@
                   <a:srgbClr val="FFFFFF"/>
                 </a:solidFill>
               </a:rPr>
-              <a:t>18. Results — Accuracy by Language</a:t>
+              <a:t>18. Results — Search Method &amp; Answer Quality</a:t>
             </a:r>
           </a:p>
         </p:txBody>
       </p:sp>
       <p:pic>
         <p:nvPicPr>
-          <p:cNvPr id="4" name="Picture 3" descr="fig_languages.png"/>
+          <p:cNvPr id="4" name="Picture 3" descr="fig_methods.png"/>
           <p:cNvPicPr>
             <a:picLocks noChangeAspect="1"/>
           </p:cNvPicPr>
@@ -6993,7 +6779,7 @@
         <p:spPr>
           <a:xfrm>
             <a:off x="548640" y="1280160"/>
-            <a:ext cx="7040209" cy="4297680"/>
+            <a:ext cx="7104787" cy="4206240"/>
           </a:xfrm>
           <a:prstGeom prst="rect">
             <a:avLst/>
@@ -7033,7 +6819,7 @@
                   <a:srgbClr val="1E3A5F"/>
                 </a:solidFill>
               </a:rPr>
-              <a:t>• Arabic (primary legal language): </a:t>
+              <a:t>• Best method: </a:t>
             </a:r>
             <a:r>
               <a:rPr sz="1700" b="0" i="0">
@@ -7041,7 +6827,7 @@
                   <a:srgbClr val="444444"/>
                 </a:solidFill>
               </a:rPr>
-              <a:t>72% of correct articles in the top 5, 81% in the top 10.</a:t>
+              <a:t>hybrid (keyword + meaning) finds the correct law most often — chosen default.</a:t>
             </a:r>
           </a:p>
           <a:p>
@@ -7056,7 +6842,7 @@
                   <a:srgbClr val="1E3A5F"/>
                 </a:solidFill>
               </a:rPr>
-              <a:t>• English / French: </a:t>
+              <a:t>• Rejected by data: </a:t>
             </a:r>
             <a:r>
               <a:rPr sz="1700" b="0" i="0">
@@ -7064,30 +6850,53 @@
                   <a:srgbClr val="444444"/>
                 </a:solidFill>
               </a:rPr>
-              <a:t>lower — the corpus is Arabic-primary; closing this is the main next step.</a:t>
-            </a:r>
-          </a:p>
-          <a:p>
-            <a:pPr>
-              <a:spcAft>
-                <a:spcPts val="800"/>
-              </a:spcAft>
-            </a:pPr>
-            <a:r>
-              <a:rPr sz="1500" b="1" i="0">
+              <a:t>a popular English re-ranker made results worse and was removed.</a:t>
+            </a:r>
+          </a:p>
+          <a:p>
+            <a:pPr>
+              <a:spcAft>
+                <a:spcPts val="1300"/>
+              </a:spcAft>
+            </a:pPr>
+            <a:r>
+              <a:rPr sz="1700" b="1" i="0">
                 <a:solidFill>
                   <a:srgbClr val="1E3A5F"/>
                 </a:solidFill>
               </a:rPr>
-              <a:t>• Note: </a:t>
-            </a:r>
-            <a:r>
-              <a:rPr sz="1500" b="0" i="0">
+              <a:t>• Answer quality: </a:t>
+            </a:r>
+            <a:r>
+              <a:rPr sz="1700" b="0" i="0">
                 <a:solidFill>
                   <a:srgbClr val="444444"/>
                 </a:solidFill>
               </a:rPr>
-              <a:t>the article-number metric fairly credits cross-lingual matches.</a:t>
+              <a:t>final memoranda rated ~4.6/5 for legal quality by the judge.</a:t>
+            </a:r>
+          </a:p>
+          <a:p>
+            <a:pPr>
+              <a:spcAft>
+                <a:spcPts val="1300"/>
+              </a:spcAft>
+            </a:pPr>
+            <a:r>
+              <a:rPr sz="1700" b="1" i="0">
+                <a:solidFill>
+                  <a:srgbClr val="1E3A5F"/>
+                </a:solidFill>
+              </a:rPr>
+              <a:t>• Practical: </a:t>
+            </a:r>
+            <a:r>
+              <a:rPr sz="1700" b="0" i="0">
+                <a:solidFill>
+                  <a:srgbClr val="444444"/>
+                </a:solidFill>
+              </a:rPr>
+              <a:t>~2–3 minutes, ~$0.12 per full answer.</a:t>
             </a:r>
           </a:p>
         </p:txBody>
@@ -7182,45 +6991,21 @@
                   <a:srgbClr val="FFFFFF"/>
                 </a:solidFill>
               </a:rPr>
-              <a:t>19. Results — Search Method &amp; Answer Quality</a:t>
-            </a:r>
-          </a:p>
-        </p:txBody>
-      </p:sp>
-      <p:pic>
-        <p:nvPicPr>
-          <p:cNvPr id="4" name="Picture 3" descr="fig_methods.png"/>
-          <p:cNvPicPr>
-            <a:picLocks noChangeAspect="1"/>
-          </p:cNvPicPr>
-          <p:nvPr/>
-        </p:nvPicPr>
-        <p:blipFill>
-          <a:blip r:embed="rId2"/>
-          <a:stretch>
-            <a:fillRect/>
-          </a:stretch>
-        </p:blipFill>
-        <p:spPr>
-          <a:xfrm>
-            <a:off x="548640" y="1280160"/>
-            <a:ext cx="7104787" cy="4206240"/>
-          </a:xfrm>
-          <a:prstGeom prst="rect">
-            <a:avLst/>
-          </a:prstGeom>
-        </p:spPr>
-      </p:pic>
-      <p:sp>
-        <p:nvSpPr>
-          <p:cNvPr id="5" name="TextBox 4"/>
+              <a:t>19. Key Findings</a:t>
+            </a:r>
+          </a:p>
+        </p:txBody>
+      </p:sp>
+      <p:sp>
+        <p:nvSpPr>
+          <p:cNvPr id="4" name="TextBox 3"/>
           <p:cNvSpPr txBox="1"/>
           <p:nvPr/>
         </p:nvSpPr>
         <p:spPr>
           <a:xfrm>
-            <a:off x="6858000" y="1645920"/>
-            <a:ext cx="4846320" cy="4297680"/>
+            <a:off x="640080" y="1188720"/>
+            <a:ext cx="10911535" cy="5349240"/>
           </a:xfrm>
           <a:prstGeom prst="rect">
             <a:avLst/>
@@ -7235,7 +7020,7 @@
           <a:p>
             <a:pPr>
               <a:spcAft>
-                <a:spcPts val="1300"/>
+                <a:spcPts val="800"/>
               </a:spcAft>
             </a:pPr>
             <a:r>
@@ -7244,7 +7029,7 @@
                   <a:srgbClr val="1E3A5F"/>
                 </a:solidFill>
               </a:rPr>
-              <a:t>• Best method: </a:t>
+              <a:t>• Multi-agent works: </a:t>
             </a:r>
             <a:r>
               <a:rPr sz="1700" b="0" i="0">
@@ -7252,13 +7037,13 @@
                   <a:srgbClr val="444444"/>
                 </a:solidFill>
               </a:rPr>
-              <a:t>hybrid (keyword + meaning) finds the correct law most often — chosen default.</a:t>
-            </a:r>
-          </a:p>
-          <a:p>
-            <a:pPr>
-              <a:spcAft>
-                <a:spcPts val="1300"/>
+              <a:t>specialised agents produce grounded, well-structured answers (~4.6/5).</a:t>
+            </a:r>
+          </a:p>
+          <a:p>
+            <a:pPr>
+              <a:spcAft>
+                <a:spcPts val="800"/>
               </a:spcAft>
             </a:pPr>
             <a:r>
@@ -7267,7 +7052,7 @@
                   <a:srgbClr val="1E3A5F"/>
                 </a:solidFill>
               </a:rPr>
-              <a:t>• Rejected by data: </a:t>
+              <a:t>• Evidence-based engineering: </a:t>
             </a:r>
             <a:r>
               <a:rPr sz="1700" b="0" i="0">
@@ -7275,13 +7060,13 @@
                   <a:srgbClr val="444444"/>
                 </a:solidFill>
               </a:rPr>
-              <a:t>a popular English re-ranker made results worse and was removed.</a:t>
-            </a:r>
-          </a:p>
-          <a:p>
-            <a:pPr>
-              <a:spcAft>
-                <a:spcPts val="1300"/>
+              <a:t>hybrid &gt; semantic; the re-ranker hurts; the embedding is validated — all decided by the benchmark.</a:t>
+            </a:r>
+          </a:p>
+          <a:p>
+            <a:pPr>
+              <a:spcAft>
+                <a:spcPts val="800"/>
               </a:spcAft>
             </a:pPr>
             <a:r>
@@ -7290,7 +7075,7 @@
                   <a:srgbClr val="1E3A5F"/>
                 </a:solidFill>
               </a:rPr>
-              <a:t>• Answer quality: </a:t>
+              <a:t>• Bottleneck identified: </a:t>
             </a:r>
             <a:r>
               <a:rPr sz="1700" b="0" i="0">
@@ -7298,13 +7083,13 @@
                   <a:srgbClr val="444444"/>
                 </a:solidFill>
               </a:rPr>
-              <a:t>final memoranda rated ~4.6/5 for legal quality by the judge.</a:t>
-            </a:r>
-          </a:p>
-          <a:p>
-            <a:pPr>
-              <a:spcAft>
-                <a:spcPts val="1300"/>
+              <a:t>answer quality is bounded by retrieval recall — if the article isn't found, it can't be cited.</a:t>
+            </a:r>
+          </a:p>
+          <a:p>
+            <a:pPr>
+              <a:spcAft>
+                <a:spcPts val="800"/>
               </a:spcAft>
             </a:pPr>
             <a:r>
@@ -7313,7 +7098,7 @@
                   <a:srgbClr val="1E3A5F"/>
                 </a:solidFill>
               </a:rPr>
-              <a:t>• Practical: </a:t>
+              <a:t>• Precision fix, measured: </a:t>
             </a:r>
             <a:r>
               <a:rPr sz="1700" b="0" i="0">
@@ -7321,7 +7106,7 @@
                   <a:srgbClr val="444444"/>
                 </a:solidFill>
               </a:rPr>
-              <a:t>~2–3 minutes, ~$0.12 per full answer.</a:t>
+              <a:t>tightening citations raised citation-F1 ~3× (0.04 → 0.13) on the same questions.</a:t>
             </a:r>
           </a:p>
         </p:txBody>
@@ -7416,7 +7201,7 @@
                   <a:srgbClr val="FFFFFF"/>
                 </a:solidFill>
               </a:rPr>
-              <a:t>20. Key Findings</a:t>
+              <a:t>20. Engineering &amp; Reproducibility</a:t>
             </a:r>
           </a:p>
         </p:txBody>
@@ -7445,93 +7230,139 @@
           <a:p>
             <a:pPr>
               <a:spcAft>
-                <a:spcPts val="800"/>
-              </a:spcAft>
-            </a:pPr>
-            <a:r>
-              <a:rPr sz="1700" b="1" i="0">
+                <a:spcPts val="900"/>
+              </a:spcAft>
+            </a:pPr>
+            <a:r>
+              <a:rPr sz="1650" b="1" i="0">
                 <a:solidFill>
                   <a:srgbClr val="1E3A5F"/>
                 </a:solidFill>
               </a:rPr>
-              <a:t>• Multi-agent works: </a:t>
-            </a:r>
-            <a:r>
-              <a:rPr sz="1700" b="0" i="0">
+              <a:t>• Standardised model: </a:t>
+            </a:r>
+            <a:r>
+              <a:rPr sz="1650" b="0" i="0">
                 <a:solidFill>
                   <a:srgbClr val="444444"/>
                 </a:solidFill>
               </a:rPr>
-              <a:t>specialised agents produce grounded, well-structured answers (~4.6/5).</a:t>
-            </a:r>
-          </a:p>
-          <a:p>
-            <a:pPr>
-              <a:spcAft>
-                <a:spcPts val="800"/>
-              </a:spcAft>
-            </a:pPr>
-            <a:r>
-              <a:rPr sz="1700" b="1" i="0">
+              <a:t>Claude Sonnet 4.5 (selectable: 4.6 / Opus / Haiku).</a:t>
+            </a:r>
+          </a:p>
+          <a:p>
+            <a:pPr>
+              <a:spcAft>
+                <a:spcPts val="900"/>
+              </a:spcAft>
+            </a:pPr>
+            <a:r>
+              <a:rPr sz="1650" b="1" i="0">
                 <a:solidFill>
                   <a:srgbClr val="1E3A5F"/>
                 </a:solidFill>
               </a:rPr>
-              <a:t>• Evidence-based engineering: </a:t>
-            </a:r>
-            <a:r>
-              <a:rPr sz="1700" b="0" i="0">
+              <a:t>• Headless pipeline: </a:t>
+            </a:r>
+            <a:r>
+              <a:rPr sz="1650" b="0" i="0">
                 <a:solidFill>
                   <a:srgbClr val="444444"/>
                 </a:solidFill>
               </a:rPr>
-              <a:t>hybrid &gt; semantic; the re-ranker hurts; the embedding is validated — all decided by the benchmark.</a:t>
-            </a:r>
-          </a:p>
-          <a:p>
-            <a:pPr>
-              <a:spcAft>
-                <a:spcPts val="800"/>
-              </a:spcAft>
-            </a:pPr>
-            <a:r>
-              <a:rPr sz="1700" b="1" i="0">
+              <a:t>the full system runs without the UI for batch evaluation.</a:t>
+            </a:r>
+          </a:p>
+          <a:p>
+            <a:pPr>
+              <a:spcAft>
+                <a:spcPts val="900"/>
+              </a:spcAft>
+            </a:pPr>
+            <a:r>
+              <a:rPr sz="1650" b="1" i="0">
                 <a:solidFill>
                   <a:srgbClr val="1E3A5F"/>
                 </a:solidFill>
               </a:rPr>
-              <a:t>• Bottleneck identified: </a:t>
-            </a:r>
-            <a:r>
-              <a:rPr sz="1700" b="0" i="0">
+              <a:t>• Tests + CI: </a:t>
+            </a:r>
+            <a:r>
+              <a:rPr sz="1650" b="0" i="0">
                 <a:solidFill>
                   <a:srgbClr val="444444"/>
                 </a:solidFill>
               </a:rPr>
-              <a:t>answer quality is bounded by retrieval recall — if the article isn't found, it can't be cited.</a:t>
-            </a:r>
-          </a:p>
-          <a:p>
-            <a:pPr>
-              <a:spcAft>
-                <a:spcPts val="800"/>
-              </a:spcAft>
-            </a:pPr>
-            <a:r>
-              <a:rPr sz="1700" b="1" i="0">
+              <a:t>unit tests and GitHub Actions run automatically on every change.</a:t>
+            </a:r>
+          </a:p>
+          <a:p>
+            <a:pPr>
+              <a:spcAft>
+                <a:spcPts val="900"/>
+              </a:spcAft>
+            </a:pPr>
+            <a:r>
+              <a:rPr sz="1650" b="1" i="0">
                 <a:solidFill>
                   <a:srgbClr val="1E3A5F"/>
                 </a:solidFill>
               </a:rPr>
-              <a:t>• Precision fix, measured: </a:t>
-            </a:r>
-            <a:r>
-              <a:rPr sz="1700" b="0" i="0">
+              <a:t>• Telemetry: </a:t>
+            </a:r>
+            <a:r>
+              <a:rPr sz="1650" b="0" i="0">
                 <a:solidFill>
                   <a:srgbClr val="444444"/>
                 </a:solidFill>
               </a:rPr>
-              <a:t>tightening citations raised citation-F1 ~3× (0.04 → 0.13) on the same questions.</a:t>
+              <a:t>tokens, cost, and latency tracked per agent.</a:t>
+            </a:r>
+          </a:p>
+          <a:p>
+            <a:pPr>
+              <a:spcAft>
+                <a:spcPts val="900"/>
+              </a:spcAft>
+            </a:pPr>
+            <a:r>
+              <a:rPr sz="1650" b="1" i="0">
+                <a:solidFill>
+                  <a:srgbClr val="1E3A5F"/>
+                </a:solidFill>
+              </a:rPr>
+              <a:t>• Reproducible: </a:t>
+            </a:r>
+            <a:r>
+              <a:rPr sz="1650" b="0" i="0">
+                <a:solidFill>
+                  <a:srgbClr val="444444"/>
+                </a:solidFill>
+              </a:rPr>
+              <a:t>one command rebuilds the index; the benchmark is regenerable.</a:t>
+            </a:r>
+          </a:p>
+          <a:p>
+            <a:pPr>
+              <a:spcAft>
+                <a:spcPts val="900"/>
+              </a:spcAft>
+            </a:pPr>
+            <a:r>
+              <a:rPr sz="1650" b="1" i="0">
+                <a:solidFill>
+                  <a:srgbClr val="1E3A5F"/>
+                </a:solidFill>
+              </a:rPr>
+              <a:t>• Version-controlled: </a:t>
+            </a:r>
+            <a:r>
+              <a:rPr sz="1650" b="0" i="0">
+                <a:solidFill>
+                  <a:srgbClr val="444444"/>
+                </a:solidFill>
+              </a:rPr>
+              <a:t>all work committed and pushed to GitHub.</a:t>
             </a:r>
           </a:p>
         </p:txBody>
@@ -7626,7 +7457,7 @@
                   <a:srgbClr val="FFFFFF"/>
                 </a:solidFill>
               </a:rPr>
-              <a:t>21. Engineering &amp; Reproducibility</a:t>
+              <a:t>21. Limitations &amp; Future Work</a:t>
             </a:r>
           </a:p>
         </p:txBody>
@@ -7655,139 +7486,116 @@
           <a:p>
             <a:pPr>
               <a:spcAft>
-                <a:spcPts val="900"/>
-              </a:spcAft>
-            </a:pPr>
-            <a:r>
-              <a:rPr sz="1650" b="1" i="0">
+                <a:spcPts val="800"/>
+              </a:spcAft>
+            </a:pPr>
+            <a:r>
+              <a:rPr sz="1700" b="1" i="0">
                 <a:solidFill>
                   <a:srgbClr val="1E3A5F"/>
                 </a:solidFill>
               </a:rPr>
-              <a:t>• Standardised model: </a:t>
-            </a:r>
-            <a:r>
-              <a:rPr sz="1650" b="0" i="0">
+              <a:t>• Limitation: </a:t>
+            </a:r>
+            <a:r>
+              <a:rPr sz="1700" b="0" i="0">
                 <a:solidFill>
                   <a:srgbClr val="444444"/>
                 </a:solidFill>
               </a:rPr>
-              <a:t>Claude Sonnet 4.5 (selectable: 4.6 / Opus / Haiku).</a:t>
-            </a:r>
-          </a:p>
-          <a:p>
-            <a:pPr>
-              <a:spcAft>
-                <a:spcPts val="900"/>
-              </a:spcAft>
-            </a:pPr>
-            <a:r>
-              <a:rPr sz="1650" b="1" i="0">
+              <a:t>English/French retrieval lags Arabic (~40% vs 72%).</a:t>
+            </a:r>
+          </a:p>
+          <a:p>
+            <a:pPr>
+              <a:spcAft>
+                <a:spcPts val="800"/>
+              </a:spcAft>
+            </a:pPr>
+            <a:r>
+              <a:rPr sz="1700" b="1" i="0">
                 <a:solidFill>
                   <a:srgbClr val="1E3A5F"/>
                 </a:solidFill>
               </a:rPr>
-              <a:t>• Headless pipeline: </a:t>
-            </a:r>
-            <a:r>
-              <a:rPr sz="1650" b="0" i="0">
+              <a:t>• Scope: </a:t>
+            </a:r>
+            <a:r>
+              <a:rPr sz="1700" b="0" i="0">
                 <a:solidFill>
                   <a:srgbClr val="444444"/>
                 </a:solidFill>
               </a:rPr>
-              <a:t>the full system runs without the UI for batch evaluation.</a:t>
-            </a:r>
-          </a:p>
-          <a:p>
-            <a:pPr>
-              <a:spcAft>
-                <a:spcPts val="900"/>
-              </a:spcAft>
-            </a:pPr>
-            <a:r>
-              <a:rPr sz="1650" b="1" i="0">
+              <a:t>corpus is criminal (Penal) law only; single-article gold is strict for multi-article questions.</a:t>
+            </a:r>
+          </a:p>
+          <a:p>
+            <a:pPr>
+              <a:spcAft>
+                <a:spcPts val="800"/>
+              </a:spcAft>
+            </a:pPr>
+            <a:r>
+              <a:rPr sz="1700" b="1" i="0">
                 <a:solidFill>
                   <a:srgbClr val="1E3A5F"/>
                 </a:solidFill>
               </a:rPr>
-              <a:t>• Tests + CI: </a:t>
-            </a:r>
-            <a:r>
-              <a:rPr sz="1650" b="0" i="0">
+              <a:t>• Next — retrieval: </a:t>
+            </a:r>
+            <a:r>
+              <a:rPr sz="1700" b="0" i="0">
                 <a:solidFill>
                   <a:srgbClr val="444444"/>
                 </a:solidFill>
               </a:rPr>
-              <a:t>unit tests and GitHub Actions run automatically on every change.</a:t>
-            </a:r>
-          </a:p>
-          <a:p>
-            <a:pPr>
-              <a:spcAft>
-                <a:spcPts val="900"/>
-              </a:spcAft>
-            </a:pPr>
-            <a:r>
-              <a:rPr sz="1650" b="1" i="0">
+              <a:t>evaluate the built-in cross-lingual translation; test stronger multilingual embeddings.</a:t>
+            </a:r>
+          </a:p>
+          <a:p>
+            <a:pPr>
+              <a:spcAft>
+                <a:spcPts val="800"/>
+              </a:spcAft>
+            </a:pPr>
+            <a:r>
+              <a:rPr sz="1700" b="1" i="0">
                 <a:solidFill>
                   <a:srgbClr val="1E3A5F"/>
                 </a:solidFill>
               </a:rPr>
-              <a:t>• Telemetry: </a:t>
-            </a:r>
-            <a:r>
-              <a:rPr sz="1650" b="0" i="0">
+              <a:t>• Next — corpus &amp; rigor: </a:t>
+            </a:r>
+            <a:r>
+              <a:rPr sz="1700" b="0" i="0">
                 <a:solidFill>
                   <a:srgbClr val="444444"/>
                 </a:solidFill>
               </a:rPr>
-              <a:t>tokens, cost, and latency tracked per agent.</a:t>
-            </a:r>
-          </a:p>
-          <a:p>
-            <a:pPr>
-              <a:spcAft>
-                <a:spcPts val="900"/>
-              </a:spcAft>
-            </a:pPr>
-            <a:r>
-              <a:rPr sz="1650" b="1" i="0">
+              <a:t>add contract law + French texts (pipeline supports it); collect expert reference answers at scale.</a:t>
+            </a:r>
+          </a:p>
+          <a:p>
+            <a:pPr>
+              <a:spcAft>
+                <a:spcPts val="800"/>
+              </a:spcAft>
+            </a:pPr>
+            <a:r>
+              <a:rPr sz="1700" b="1" i="0">
                 <a:solidFill>
                   <a:srgbClr val="1E3A5F"/>
                 </a:solidFill>
               </a:rPr>
-              <a:t>• Reproducible: </a:t>
-            </a:r>
-            <a:r>
-              <a:rPr sz="1650" b="0" i="0">
+              <a:t>• Next — agents &amp; eval: </a:t>
+            </a:r>
+            <a:r>
+              <a:rPr sz="1700" b="0" i="0">
                 <a:solidFill>
                   <a:srgbClr val="444444"/>
                 </a:solidFill>
               </a:rPr>
-              <a:t>one command rebuilds the index; the benchmark is regenerable.</a:t>
-            </a:r>
-          </a:p>
-          <a:p>
-            <a:pPr>
-              <a:spcAft>
-                <a:spcPts val="900"/>
-              </a:spcAft>
-            </a:pPr>
-            <a:r>
-              <a:rPr sz="1650" b="1" i="0">
-                <a:solidFill>
-                  <a:srgbClr val="1E3A5F"/>
-                </a:solidFill>
-              </a:rPr>
-              <a:t>• Version-controlled: </a:t>
-            </a:r>
-            <a:r>
-              <a:rPr sz="1650" b="0" i="0">
-                <a:solidFill>
-                  <a:srgbClr val="444444"/>
-                </a:solidFill>
-              </a:rPr>
-              <a:t>all work committed and pushed to GitHub.</a:t>
+              <a:t>structured reasoning, a verifier agent, and a full statistical comparison run.</a:t>
             </a:r>
           </a:p>
         </p:txBody>
@@ -7819,7 +7627,7 @@
         <p:spPr>
           <a:xfrm>
             <a:off x="0" y="0"/>
-            <a:ext cx="12191695" cy="960120"/>
+            <a:ext cx="12191695" cy="6858000"/>
           </a:xfrm>
           <a:prstGeom prst="rect">
             <a:avLst/>
@@ -7856,239 +7664,6 @@
       </p:sp>
       <p:sp>
         <p:nvSpPr>
-          <p:cNvPr id="3" name="TextBox 2"/>
-          <p:cNvSpPr txBox="1"/>
-          <p:nvPr/>
-        </p:nvSpPr>
-        <p:spPr>
-          <a:xfrm>
-            <a:off x="457200" y="73152"/>
-            <a:ext cx="11277295" cy="822960"/>
-          </a:xfrm>
-          <a:prstGeom prst="rect">
-            <a:avLst/>
-          </a:prstGeom>
-          <a:noFill/>
-        </p:spPr>
-        <p:txBody>
-          <a:bodyPr wrap="square">
-            <a:spAutoFit/>
-          </a:bodyPr>
-          <a:lstStyle/>
-          <a:p>
-            <a:r>
-              <a:rPr sz="2700" b="1" i="0">
-                <a:solidFill>
-                  <a:srgbClr val="FFFFFF"/>
-                </a:solidFill>
-              </a:rPr>
-              <a:t>22. Limitations &amp; Future Work</a:t>
-            </a:r>
-          </a:p>
-        </p:txBody>
-      </p:sp>
-      <p:sp>
-        <p:nvSpPr>
-          <p:cNvPr id="4" name="TextBox 3"/>
-          <p:cNvSpPr txBox="1"/>
-          <p:nvPr/>
-        </p:nvSpPr>
-        <p:spPr>
-          <a:xfrm>
-            <a:off x="640080" y="1188720"/>
-            <a:ext cx="10911535" cy="5349240"/>
-          </a:xfrm>
-          <a:prstGeom prst="rect">
-            <a:avLst/>
-          </a:prstGeom>
-          <a:noFill/>
-        </p:spPr>
-        <p:txBody>
-          <a:bodyPr wrap="square">
-            <a:spAutoFit/>
-          </a:bodyPr>
-          <a:lstStyle/>
-          <a:p>
-            <a:pPr>
-              <a:spcAft>
-                <a:spcPts val="800"/>
-              </a:spcAft>
-            </a:pPr>
-            <a:r>
-              <a:rPr sz="1700" b="1" i="0">
-                <a:solidFill>
-                  <a:srgbClr val="1E3A5F"/>
-                </a:solidFill>
-              </a:rPr>
-              <a:t>• Limitation: </a:t>
-            </a:r>
-            <a:r>
-              <a:rPr sz="1700" b="0" i="0">
-                <a:solidFill>
-                  <a:srgbClr val="444444"/>
-                </a:solidFill>
-              </a:rPr>
-              <a:t>English/French retrieval lags Arabic (~40% vs 72%).</a:t>
-            </a:r>
-          </a:p>
-          <a:p>
-            <a:pPr>
-              <a:spcAft>
-                <a:spcPts val="800"/>
-              </a:spcAft>
-            </a:pPr>
-            <a:r>
-              <a:rPr sz="1700" b="1" i="0">
-                <a:solidFill>
-                  <a:srgbClr val="1E3A5F"/>
-                </a:solidFill>
-              </a:rPr>
-              <a:t>• Scope: </a:t>
-            </a:r>
-            <a:r>
-              <a:rPr sz="1700" b="0" i="0">
-                <a:solidFill>
-                  <a:srgbClr val="444444"/>
-                </a:solidFill>
-              </a:rPr>
-              <a:t>corpus is criminal (Penal) law only; single-article gold is strict for multi-article questions.</a:t>
-            </a:r>
-          </a:p>
-          <a:p>
-            <a:pPr>
-              <a:spcAft>
-                <a:spcPts val="800"/>
-              </a:spcAft>
-            </a:pPr>
-            <a:r>
-              <a:rPr sz="1700" b="1" i="0">
-                <a:solidFill>
-                  <a:srgbClr val="1E3A5F"/>
-                </a:solidFill>
-              </a:rPr>
-              <a:t>• Next — retrieval: </a:t>
-            </a:r>
-            <a:r>
-              <a:rPr sz="1700" b="0" i="0">
-                <a:solidFill>
-                  <a:srgbClr val="444444"/>
-                </a:solidFill>
-              </a:rPr>
-              <a:t>evaluate the built-in cross-lingual translation; test stronger multilingual embeddings.</a:t>
-            </a:r>
-          </a:p>
-          <a:p>
-            <a:pPr>
-              <a:spcAft>
-                <a:spcPts val="800"/>
-              </a:spcAft>
-            </a:pPr>
-            <a:r>
-              <a:rPr sz="1700" b="1" i="0">
-                <a:solidFill>
-                  <a:srgbClr val="1E3A5F"/>
-                </a:solidFill>
-              </a:rPr>
-              <a:t>• Next — corpus &amp; rigor: </a:t>
-            </a:r>
-            <a:r>
-              <a:rPr sz="1700" b="0" i="0">
-                <a:solidFill>
-                  <a:srgbClr val="444444"/>
-                </a:solidFill>
-              </a:rPr>
-              <a:t>add contract law + French texts (pipeline supports it); collect expert reference answers at scale.</a:t>
-            </a:r>
-          </a:p>
-          <a:p>
-            <a:pPr>
-              <a:spcAft>
-                <a:spcPts val="800"/>
-              </a:spcAft>
-            </a:pPr>
-            <a:r>
-              <a:rPr sz="1700" b="1" i="0">
-                <a:solidFill>
-                  <a:srgbClr val="1E3A5F"/>
-                </a:solidFill>
-              </a:rPr>
-              <a:t>• Next — agents &amp; eval: </a:t>
-            </a:r>
-            <a:r>
-              <a:rPr sz="1700" b="0" i="0">
-                <a:solidFill>
-                  <a:srgbClr val="444444"/>
-                </a:solidFill>
-              </a:rPr>
-              <a:t>structured reasoning, a verifier agent, and a full statistical comparison run.</a:t>
-            </a:r>
-          </a:p>
-        </p:txBody>
-      </p:sp>
-    </p:spTree>
-  </p:cSld>
-  <p:clrMapOvr>
-    <a:masterClrMapping/>
-  </p:clrMapOvr>
-</p:sld>
-</file>
-
-<file path=ppt/slides/slide26.xml><?xml version="1.0" encoding="utf-8"?>
-<p:sld xmlns:a="http://schemas.openxmlformats.org/drawingml/2006/main" xmlns:p="http://schemas.openxmlformats.org/presentationml/2006/main" xmlns:r="http://schemas.openxmlformats.org/officeDocument/2006/relationships">
-  <p:cSld>
-    <p:spTree>
-      <p:nvGrpSpPr>
-        <p:cNvPr id="1" name=""/>
-        <p:cNvGrpSpPr/>
-        <p:nvPr/>
-      </p:nvGrpSpPr>
-      <p:grpSpPr/>
-      <p:sp>
-        <p:nvSpPr>
-          <p:cNvPr id="2" name="Rectangle 1"/>
-          <p:cNvSpPr/>
-          <p:nvPr/>
-        </p:nvSpPr>
-        <p:spPr>
-          <a:xfrm>
-            <a:off x="0" y="0"/>
-            <a:ext cx="12191695" cy="6858000"/>
-          </a:xfrm>
-          <a:prstGeom prst="rect">
-            <a:avLst/>
-          </a:prstGeom>
-          <a:solidFill>
-            <a:srgbClr val="1E3A5F"/>
-          </a:solidFill>
-          <a:ln>
-            <a:noFill/>
-          </a:ln>
-          <a:effectLst/>
-        </p:spPr>
-        <p:style>
-          <a:lnRef idx="1">
-            <a:schemeClr val="accent1"/>
-          </a:lnRef>
-          <a:fillRef idx="3">
-            <a:schemeClr val="accent1"/>
-          </a:fillRef>
-          <a:effectRef idx="2">
-            <a:schemeClr val="accent1"/>
-          </a:effectRef>
-          <a:fontRef idx="minor">
-            <a:schemeClr val="lt1"/>
-          </a:fontRef>
-        </p:style>
-        <p:txBody>
-          <a:bodyPr rtlCol="0" anchor="ctr"/>
-          <a:lstStyle/>
-          <a:p>
-            <a:pPr algn="ctr"/>
-          </a:p>
-        </p:txBody>
-      </p:sp>
-      <p:sp>
-        <p:nvSpPr>
           <p:cNvPr id="3" name="Rectangle 2"/>
           <p:cNvSpPr/>
           <p:nvPr/>
@@ -8159,7 +7734,7 @@
                   <a:srgbClr val="FFFFFF"/>
                 </a:solidFill>
               </a:rPr>
-              <a:t>23. Conclusion &amp; Contributions</a:t>
+              <a:t>22. Conclusion &amp; Contributions</a:t>
             </a:r>
           </a:p>
         </p:txBody>
